--- a/_implementation-notes/evening-series/FotH Evening Session 13 Slides DRAFT v1.pptx
+++ b/_implementation-notes/evening-series/FotH Evening Session 13 Slides DRAFT v1.pptx
@@ -10,6 +10,7 @@
   <p:sldIdLst>
     <p:sldId id="256" r:id="rId2"/>
     <p:sldId id="297" r:id="rId165"/>
+    <p:sldId id="549" r:id="rId23"/>
     <p:sldId id="298" r:id="rId166"/>
     <p:sldId id="437" r:id="rId167"/>
     <p:sldId id="438" r:id="rId168"/>
@@ -19,7 +20,8 @@
     <p:sldId id="441" r:id="rId172"/>
     <p:sldId id="442" r:id="rId173"/>
     <p:sldId id="443" r:id="rId174"/>
-    <p:sldId id="536" r:id="rId175"/>
+    <p:sldId id="550" r:id="rId24"/>
+    <p:sldId id="551" r:id="rId25"/>
     <p:sldId id="444" r:id="rId176"/>
     <p:sldId id="445" r:id="rId177"/>
   </p:sldIdLst>
@@ -751,6 +753,148 @@
 </p:notes>
 </file>
 
+<file path=ppt/notesSlides/notesSlide15.xml><?xml version="1.0" encoding="utf-8"?>
+<p:notes xmlns:a="http://schemas.openxmlformats.org/drawingml/2006/main" xmlns:p="http://schemas.openxmlformats.org/presentationml/2006/main" xmlns:r="http://schemas.openxmlformats.org/officeDocument/2006/relationships">
+  <p:cSld>
+    <p:spTree>
+      <p:nvGrpSpPr>
+        <p:cNvPr id="1" name=""/>
+        <p:cNvGrpSpPr/>
+        <p:nvPr/>
+      </p:nvGrpSpPr>
+      <p:grpSpPr>
+        <a:xfrm>
+          <a:off x="0" y="0"/>
+          <a:ext cx="0" cy="0"/>
+          <a:chOff x="0" y="0"/>
+          <a:chExt cx="0" cy="0"/>
+        </a:xfrm>
+      </p:grpSpPr>
+      <p:sp>
+        <p:nvSpPr>
+          <p:cNvPr id="2" name="Notes Placeholder 1"/>
+          <p:cNvSpPr>
+            <a:spLocks noGrp="1"/>
+          </p:cNvSpPr>
+          <p:nvPr>
+            <p:ph type="body" idx="1"/>
+          </p:nvPr>
+        </p:nvSpPr>
+        <p:spPr/>
+        <p:txBody>
+          <a:bodyPr/>
+          <a:lstStyle/>
+          <a:p>
+            <a:r>
+              <a:t>S13 · WELCOME · LEAD: CONTAINER HOLDER · GROUNDING — every session opens on this map</a:t>
+            </a:r>
+          </a:p>
+          <a:p>
+            <a:r>
+              <a:t>BEATS:</a:t>
+            </a:r>
+          </a:p>
+          <a:p>
+            <a:r>
+              <a:t>1. Locate tonight on the map, plainly: Session 13 stands in the fourth box — Connect with Mission: the works He prepared (Eph. 2:10). Each connection makes the next one real (Matt. 22:37–40).</a:t>
+            </a:r>
+          </a:p>
+          <a:p>
+            <a:r>
+              <a:t>2. The four boxes are one journey — each connection makes the next one real — rooted in the two great commandments: love God, love neighbor (Matt 22:37–40).</a:t>
+            </a:r>
+          </a:p>
+          <a:p>
+            <a:r>
+              <a:t>3. This is also the 'where we are on the map' minute the welcome owes any newcomer.</a:t>
+            </a:r>
+          </a:p>
+          <a:p>
+            <a:r>
+              <a:t>CUES: Two minutes at most; then tonight's road.</a:t>
+            </a:r>
+          </a:p>
+        </p:txBody>
+      </p:sp>
+    </p:spTree>
+  </p:cSld>
+  <p:clrMapOvr>
+    <a:masterClrMapping/>
+  </p:clrMapOvr>
+</p:notes>
+</file>
+
+<file path=ppt/notesSlides/notesSlide16.xml><?xml version="1.0" encoding="utf-8"?>
+<p:notes xmlns:a="http://schemas.openxmlformats.org/drawingml/2006/main" xmlns:p="http://schemas.openxmlformats.org/presentationml/2006/main" xmlns:r="http://schemas.openxmlformats.org/officeDocument/2006/relationships">
+  <p:cSld>
+    <p:spTree>
+      <p:nvGrpSpPr>
+        <p:cNvPr id="1" name=""/>
+        <p:cNvGrpSpPr/>
+        <p:nvPr/>
+      </p:nvGrpSpPr>
+      <p:grpSpPr>
+        <a:xfrm>
+          <a:off x="0" y="0"/>
+          <a:ext cx="0" cy="0"/>
+          <a:chOff x="0" y="0"/>
+          <a:chExt cx="0" cy="0"/>
+        </a:xfrm>
+      </p:grpSpPr>
+      <p:sp>
+        <p:nvSpPr>
+          <p:cNvPr id="2" name="Notes Placeholder 1"/>
+          <p:cNvSpPr>
+            <a:spLocks noGrp="1"/>
+          </p:cNvSpPr>
+          <p:nvPr>
+            <p:ph type="body" idx="1"/>
+          </p:nvPr>
+        </p:nvSpPr>
+        <p:spPr/>
+        <p:txBody>
+          <a:bodyPr/>
+          <a:lstStyle/>
+          <a:p>
+            <a:r>
+              <a:t>S13 · COMMISSIONING · LEAD: CONTENT PRESENTER</a:t>
+            </a:r>
+          </a:p>
+          <a:p>
+            <a:r>
+              <a:t>BEATS:</a:t>
+            </a:r>
+          </a:p>
+          <a:p>
+            <a:r>
+              <a:t>1. The sheet on the screen is the sheet in their hands — walk it, don't read it.</a:t>
+            </a:r>
+          </a:p>
+          <a:p>
+            <a:r>
+              <a:t>2. The standing rhythm first: the morning question, the evening journal line — one box per day on the week-grids.</a:t>
+            </a:r>
+          </a:p>
+          <a:p>
+            <a:r>
+              <a:t>3. A missed box is never a failure — it is an invitation to return.</a:t>
+            </a:r>
+          </a:p>
+          <a:p>
+            <a:r>
+              <a:t>CUES: The four parts are the next slide.</a:t>
+            </a:r>
+          </a:p>
+        </p:txBody>
+      </p:sp>
+    </p:spTree>
+  </p:cSld>
+  <p:clrMapOvr>
+    <a:masterClrMapping/>
+  </p:clrMapOvr>
+</p:notes>
+</file>
+
 <file path=ppt/notesSlides/notesSlide162.xml><?xml version="1.0" encoding="utf-8"?>
 <p:notes xmlns:a="http://schemas.openxmlformats.org/drawingml/2006/main" xmlns:r="http://schemas.openxmlformats.org/officeDocument/2006/relationships" xmlns:p="http://schemas.openxmlformats.org/presentationml/2006/main">
   <p:cSld>
@@ -896,14 +1040,17 @@
           <a:lstStyle/>
           <a:p>
             <a:r>
-              <a:rPr lang="en-US" sz="1200"/>
               <a:t>S13 · 7:00–7:08 · LEAD: CONTAINER HOLDER CIRCLE</a:t>
             </a:r>
           </a:p>
           <a:p>
             <a:r>
-              <a:rPr lang="en-US" sz="1200"/>
               <a:t>BEATS: 1. Run the familiar open, unhurried: blessing; the four conditions — Safe, Present, Clear, Intentional; phones away. 2. Keep the container reminder brief today: what is said here stays here; nothing is required. 3. Settle the room before moving on — settled beats punctual.</a:t>
+            </a:r>
+          </a:p>
+          <a:p>
+            <a:r>
+              <a:t>PAIR LEAD: name the leading pair in the welcome — two leaders hold tonight, and the room will see the evening handed back and forth between them; that is the design. The pair practices the session together beforehand.</a:t>
             </a:r>
           </a:p>
         </p:txBody>
@@ -1156,20 +1303,22 @@
           <a:lstStyle/>
           <a:p>
             <a:r>
-              <a:rPr lang="en-US" sz="1200"/>
               <a:t>S13 · 7:35–7:36 · LEAD: CONTENT PRESENTER CIRCLE</a:t>
             </a:r>
           </a:p>
           <a:p>
             <a:r>
-              <a:rPr lang="en-US" sz="1200"/>
               <a:t>BEATS: 1. Frame the two exercises: Gifts and Passions (~20 min, H13.1), then Downhill Mission (~20 min, H13.2) — each person ends by naming one downhill sentence to the pair. 2. Pray the sending prayer. 3. Name each pair's families and its Companion; send them for forty minutes.</a:t>
             </a:r>
           </a:p>
           <a:p>
             <a:r>
-              <a:rPr lang="en-US" sz="1200"/>
               <a:t>CUES: A parent opens each sharing round — arranged this week (Run Card), never a cold call on a teen; teens choose their own depth; pass holds. About ten or fewer today? Skip the split — one circle.</a:t>
+            </a:r>
+          </a:p>
+          <a:p>
+            <a:r>
+              <a:t>SMALL ROOM: the split is only necessary if the room is large enough to need it. With six or so, stay one circle — or quick pair work in place, knee to knee. Pair work is also the standing time-recovery lever: a full split-and-merge costs about five minutes.</a:t>
             </a:r>
           </a:p>
         </p:txBody>
@@ -1247,6 +1396,72 @@
 </p:notes>
 </file>
 
+<file path=ppt/notesSlides/notesSlide17.xml><?xml version="1.0" encoding="utf-8"?>
+<p:notes xmlns:a="http://schemas.openxmlformats.org/drawingml/2006/main" xmlns:p="http://schemas.openxmlformats.org/presentationml/2006/main" xmlns:r="http://schemas.openxmlformats.org/officeDocument/2006/relationships">
+  <p:cSld>
+    <p:spTree>
+      <p:nvGrpSpPr>
+        <p:cNvPr id="1" name=""/>
+        <p:cNvGrpSpPr/>
+        <p:nvPr/>
+      </p:nvGrpSpPr>
+      <p:grpSpPr>
+        <a:xfrm>
+          <a:off x="0" y="0"/>
+          <a:ext cx="0" cy="0"/>
+          <a:chOff x="0" y="0"/>
+          <a:chExt cx="0" cy="0"/>
+        </a:xfrm>
+      </p:grpSpPr>
+      <p:sp>
+        <p:nvSpPr>
+          <p:cNvPr id="2" name="Notes Placeholder 1"/>
+          <p:cNvSpPr>
+            <a:spLocks noGrp="1"/>
+          </p:cNvSpPr>
+          <p:nvPr>
+            <p:ph type="body" idx="1"/>
+          </p:nvPr>
+        </p:nvSpPr>
+        <p:spPr/>
+        <p:txBody>
+          <a:bodyPr/>
+          <a:lstStyle/>
+          <a:p>
+            <a:r>
+              <a:t>S13 · COMMISSIONING · LEAD: CONTENT PRESENTER</a:t>
+            </a:r>
+          </a:p>
+          <a:p>
+            <a:r>
+              <a:t>BEATS:</a:t>
+            </a:r>
+          </a:p>
+          <a:p>
+            <a:r>
+              <a:t>1. The four parts, in order: the homework practice, week one; the end-of-week-one check-in; the homework practice, week two; one sentence of preparation.</a:t>
+            </a:r>
+          </a:p>
+          <a:p>
+            <a:r>
+              <a:t>2. Check-in partners are named aloud before leaving this slide — the sheet has the line to write the name.</a:t>
+            </a:r>
+          </a:p>
+          <a:p>
+            <a:r>
+              <a:t>GUARD: The sheet-walk, not a re-teach.</a:t>
+            </a:r>
+          </a:p>
+        </p:txBody>
+      </p:sp>
+    </p:spTree>
+  </p:cSld>
+  <p:clrMapOvr>
+    <a:masterClrMapping/>
+  </p:clrMapOvr>
+</p:notes>
+</file>
+
 <file path=ppt/notesSlides/notesSlide170.xml><?xml version="1.0" encoding="utf-8"?>
 <p:notes xmlns:a="http://schemas.openxmlformats.org/drawingml/2006/main" xmlns:r="http://schemas.openxmlformats.org/officeDocument/2006/relationships" xmlns:p="http://schemas.openxmlformats.org/presentationml/2006/main">
   <p:cSld>
@@ -1353,59 +1568,6 @@
             <a:r>
               <a:rPr lang="en-US" sz="1200"/>
               <a:t>GUARD: Be explicit and warm about Week 21 — people leave today deciding who to bring. Adjust specifics to the actual closing-weeks plan.</a:t>
-            </a:r>
-          </a:p>
-        </p:txBody>
-      </p:sp>
-    </p:spTree>
-  </p:cSld>
-  <p:clrMapOvr>
-    <a:masterClrMapping/>
-  </p:clrMapOvr>
-</p:notes>
-</file>
-
-<file path=ppt/notesSlides/notesSlide172.xml><?xml version="1.0" encoding="utf-8"?>
-<p:notes xmlns:a="http://schemas.openxmlformats.org/drawingml/2006/main" xmlns:r="http://schemas.openxmlformats.org/officeDocument/2006/relationships" xmlns:p="http://schemas.openxmlformats.org/presentationml/2006/main">
-  <p:cSld>
-    <p:spTree>
-      <p:nvGrpSpPr>
-        <p:cNvPr id="1" name=""/>
-        <p:cNvGrpSpPr/>
-        <p:nvPr/>
-      </p:nvGrpSpPr>
-      <p:grpSpPr>
-        <a:xfrm>
-          <a:off x="0" y="0"/>
-          <a:ext cx="0" cy="0"/>
-          <a:chOff x="0" y="0"/>
-          <a:chExt cx="0" cy="0"/>
-        </a:xfrm>
-      </p:grpSpPr>
-      <p:sp>
-        <p:nvSpPr>
-          <p:cNvPr id="2" name="Notes Placeholder 1"/>
-          <p:cNvSpPr>
-            <a:spLocks noGrp="1"/>
-          </p:cNvSpPr>
-          <p:nvPr>
-            <p:ph type="body" idx="1"/>
-          </p:nvPr>
-        </p:nvSpPr>
-        <p:spPr/>
-        <p:txBody>
-          <a:bodyPr/>
-          <a:lstStyle/>
-          <a:p>
-            <a:r>
-              <a:rPr lang="en-US" sz="1200"/>
-              <a:t>S13 · 8:20–8:24 · LEAD: CONTENT PRESENTER CIRCLE</a:t>
-            </a:r>
-          </a:p>
-          <a:p>
-            <a:r>
-              <a:rPr lang="en-US" sz="1200"/>
-              <a:t>BEATS: 1. Point to the check-off card: the morning question and the session journal note, daily, carried forward. 2. One-time boxes: the one small downhill action, and the Doubts Inventory kept alive. 3. Say the card's spirit: a missed box is never failure — it is an invitation to return; filled or half-filled, come back evenings.</a:t>
             </a:r>
           </a:p>
         </p:txBody>
@@ -4729,7 +4891,1893 @@
 </p:sld>
 </file>
 
-<file path=ppt/slides/slide164.xml><?xml version="1.0" encoding="utf-8"?>
+<file path=ppt/slides/slide10.xml><?xml version="1.0" encoding="utf-8"?>
+<p:sld xmlns:a="http://schemas.openxmlformats.org/drawingml/2006/main" xmlns:r="http://schemas.openxmlformats.org/officeDocument/2006/relationships" xmlns:p="http://schemas.openxmlformats.org/presentationml/2006/main">
+  <p:cSld>
+    <p:spTree>
+      <p:nvGrpSpPr>
+        <p:cNvPr id="1" name=""/>
+        <p:cNvGrpSpPr/>
+        <p:nvPr/>
+      </p:nvGrpSpPr>
+      <p:grpSpPr>
+        <a:xfrm>
+          <a:off x="0" y="0"/>
+          <a:ext cx="0" cy="0"/>
+          <a:chOff x="0" y="0"/>
+          <a:chExt cx="0" cy="0"/>
+        </a:xfrm>
+      </p:grpSpPr>
+      <p:sp>
+        <p:nvSpPr>
+          <p:cNvPr id="2" name="Rectangle 1"/>
+          <p:cNvSpPr/>
+          <p:nvPr/>
+        </p:nvSpPr>
+        <p:spPr>
+          <a:xfrm>
+            <a:off x="0" y="0"/>
+            <a:ext cx="12191695" cy="6858000"/>
+          </a:xfrm>
+          <a:prstGeom prst="rect">
+            <a:avLst/>
+          </a:prstGeom>
+          <a:solidFill>
+            <a:srgbClr val="FFFFFF"/>
+          </a:solidFill>
+          <a:ln>
+            <a:noFill/>
+          </a:ln>
+        </p:spPr>
+        <p:txBody>
+          <a:bodyPr/>
+          <a:lstStyle/>
+          <a:p>
+            <a:endParaRPr/>
+          </a:p>
+        </p:txBody>
+      </p:sp>
+      <p:sp>
+        <p:nvSpPr>
+          <p:cNvPr id="3" name="TextBox 2"/>
+          <p:cNvSpPr txBox="1"/>
+          <p:nvPr/>
+        </p:nvSpPr>
+        <p:spPr>
+          <a:xfrm>
+            <a:off x="822960" y="502920"/>
+            <a:ext cx="10515600" cy="822960"/>
+          </a:xfrm>
+          <a:prstGeom prst="rect">
+            <a:avLst/>
+          </a:prstGeom>
+          <a:noFill/>
+        </p:spPr>
+        <p:txBody>
+          <a:bodyPr wrap="square">
+            <a:spAutoFit/>
+          </a:bodyPr>
+          <a:lstStyle/>
+          <a:p>
+            <a:pPr algn="l">
+              <a:spcAft>
+                <a:spcPts val="600"/>
+              </a:spcAft>
+            </a:pPr>
+            <a:r>
+              <a:rPr sz="2800" b="1" i="0">
+                <a:solidFill>
+                  <a:srgbClr val="2C5F2D"/>
+                </a:solidFill>
+                <a:latin typeface="Cambria"/>
+              </a:rPr>
+              <a:t>Merge and Surface</a:t>
+            </a:r>
+          </a:p>
+        </p:txBody>
+      </p:sp>
+      <p:sp>
+        <p:nvSpPr>
+          <p:cNvPr id="4" name="TextBox 4"/>
+          <p:cNvSpPr txBox="1"/>
+          <p:nvPr/>
+        </p:nvSpPr>
+        <p:spPr>
+          <a:xfrm>
+            <a:off x="822960" y="1554480"/>
+            <a:ext cx="10515600" cy="4892040"/>
+          </a:xfrm>
+          <a:prstGeom prst="rect">
+            <a:avLst/>
+          </a:prstGeom>
+          <a:noFill/>
+        </p:spPr>
+        <p:txBody>
+          <a:bodyPr wrap="square" lIns="91440" tIns="91440" rIns="91440" bIns="91440"/>
+          <a:lstStyle/>
+          <a:p>
+            <a:pPr marL="274320" indent="-274320">
+              <a:spcAft>
+                <a:spcPts val="900"/>
+              </a:spcAft>
+            </a:pPr>
+            <a:r>
+              <a:rPr sz="2800" b="1" i="0">
+                <a:solidFill>
+                  <a:srgbClr val="97BC62"/>
+                </a:solidFill>
+                <a:latin typeface="Calibri"/>
+              </a:rPr>
+              <a:t>•  </a:t>
+            </a:r>
+            <a:r>
+              <a:rPr sz="2800" b="0" i="0">
+                <a:solidFill>
+                  <a:srgbClr val="222B22"/>
+                </a:solidFill>
+                <a:latin typeface="Calibri"/>
+              </a:rPr>
+              <a:t>What was named in your pair stays in your pair — nobody repeats their downhill answer</a:t>
+            </a:r>
+          </a:p>
+          <a:p>
+            <a:pPr marL="274320" indent="-274320">
+              <a:spcAft>
+                <a:spcPts val="900"/>
+              </a:spcAft>
+            </a:pPr>
+            <a:r>
+              <a:rPr sz="2800" b="1" i="0">
+                <a:solidFill>
+                  <a:srgbClr val="97BC62"/>
+                </a:solidFill>
+                <a:latin typeface="Calibri"/>
+              </a:rPr>
+              <a:t>•  </a:t>
+            </a:r>
+            <a:r>
+              <a:rPr sz="2800" b="0" i="0">
+                <a:solidFill>
+                  <a:srgbClr val="222B22"/>
+                </a:solidFill>
+                <a:latin typeface="Calibri"/>
+              </a:rPr>
+              <a:t>One sentence from each leadsanion — one general thing they noticed, not a specific person</a:t>
+            </a:r>
+          </a:p>
+          <a:p>
+            <a:pPr marL="274320" indent="-274320">
+              <a:spcAft>
+                <a:spcPts val="900"/>
+              </a:spcAft>
+            </a:pPr>
+            <a:r>
+              <a:rPr sz="2800" b="1" i="0">
+                <a:solidFill>
+                  <a:srgbClr val="97BC62"/>
+                </a:solidFill>
+                <a:latin typeface="Calibri"/>
+              </a:rPr>
+              <a:t>•  </a:t>
+            </a:r>
+            <a:r>
+              <a:rPr sz="2800" b="0" i="0">
+                <a:solidFill>
+                  <a:srgbClr val="222B22"/>
+                </a:solidFill>
+                <a:latin typeface="Calibri"/>
+              </a:rPr>
+              <a:t>Then one observation across the room</a:t>
+            </a:r>
+          </a:p>
+          <a:p>
+            <a:pPr marL="274320" indent="-274320">
+              <a:spcAft>
+                <a:spcPts val="900"/>
+              </a:spcAft>
+            </a:pPr>
+            <a:r>
+              <a:rPr sz="2800" b="1" i="0">
+                <a:solidFill>
+                  <a:srgbClr val="97BC62"/>
+                </a:solidFill>
+                <a:latin typeface="Calibri"/>
+              </a:rPr>
+              <a:t>•  </a:t>
+            </a:r>
+            <a:r>
+              <a:rPr sz="2800" b="0" i="0">
+                <a:solidFill>
+                  <a:srgbClr val="222B22"/>
+                </a:solidFill>
+                <a:latin typeface="Calibri"/>
+              </a:rPr>
+              <a:t>“The downhill mission you named is not a final answer. It is the working draft you are walking in this season.” It will deepen. It will sharpen</a:t>
+            </a:r>
+          </a:p>
+        </p:txBody>
+      </p:sp>
+      <p:sp>
+        <p:nvSpPr>
+          <p:cNvPr id="90" name="SlideNum"/>
+          <p:cNvSpPr txBox="1"/>
+          <p:nvPr/>
+        </p:nvSpPr>
+        <p:spPr>
+          <a:xfrm>
+            <a:off x="11384280" y="6446520"/>
+            <a:ext cx="640080" cy="292608"/>
+          </a:xfrm>
+          <a:prstGeom prst="rect">
+            <a:avLst/>
+          </a:prstGeom>
+          <a:noFill/>
+        </p:spPr>
+        <p:txBody>
+          <a:bodyPr wrap="none" lIns="0" tIns="0" rIns="45720" bIns="0" anchor="ctr"/>
+          <a:lstStyle/>
+          <a:p>
+            <a:pPr algn="r"/>
+            <a:r>
+              <a:t>172</a:t>
+            </a:r>
+            <a:endParaRPr sz="1000" b="1">
+              <a:solidFill>
+                <a:srgbClr val="7A8A6E"/>
+              </a:solidFill>
+              <a:latin typeface="Calibri"/>
+            </a:endParaRPr>
+          </a:p>
+        </p:txBody>
+      </p:sp>
+    </p:spTree>
+  </p:cSld>
+  <p:clrMapOvr>
+    <a:masterClrMapping/>
+  </p:clrMapOvr>
+</p:sld>
+</file>
+
+<file path=ppt/slides/slide11.xml><?xml version="1.0" encoding="utf-8"?>
+<p:sld xmlns:a="http://schemas.openxmlformats.org/drawingml/2006/main" xmlns:r="http://schemas.openxmlformats.org/officeDocument/2006/relationships" xmlns:p="http://schemas.openxmlformats.org/presentationml/2006/main">
+  <p:cSld>
+    <p:spTree>
+      <p:nvGrpSpPr>
+        <p:cNvPr id="1" name=""/>
+        <p:cNvGrpSpPr/>
+        <p:nvPr/>
+      </p:nvGrpSpPr>
+      <p:grpSpPr>
+        <a:xfrm>
+          <a:off x="0" y="0"/>
+          <a:ext cx="0" cy="0"/>
+          <a:chOff x="0" y="0"/>
+          <a:chExt cx="0" cy="0"/>
+        </a:xfrm>
+      </p:grpSpPr>
+      <p:sp>
+        <p:nvSpPr>
+          <p:cNvPr id="2" name="Rectangle 1"/>
+          <p:cNvSpPr/>
+          <p:nvPr/>
+        </p:nvSpPr>
+        <p:spPr>
+          <a:xfrm>
+            <a:off x="0" y="0"/>
+            <a:ext cx="12191695" cy="6858000"/>
+          </a:xfrm>
+          <a:prstGeom prst="rect">
+            <a:avLst/>
+          </a:prstGeom>
+          <a:solidFill>
+            <a:srgbClr val="FFFFFF"/>
+          </a:solidFill>
+          <a:ln>
+            <a:noFill/>
+          </a:ln>
+        </p:spPr>
+        <p:txBody>
+          <a:bodyPr/>
+          <a:lstStyle/>
+          <a:p>
+            <a:endParaRPr/>
+          </a:p>
+        </p:txBody>
+      </p:sp>
+      <p:sp>
+        <p:nvSpPr>
+          <p:cNvPr id="3" name="TextBox 2"/>
+          <p:cNvSpPr txBox="1"/>
+          <p:nvPr/>
+        </p:nvSpPr>
+        <p:spPr>
+          <a:xfrm>
+            <a:off x="822960" y="502920"/>
+            <a:ext cx="10515600" cy="822960"/>
+          </a:xfrm>
+          <a:prstGeom prst="rect">
+            <a:avLst/>
+          </a:prstGeom>
+          <a:noFill/>
+        </p:spPr>
+        <p:txBody>
+          <a:bodyPr wrap="square">
+            <a:spAutoFit/>
+          </a:bodyPr>
+          <a:lstStyle/>
+          <a:p>
+            <a:pPr algn="l">
+              <a:spcAft>
+                <a:spcPts val="600"/>
+              </a:spcAft>
+            </a:pPr>
+            <a:r>
+              <a:rPr sz="2800" b="1" i="0">
+                <a:solidFill>
+                  <a:srgbClr val="2C5F2D"/>
+                </a:solidFill>
+                <a:latin typeface="Cambria"/>
+              </a:rPr>
+              <a:t>Practice This Week — and the Road Ahead</a:t>
+            </a:r>
+          </a:p>
+        </p:txBody>
+      </p:sp>
+      <p:sp>
+        <p:nvSpPr>
+          <p:cNvPr id="4" name="TextBox 4"/>
+          <p:cNvSpPr txBox="1"/>
+          <p:nvPr/>
+        </p:nvSpPr>
+        <p:spPr>
+          <a:xfrm>
+            <a:off x="822960" y="1554480"/>
+            <a:ext cx="6675120" cy="4892040"/>
+          </a:xfrm>
+          <a:prstGeom prst="rect">
+            <a:avLst/>
+          </a:prstGeom>
+          <a:noFill/>
+        </p:spPr>
+        <p:txBody>
+          <a:bodyPr wrap="square" lIns="91440" tIns="91440" rIns="91440" bIns="91440"/>
+          <a:lstStyle/>
+          <a:p>
+            <a:pPr marL="274320" indent="-274320">
+              <a:spcAft>
+                <a:spcPts val="900"/>
+              </a:spcAft>
+            </a:pPr>
+            <a:r>
+              <a:rPr sz="2200" b="1" i="0">
+                <a:solidFill>
+                  <a:srgbClr val="97BC62"/>
+                </a:solidFill>
+                <a:latin typeface="Calibri"/>
+              </a:rPr>
+              <a:t>•  </a:t>
+            </a:r>
+            <a:r>
+              <a:rPr sz="2200" b="0" i="0">
+                <a:solidFill>
+                  <a:srgbClr val="222B22"/>
+                </a:solidFill>
+                <a:latin typeface="Calibri"/>
+              </a:rPr>
+              <a:t>One small action this week, aligned with your downhill answer. One. Not a campaign. Specific — then journal what happens</a:t>
+            </a:r>
+          </a:p>
+          <a:p>
+            <a:pPr marL="685800" indent="-274320">
+              <a:spcAft>
+                <a:spcPts val="700"/>
+              </a:spcAft>
+            </a:pPr>
+            <a:r>
+              <a:rPr sz="1800" b="1" i="0">
+                <a:solidFill>
+                  <a:srgbClr val="97BC62"/>
+                </a:solidFill>
+                <a:latin typeface="Calibri"/>
+              </a:rPr>
+              <a:t>–  </a:t>
+            </a:r>
+            <a:r>
+              <a:rPr sz="1800" b="0" i="1">
+                <a:solidFill>
+                  <a:srgbClr val="222B22"/>
+                </a:solidFill>
+                <a:latin typeface="Calibri"/>
+              </a:rPr>
+              <a:t>If your downhill is “the room gets calmer” — sit with a friend in distress this week instead of trying to fix them</a:t>
+            </a:r>
+          </a:p>
+          <a:p>
+            <a:pPr marL="274320" indent="-274320">
+              <a:spcAft>
+                <a:spcPts val="900"/>
+              </a:spcAft>
+            </a:pPr>
+            <a:r>
+              <a:rPr sz="2200" b="1" i="0">
+                <a:solidFill>
+                  <a:srgbClr val="97BC62"/>
+                </a:solidFill>
+                <a:latin typeface="Calibri"/>
+              </a:rPr>
+              <a:t>•  </a:t>
+            </a:r>
+            <a:r>
+              <a:rPr sz="2200" b="0" i="0">
+                <a:solidFill>
+                  <a:srgbClr val="222B22"/>
+                </a:solidFill>
+                <a:latin typeface="Calibri"/>
+              </a:rPr>
+              <a:t>Ahead: the Rhythm week — we build the practices you will carry when the Wednesdays stop</a:t>
+            </a:r>
+          </a:p>
+          <a:p>
+            <a:pPr marL="274320" indent="-274320">
+              <a:spcAft>
+                <a:spcPts val="900"/>
+              </a:spcAft>
+            </a:pPr>
+            <a:r>
+              <a:rPr sz="2200" b="1" i="0">
+                <a:solidFill>
+                  <a:srgbClr val="97BC62"/>
+                </a:solidFill>
+                <a:latin typeface="Calibri"/>
+              </a:rPr>
+              <a:t>•  </a:t>
+            </a:r>
+            <a:r>
+              <a:rPr sz="2200" b="0" i="0">
+                <a:solidFill>
+                  <a:srgbClr val="222B22"/>
+                </a:solidFill>
+                <a:latin typeface="Calibri"/>
+              </a:rPr>
+              <a:t>Week 21 — the family commissioning: bring your whole family, even members who have not been here. We run to 6:15 that night — light food from 4:00 as the room builds</a:t>
+            </a:r>
+          </a:p>
+          <a:p>
+            <a:pPr marL="274320" indent="-274320">
+              <a:spcAft>
+                <a:spcPts val="900"/>
+              </a:spcAft>
+            </a:pPr>
+            <a:r>
+              <a:rPr sz="2200" b="1" i="0">
+                <a:solidFill>
+                  <a:srgbClr val="97BC62"/>
+                </a:solidFill>
+                <a:latin typeface="Calibri"/>
+              </a:rPr>
+              <a:t>•  </a:t>
+            </a:r>
+            <a:r>
+              <a:rPr sz="2200" b="0" i="0">
+                <a:solidFill>
+                  <a:srgbClr val="222B22"/>
+                </a:solidFill>
+                <a:latin typeface="Calibri"/>
+              </a:rPr>
+              <a:t>Week 22 — the commissioning of our Companions-in-Formation. Their night; come to witness it</a:t>
+            </a:r>
+          </a:p>
+        </p:txBody>
+      </p:sp>
+      <p:sp>
+        <p:nvSpPr>
+          <p:cNvPr id="90" name="SlideNum"/>
+          <p:cNvSpPr txBox="1"/>
+          <p:nvPr/>
+        </p:nvSpPr>
+        <p:spPr>
+          <a:xfrm>
+            <a:off x="11384280" y="6446520"/>
+            <a:ext cx="640080" cy="292608"/>
+          </a:xfrm>
+          <a:prstGeom prst="rect">
+            <a:avLst/>
+          </a:prstGeom>
+          <a:noFill/>
+        </p:spPr>
+        <p:txBody>
+          <a:bodyPr wrap="none" lIns="0" tIns="0" rIns="45720" bIns="0" anchor="ctr"/>
+          <a:lstStyle/>
+          <a:p>
+            <a:pPr algn="r"/>
+            <a:r>
+              <a:t>173</a:t>
+            </a:r>
+            <a:endParaRPr sz="1000" b="1">
+              <a:solidFill>
+                <a:srgbClr val="7A8A6E"/>
+              </a:solidFill>
+              <a:latin typeface="Calibri"/>
+            </a:endParaRPr>
+          </a:p>
+        </p:txBody>
+      </p:sp>
+      <p:pic>
+        <p:nvPicPr>
+          <p:cNvPr id="33" name="Picture 33" descr="seedling - what grows between Wednesdays"/>
+          <p:cNvPicPr>
+            <a:picLocks noChangeAspect="1"/>
+          </p:cNvPicPr>
+          <p:nvPr/>
+        </p:nvPicPr>
+        <p:blipFill>
+          <a:blip r:embed="rId3"/>
+          <a:stretch>
+            <a:fillRect/>
+          </a:stretch>
+        </p:blipFill>
+        <p:spPr>
+          <a:xfrm>
+            <a:off x="8103612" y="1463040"/>
+            <a:ext cx="3262379" cy="4892040"/>
+          </a:xfrm>
+          <a:prstGeom prst="rect">
+            <a:avLst/>
+          </a:prstGeom>
+          <a:ln w="76200">
+            <a:solidFill>
+              <a:srgbClr val="FFFFFF"/>
+            </a:solidFill>
+          </a:ln>
+          <a:effectLst>
+            <a:outerShdw blurRad="63500" dist="25400" dir="5400000" rotWithShape="0">
+              <a:srgbClr val="000000">
+                <a:alpha val="35000"/>
+              </a:srgbClr>
+            </a:outerShdw>
+          </a:effectLst>
+        </p:spPr>
+      </p:pic>
+    </p:spTree>
+  </p:cSld>
+  <p:clrMapOvr>
+    <a:masterClrMapping/>
+  </p:clrMapOvr>
+</p:sld>
+</file>
+
+<file path=ppt/slides/slide13.xml><?xml version="1.0" encoding="utf-8"?>
+<p:sld xmlns:a="http://schemas.openxmlformats.org/drawingml/2006/main" xmlns:r="http://schemas.openxmlformats.org/officeDocument/2006/relationships" xmlns:p="http://schemas.openxmlformats.org/presentationml/2006/main">
+  <p:cSld>
+    <p:spTree>
+      <p:nvGrpSpPr>
+        <p:cNvPr id="1" name=""/>
+        <p:cNvGrpSpPr/>
+        <p:nvPr/>
+      </p:nvGrpSpPr>
+      <p:grpSpPr>
+        <a:xfrm>
+          <a:off x="0" y="0"/>
+          <a:ext cx="0" cy="0"/>
+          <a:chOff x="0" y="0"/>
+          <a:chExt cx="0" cy="0"/>
+        </a:xfrm>
+      </p:grpSpPr>
+      <p:sp>
+        <p:nvSpPr>
+          <p:cNvPr id="2" name="Rectangle 1"/>
+          <p:cNvSpPr/>
+          <p:nvPr/>
+        </p:nvSpPr>
+        <p:spPr>
+          <a:xfrm>
+            <a:off x="0" y="0"/>
+            <a:ext cx="12191695" cy="6858000"/>
+          </a:xfrm>
+          <a:prstGeom prst="rect">
+            <a:avLst/>
+          </a:prstGeom>
+          <a:solidFill>
+            <a:srgbClr val="FFFFFF"/>
+          </a:solidFill>
+          <a:ln>
+            <a:noFill/>
+          </a:ln>
+        </p:spPr>
+        <p:txBody>
+          <a:bodyPr/>
+          <a:lstStyle/>
+          <a:p>
+            <a:endParaRPr/>
+          </a:p>
+        </p:txBody>
+      </p:sp>
+      <p:sp>
+        <p:nvSpPr>
+          <p:cNvPr id="3" name="TextBox 2"/>
+          <p:cNvSpPr txBox="1"/>
+          <p:nvPr/>
+        </p:nvSpPr>
+        <p:spPr>
+          <a:xfrm>
+            <a:off x="822960" y="502920"/>
+            <a:ext cx="10515600" cy="822960"/>
+          </a:xfrm>
+          <a:prstGeom prst="rect">
+            <a:avLst/>
+          </a:prstGeom>
+          <a:noFill/>
+        </p:spPr>
+        <p:txBody>
+          <a:bodyPr wrap="square">
+            <a:spAutoFit/>
+          </a:bodyPr>
+          <a:lstStyle/>
+          <a:p>
+            <a:pPr algn="l">
+              <a:spcAft>
+                <a:spcPts val="600"/>
+              </a:spcAft>
+            </a:pPr>
+            <a:r>
+              <a:rPr sz="2800" b="1" i="0">
+                <a:solidFill>
+                  <a:srgbClr val="2C5F2D"/>
+                </a:solidFill>
+                <a:latin typeface="Cambria"/>
+              </a:rPr>
+              <a:t>The Leader Feedback Round</a:t>
+            </a:r>
+          </a:p>
+        </p:txBody>
+      </p:sp>
+      <p:sp>
+        <p:nvSpPr>
+          <p:cNvPr id="4" name="TextBox 4"/>
+          <p:cNvSpPr txBox="1"/>
+          <p:nvPr/>
+        </p:nvSpPr>
+        <p:spPr>
+          <a:xfrm>
+            <a:off x="822960" y="1554480"/>
+            <a:ext cx="6675120" cy="4892040"/>
+          </a:xfrm>
+          <a:prstGeom prst="rect">
+            <a:avLst/>
+          </a:prstGeom>
+          <a:noFill/>
+        </p:spPr>
+        <p:txBody>
+          <a:bodyPr wrap="square" lIns="91440" tIns="91440" rIns="91440" bIns="91440"/>
+          <a:lstStyle/>
+          <a:p>
+            <a:pPr marL="274320" indent="-274320">
+              <a:spcAft>
+                <a:spcPts val="900"/>
+              </a:spcAft>
+            </a:pPr>
+            <a:r>
+              <a:rPr sz="2800" b="1" i="0">
+                <a:solidFill>
+                  <a:srgbClr val="97BC62"/>
+                </a:solidFill>
+                <a:latin typeface="Calibri"/>
+              </a:rPr>
+              <a:t>•  </a:t>
+            </a:r>
+            <a:r>
+              <a:rPr sz="2800" b="0" i="0">
+                <a:solidFill>
+                  <a:srgbClr val="222B22"/>
+                </a:solidFill>
+                <a:latin typeface="Calibri"/>
+              </a:rPr>
+              <a:t>Two rounds, same as every session — the container holder first, then the content presenter: three things each</a:t>
+            </a:r>
+          </a:p>
+          <a:p>
+            <a:pPr marL="685800" indent="-274320">
+              <a:spcAft>
+                <a:spcPts val="700"/>
+              </a:spcAft>
+            </a:pPr>
+            <a:r>
+              <a:rPr sz="2000" b="1" i="0">
+                <a:solidFill>
+                  <a:srgbClr val="97BC62"/>
+                </a:solidFill>
+                <a:latin typeface="Calibri"/>
+              </a:rPr>
+              <a:t>–  </a:t>
+            </a:r>
+            <a:r>
+              <a:rPr sz="2000" b="0" i="1">
+                <a:solidFill>
+                  <a:srgbClr val="222B22"/>
+                </a:solidFill>
+                <a:latin typeface="Calibri"/>
+              </a:rPr>
+              <a:t>“What I think went well tonight: ______”</a:t>
+            </a:r>
+          </a:p>
+          <a:p>
+            <a:pPr marL="685800" indent="-274320">
+              <a:spcAft>
+                <a:spcPts val="700"/>
+              </a:spcAft>
+            </a:pPr>
+            <a:r>
+              <a:rPr sz="2000" b="1" i="0">
+                <a:solidFill>
+                  <a:srgbClr val="97BC62"/>
+                </a:solidFill>
+                <a:latin typeface="Calibri"/>
+              </a:rPr>
+              <a:t>–  </a:t>
+            </a:r>
+            <a:r>
+              <a:rPr sz="2000" b="0" i="1">
+                <a:solidFill>
+                  <a:srgbClr val="222B22"/>
+                </a:solidFill>
+                <a:latin typeface="Calibri"/>
+              </a:rPr>
+              <a:t>“What I’d do differently next time: ______”</a:t>
+            </a:r>
+          </a:p>
+          <a:p>
+            <a:pPr marL="685800" indent="-274320">
+              <a:spcAft>
+                <a:spcPts val="700"/>
+              </a:spcAft>
+            </a:pPr>
+            <a:r>
+              <a:rPr sz="2000" b="1" i="0">
+                <a:solidFill>
+                  <a:srgbClr val="97BC62"/>
+                </a:solidFill>
+                <a:latin typeface="Calibri"/>
+              </a:rPr>
+              <a:t>–  </a:t>
+            </a:r>
+            <a:r>
+              <a:rPr sz="2000" b="0" i="1">
+                <a:solidFill>
+                  <a:srgbClr val="222B22"/>
+                </a:solidFill>
+                <a:latin typeface="Calibri"/>
+              </a:rPr>
+              <a:t>“If I were to teach tonight’s process to someone, I would tell them: ______”</a:t>
+            </a:r>
+          </a:p>
+          <a:p>
+            <a:pPr marL="274320" indent="-274320">
+              <a:spcAft>
+                <a:spcPts val="900"/>
+              </a:spcAft>
+            </a:pPr>
+            <a:r>
+              <a:rPr sz="2800" b="1" i="0">
+                <a:solidFill>
+                  <a:srgbClr val="97BC62"/>
+                </a:solidFill>
+                <a:latin typeface="Calibri"/>
+              </a:rPr>
+              <a:t>•  </a:t>
+            </a:r>
+            <a:r>
+              <a:rPr sz="2800" b="0" i="0">
+                <a:solidFill>
+                  <a:srgbClr val="222B22"/>
+                </a:solidFill>
+                <a:latin typeface="Calibri"/>
+              </a:rPr>
+              <a:t>Then the room — the same two questions about tonight</a:t>
+            </a:r>
+          </a:p>
+          <a:p>
+            <a:pPr marL="274320" indent="-274320">
+              <a:spcAft>
+                <a:spcPts val="900"/>
+              </a:spcAft>
+            </a:pPr>
+            <a:r>
+              <a:rPr sz="2800" b="1" i="0">
+                <a:solidFill>
+                  <a:srgbClr val="97BC62"/>
+                </a:solidFill>
+                <a:latin typeface="Calibri"/>
+              </a:rPr>
+              <a:t>•  </a:t>
+            </a:r>
+            <a:r>
+              <a:rPr sz="2800" b="0" i="0">
+                <a:solidFill>
+                  <a:srgbClr val="222B22"/>
+                </a:solidFill>
+                <a:latin typeface="Calibri"/>
+              </a:rPr>
+              <a:t>The leaders receive without defending — “thank you” is the whole response</a:t>
+            </a:r>
+          </a:p>
+        </p:txBody>
+      </p:sp>
+      <p:sp>
+        <p:nvSpPr>
+          <p:cNvPr id="90" name="SlideNum"/>
+          <p:cNvSpPr txBox="1"/>
+          <p:nvPr/>
+        </p:nvSpPr>
+        <p:spPr>
+          <a:xfrm>
+            <a:off x="11384280" y="6446520"/>
+            <a:ext cx="640080" cy="292608"/>
+          </a:xfrm>
+          <a:prstGeom prst="rect">
+            <a:avLst/>
+          </a:prstGeom>
+          <a:noFill/>
+        </p:spPr>
+        <p:txBody>
+          <a:bodyPr wrap="none" lIns="0" tIns="0" rIns="45720" bIns="0" anchor="ctr"/>
+          <a:lstStyle/>
+          <a:p>
+            <a:pPr algn="r"/>
+            <a:r>
+              <a:t>175</a:t>
+            </a:r>
+            <a:endParaRPr sz="1000" b="1">
+              <a:solidFill>
+                <a:srgbClr val="7A8A6E"/>
+              </a:solidFill>
+              <a:latin typeface="Calibri"/>
+            </a:endParaRPr>
+          </a:p>
+        </p:txBody>
+      </p:sp>
+      <p:pic>
+        <p:nvPicPr>
+          <p:cNvPr id="33" name="Picture 33" descr="compass on the trail - the weekly bearing check"/>
+          <p:cNvPicPr>
+            <a:picLocks noChangeAspect="1"/>
+          </p:cNvPicPr>
+          <p:nvPr/>
+        </p:nvPicPr>
+        <p:blipFill>
+          <a:blip r:embed="rId3"/>
+          <a:stretch>
+            <a:fillRect/>
+          </a:stretch>
+        </p:blipFill>
+        <p:spPr>
+          <a:xfrm>
+            <a:off x="8106160" y="1463040"/>
+            <a:ext cx="3259831" cy="4892040"/>
+          </a:xfrm>
+          <a:prstGeom prst="rect">
+            <a:avLst/>
+          </a:prstGeom>
+          <a:ln w="76200">
+            <a:solidFill>
+              <a:srgbClr val="FFFFFF"/>
+            </a:solidFill>
+          </a:ln>
+          <a:effectLst>
+            <a:outerShdw blurRad="63500" dist="25400" dir="5400000" rotWithShape="0">
+              <a:srgbClr val="000000">
+                <a:alpha val="35000"/>
+              </a:srgbClr>
+            </a:outerShdw>
+          </a:effectLst>
+        </p:spPr>
+      </p:pic>
+    </p:spTree>
+  </p:cSld>
+  <p:clrMapOvr>
+    <a:masterClrMapping/>
+  </p:clrMapOvr>
+</p:sld>
+</file>
+
+<file path=ppt/slides/slide14.xml><?xml version="1.0" encoding="utf-8"?>
+<p:sld xmlns:a="http://schemas.openxmlformats.org/drawingml/2006/main" xmlns:r="http://schemas.openxmlformats.org/officeDocument/2006/relationships" xmlns:p="http://schemas.openxmlformats.org/presentationml/2006/main">
+  <p:cSld>
+    <p:spTree>
+      <p:nvGrpSpPr>
+        <p:cNvPr id="1" name=""/>
+        <p:cNvGrpSpPr/>
+        <p:nvPr/>
+      </p:nvGrpSpPr>
+      <p:grpSpPr>
+        <a:xfrm>
+          <a:off x="0" y="0"/>
+          <a:ext cx="0" cy="0"/>
+          <a:chOff x="0" y="0"/>
+          <a:chExt cx="0" cy="0"/>
+        </a:xfrm>
+      </p:grpSpPr>
+      <p:sp>
+        <p:nvSpPr>
+          <p:cNvPr id="2" name="Rectangle 1"/>
+          <p:cNvSpPr/>
+          <p:nvPr/>
+        </p:nvSpPr>
+        <p:spPr>
+          <a:xfrm>
+            <a:off x="0" y="0"/>
+            <a:ext cx="12191695" cy="6858000"/>
+          </a:xfrm>
+          <a:prstGeom prst="rect">
+            <a:avLst/>
+          </a:prstGeom>
+          <a:solidFill>
+            <a:srgbClr val="FFFFFF"/>
+          </a:solidFill>
+          <a:ln>
+            <a:noFill/>
+          </a:ln>
+        </p:spPr>
+        <p:txBody>
+          <a:bodyPr/>
+          <a:lstStyle/>
+          <a:p>
+            <a:endParaRPr/>
+          </a:p>
+        </p:txBody>
+      </p:sp>
+      <p:sp>
+        <p:nvSpPr>
+          <p:cNvPr id="3" name="TextBox 2"/>
+          <p:cNvSpPr txBox="1"/>
+          <p:nvPr/>
+        </p:nvSpPr>
+        <p:spPr>
+          <a:xfrm>
+            <a:off x="822960" y="502920"/>
+            <a:ext cx="10515600" cy="822960"/>
+          </a:xfrm>
+          <a:prstGeom prst="rect">
+            <a:avLst/>
+          </a:prstGeom>
+          <a:noFill/>
+        </p:spPr>
+        <p:txBody>
+          <a:bodyPr wrap="square">
+            <a:spAutoFit/>
+          </a:bodyPr>
+          <a:lstStyle/>
+          <a:p>
+            <a:pPr algn="l">
+              <a:spcAft>
+                <a:spcPts val="600"/>
+              </a:spcAft>
+            </a:pPr>
+            <a:r>
+              <a:rPr sz="2800" b="1" i="0">
+                <a:solidFill>
+                  <a:srgbClr val="2C5F2D"/>
+                </a:solidFill>
+                <a:latin typeface="Cambria"/>
+              </a:rPr>
+              <a:t>Closing the Container + Aaronic Blessing</a:t>
+            </a:r>
+          </a:p>
+        </p:txBody>
+      </p:sp>
+      <p:sp>
+        <p:nvSpPr>
+          <p:cNvPr id="4" name="TextBox 4"/>
+          <p:cNvSpPr txBox="1"/>
+          <p:nvPr/>
+        </p:nvSpPr>
+        <p:spPr>
+          <a:xfrm>
+            <a:off x="822960" y="1600200"/>
+            <a:ext cx="5669280" cy="4572000"/>
+          </a:xfrm>
+          <a:prstGeom prst="rect">
+            <a:avLst/>
+          </a:prstGeom>
+          <a:noFill/>
+        </p:spPr>
+        <p:txBody>
+          <a:bodyPr wrap="square" lIns="91440" tIns="91440" rIns="91440" bIns="91440"/>
+          <a:lstStyle/>
+          <a:p>
+            <a:pPr marL="274320" indent="-274320">
+              <a:spcAft>
+                <a:spcPts val="900"/>
+              </a:spcAft>
+            </a:pPr>
+            <a:r>
+              <a:rPr sz="2200" b="1" i="0">
+                <a:solidFill>
+                  <a:srgbClr val="97BC62"/>
+                </a:solidFill>
+                <a:latin typeface="Calibri"/>
+              </a:rPr>
+              <a:t>•  </a:t>
+            </a:r>
+            <a:r>
+              <a:rPr sz="2200" b="0" i="0">
+                <a:solidFill>
+                  <a:srgbClr val="222B22"/>
+                </a:solidFill>
+                <a:latin typeface="Calibri"/>
+              </a:rPr>
+              <a:t>We close the way we opened — the container, six steps:</a:t>
+            </a:r>
+          </a:p>
+          <a:p>
+            <a:pPr marL="685800" indent="-274320">
+              <a:spcAft>
+                <a:spcPts val="700"/>
+              </a:spcAft>
+            </a:pPr>
+            <a:r>
+              <a:rPr sz="2000" b="1" i="0">
+                <a:solidFill>
+                  <a:srgbClr val="97BC62"/>
+                </a:solidFill>
+                <a:latin typeface="Calibri"/>
+              </a:rPr>
+              <a:t>1   </a:t>
+            </a:r>
+            <a:r>
+              <a:rPr sz="2000" b="0" i="0">
+                <a:solidFill>
+                  <a:srgbClr val="222B22"/>
+                </a:solidFill>
+                <a:latin typeface="Calibri"/>
+              </a:rPr>
+              <a:t>Stand again — same circle, same posture as the open</a:t>
+            </a:r>
+          </a:p>
+          <a:p>
+            <a:pPr marL="685800" indent="-274320">
+              <a:spcAft>
+                <a:spcPts val="700"/>
+              </a:spcAft>
+            </a:pPr>
+            <a:r>
+              <a:rPr sz="2000" b="1" i="0">
+                <a:solidFill>
+                  <a:srgbClr val="97BC62"/>
+                </a:solidFill>
+                <a:latin typeface="Calibri"/>
+              </a:rPr>
+              <a:t>2   </a:t>
+            </a:r>
+            <a:r>
+              <a:rPr sz="2000" b="0" i="0">
+                <a:solidFill>
+                  <a:srgbClr val="222B22"/>
+                </a:solidFill>
+                <a:latin typeface="Calibri"/>
+              </a:rPr>
+              <a:t>One-word landing — compare it to your opening word</a:t>
+            </a:r>
+          </a:p>
+          <a:p>
+            <a:pPr marL="685800" indent="-274320">
+              <a:spcAft>
+                <a:spcPts val="700"/>
+              </a:spcAft>
+            </a:pPr>
+            <a:r>
+              <a:rPr sz="2000" b="1" i="0">
+                <a:solidFill>
+                  <a:srgbClr val="97BC62"/>
+                </a:solidFill>
+                <a:latin typeface="Calibri"/>
+              </a:rPr>
+              <a:t>3   </a:t>
+            </a:r>
+            <a:r>
+              <a:rPr sz="2000" b="0" i="0">
+                <a:solidFill>
+                  <a:srgbClr val="222B22"/>
+                </a:solidFill>
+                <a:latin typeface="Calibri"/>
+              </a:rPr>
+              <a:t>The one thing you are taking from tonight</a:t>
+            </a:r>
+          </a:p>
+          <a:p>
+            <a:pPr marL="685800" indent="-274320">
+              <a:spcAft>
+                <a:spcPts val="700"/>
+              </a:spcAft>
+            </a:pPr>
+            <a:r>
+              <a:rPr sz="2000" b="1" i="0">
+                <a:solidFill>
+                  <a:srgbClr val="97BC62"/>
+                </a:solidFill>
+                <a:latin typeface="Calibri"/>
+              </a:rPr>
+              <a:t>4   </a:t>
+            </a:r>
+            <a:r>
+              <a:rPr sz="2000" b="0" i="0">
+                <a:solidFill>
+                  <a:srgbClr val="222B22"/>
+                </a:solidFill>
+                <a:latin typeface="Calibri"/>
+              </a:rPr>
+              <a:t>The one practice — committed aloud, or modified to one you will actually keep</a:t>
+            </a:r>
+          </a:p>
+          <a:p>
+            <a:pPr marL="685800" indent="-274320">
+              <a:spcAft>
+                <a:spcPts val="700"/>
+              </a:spcAft>
+            </a:pPr>
+            <a:r>
+              <a:rPr sz="2000" b="1" i="0">
+                <a:solidFill>
+                  <a:srgbClr val="97BC62"/>
+                </a:solidFill>
+                <a:latin typeface="Calibri"/>
+              </a:rPr>
+              <a:t>5   </a:t>
+            </a:r>
+            <a:r>
+              <a:rPr sz="2000" b="0" i="0">
+                <a:solidFill>
+                  <a:srgbClr val="222B22"/>
+                </a:solidFill>
+                <a:latin typeface="Calibri"/>
+              </a:rPr>
+              <a:t>Blessings — specific, witnessed, short</a:t>
+            </a:r>
+          </a:p>
+          <a:p>
+            <a:pPr marL="685800" indent="-274320">
+              <a:spcAft>
+                <a:spcPts val="700"/>
+              </a:spcAft>
+            </a:pPr>
+            <a:r>
+              <a:rPr sz="2000" b="1" i="0">
+                <a:solidFill>
+                  <a:srgbClr val="97BC62"/>
+                </a:solidFill>
+                <a:latin typeface="Calibri"/>
+              </a:rPr>
+              <a:t>6   </a:t>
+            </a:r>
+            <a:r>
+              <a:rPr sz="2000" b="0" i="0">
+                <a:solidFill>
+                  <a:srgbClr val="222B22"/>
+                </a:solidFill>
+                <a:latin typeface="Calibri"/>
+              </a:rPr>
+              <a:t>Closing prayer — and the Aaronic blessing, spoken over each other, face to face</a:t>
+            </a:r>
+          </a:p>
+        </p:txBody>
+      </p:sp>
+      <p:sp>
+        <p:nvSpPr>
+          <p:cNvPr id="6" name="TextBox 6"/>
+          <p:cNvSpPr txBox="1"/>
+          <p:nvPr/>
+        </p:nvSpPr>
+        <p:spPr>
+          <a:xfrm>
+            <a:off x="6766560" y="1737360"/>
+            <a:ext cx="4663440" cy="2926080"/>
+          </a:xfrm>
+          <a:prstGeom prst="rect">
+            <a:avLst/>
+          </a:prstGeom>
+          <a:solidFill>
+            <a:srgbClr val="F1F6EC"/>
+          </a:solidFill>
+        </p:spPr>
+        <p:txBody>
+          <a:bodyPr wrap="square" lIns="91440" tIns="91440" rIns="91440" bIns="91440" anchor="ctr"/>
+          <a:lstStyle/>
+          <a:p>
+            <a:pPr>
+              <a:spcAft>
+                <a:spcPts val="900"/>
+              </a:spcAft>
+            </a:pPr>
+            <a:r>
+              <a:rPr sz="1200" b="1" i="0">
+                <a:solidFill>
+                  <a:srgbClr val="97BC62"/>
+                </a:solidFill>
+                <a:latin typeface="Calibri"/>
+              </a:rPr>
+              <a:t>THE AARONIC BLESSING — NUMBERS 6:24–26</a:t>
+            </a:r>
+          </a:p>
+          <a:p>
+            <a:pPr>
+              <a:spcAft>
+                <a:spcPts val="600"/>
+              </a:spcAft>
+            </a:pPr>
+            <a:r>
+              <a:rPr sz="2400" b="0" i="1">
+                <a:solidFill>
+                  <a:srgbClr val="222B22"/>
+                </a:solidFill>
+                <a:latin typeface="Cambria"/>
+              </a:rPr>
+              <a:t>“The Lord bless you and keep you;</a:t>
+            </a:r>
+          </a:p>
+          <a:p>
+            <a:pPr>
+              <a:spcAft>
+                <a:spcPts val="600"/>
+              </a:spcAft>
+            </a:pPr>
+            <a:r>
+              <a:rPr sz="2400" b="0" i="1">
+                <a:solidFill>
+                  <a:srgbClr val="222B22"/>
+                </a:solidFill>
+                <a:latin typeface="Cambria"/>
+              </a:rPr>
+              <a:t>the Lord make his face to shine upon you, and be gracious to you;</a:t>
+            </a:r>
+          </a:p>
+          <a:p>
+            <a:pPr>
+              <a:spcAft>
+                <a:spcPts val="600"/>
+              </a:spcAft>
+            </a:pPr>
+            <a:r>
+              <a:rPr sz="2400" b="0" i="1">
+                <a:solidFill>
+                  <a:srgbClr val="222B22"/>
+                </a:solidFill>
+                <a:latin typeface="Cambria"/>
+              </a:rPr>
+              <a:t>the Lord lift up his countenance upon you, and give you peace.”</a:t>
+            </a:r>
+          </a:p>
+        </p:txBody>
+      </p:sp>
+      <p:sp>
+        <p:nvSpPr>
+          <p:cNvPr id="90" name="SlideNum"/>
+          <p:cNvSpPr txBox="1"/>
+          <p:nvPr/>
+        </p:nvSpPr>
+        <p:spPr>
+          <a:xfrm>
+            <a:off x="11384280" y="6446520"/>
+            <a:ext cx="640080" cy="292608"/>
+          </a:xfrm>
+          <a:prstGeom prst="rect">
+            <a:avLst/>
+          </a:prstGeom>
+          <a:noFill/>
+        </p:spPr>
+        <p:txBody>
+          <a:bodyPr wrap="none" lIns="0" tIns="0" rIns="45720" bIns="0" anchor="ctr"/>
+          <a:lstStyle/>
+          <a:p>
+            <a:pPr algn="r"/>
+            <a:r>
+              <a:t>176</a:t>
+            </a:r>
+            <a:endParaRPr sz="1000" b="1">
+              <a:solidFill>
+                <a:srgbClr val="7A8A6E"/>
+              </a:solidFill>
+              <a:latin typeface="Calibri"/>
+            </a:endParaRPr>
+          </a:p>
+        </p:txBody>
+      </p:sp>
+    </p:spTree>
+  </p:cSld>
+  <p:clrMapOvr>
+    <a:masterClrMapping/>
+  </p:clrMapOvr>
+</p:sld>
+</file>
+
+<file path=ppt/slides/slide15.xml><?xml version="1.0" encoding="utf-8"?>
+<p:sld xmlns:a="http://schemas.openxmlformats.org/drawingml/2006/main" xmlns:p="http://schemas.openxmlformats.org/presentationml/2006/main" xmlns:r="http://schemas.openxmlformats.org/officeDocument/2006/relationships">
+  <p:cSld>
+    <p:spTree>
+      <p:nvGrpSpPr>
+        <p:cNvPr id="1" name=""/>
+        <p:cNvGrpSpPr/>
+        <p:nvPr/>
+      </p:nvGrpSpPr>
+      <p:grpSpPr/>
+      <p:sp>
+        <p:nvSpPr>
+          <p:cNvPr id="2" name="Rectangle 1"/>
+          <p:cNvSpPr/>
+          <p:nvPr/>
+        </p:nvSpPr>
+        <p:spPr>
+          <a:xfrm>
+            <a:off x="0" y="0"/>
+            <a:ext cx="12192000" cy="6858000"/>
+          </a:xfrm>
+          <a:prstGeom prst="rect">
+            <a:avLst/>
+          </a:prstGeom>
+          <a:solidFill>
+            <a:srgbClr val="FFFFFF"/>
+          </a:solidFill>
+          <a:ln>
+            <a:noFill/>
+          </a:ln>
+          <a:effectLst/>
+        </p:spPr>
+        <p:style>
+          <a:lnRef idx="1">
+            <a:schemeClr val="accent1"/>
+          </a:lnRef>
+          <a:fillRef idx="3">
+            <a:schemeClr val="accent1"/>
+          </a:fillRef>
+          <a:effectRef idx="2">
+            <a:schemeClr val="accent1"/>
+          </a:effectRef>
+          <a:fontRef idx="minor">
+            <a:schemeClr val="lt1"/>
+          </a:fontRef>
+        </p:style>
+        <p:txBody>
+          <a:bodyPr rtlCol="0" anchor="ctr"/>
+          <a:lstStyle/>
+          <a:p>
+            <a:pPr algn="ctr"/>
+          </a:p>
+        </p:txBody>
+      </p:sp>
+      <p:sp>
+        <p:nvSpPr>
+          <p:cNvPr id="3" name="TextBox 2"/>
+          <p:cNvSpPr txBox="1"/>
+          <p:nvPr/>
+        </p:nvSpPr>
+        <p:spPr>
+          <a:xfrm>
+            <a:off x="822960" y="502920"/>
+            <a:ext cx="10515600" cy="822960"/>
+          </a:xfrm>
+          <a:prstGeom prst="rect">
+            <a:avLst/>
+          </a:prstGeom>
+          <a:noFill/>
+        </p:spPr>
+        <p:txBody>
+          <a:bodyPr wrap="square">
+            <a:spAutoFit/>
+          </a:bodyPr>
+          <a:lstStyle/>
+          <a:p>
+            <a:r>
+              <a:rPr sz="2800" b="1">
+                <a:solidFill>
+                  <a:srgbClr val="2C5F2D"/>
+                </a:solidFill>
+                <a:latin typeface="Cambria"/>
+              </a:rPr>
+              <a:t>Where We Are — the Four Connects</a:t>
+            </a:r>
+          </a:p>
+        </p:txBody>
+      </p:sp>
+      <p:pic>
+        <p:nvPicPr>
+          <p:cNvPr id="4" name="Picture 3" descr="four-connects.png"/>
+          <p:cNvPicPr>
+            <a:picLocks noChangeAspect="1"/>
+          </p:cNvPicPr>
+          <p:nvPr/>
+        </p:nvPicPr>
+        <p:blipFill>
+          <a:blip r:embed="rId2"/>
+          <a:stretch>
+            <a:fillRect/>
+          </a:stretch>
+        </p:blipFill>
+        <p:spPr>
+          <a:xfrm>
+            <a:off x="932688" y="1645920"/>
+            <a:ext cx="10332720" cy="3708663"/>
+          </a:xfrm>
+          <a:prstGeom prst="rect">
+            <a:avLst/>
+          </a:prstGeom>
+        </p:spPr>
+      </p:pic>
+      <p:sp>
+        <p:nvSpPr>
+          <p:cNvPr id="5" name="TextBox 4"/>
+          <p:cNvSpPr txBox="1"/>
+          <p:nvPr/>
+        </p:nvSpPr>
+        <p:spPr>
+          <a:xfrm>
+            <a:off x="822960" y="5623560"/>
+            <a:ext cx="10515600" cy="914400"/>
+          </a:xfrm>
+          <a:prstGeom prst="rect">
+            <a:avLst/>
+          </a:prstGeom>
+          <a:noFill/>
+        </p:spPr>
+        <p:txBody>
+          <a:bodyPr wrap="square">
+            <a:spAutoFit/>
+          </a:bodyPr>
+          <a:lstStyle/>
+          <a:p>
+            <a:r>
+              <a:rPr sz="1800" b="0">
+                <a:solidFill>
+                  <a:srgbClr val="222B22"/>
+                </a:solidFill>
+                <a:latin typeface="Calibri"/>
+              </a:rPr>
+              <a:t>Session 13 stands in the fourth box — </a:t>
+            </a:r>
+            <a:r>
+              <a:rPr sz="1800" b="1">
+                <a:solidFill>
+                  <a:srgbClr val="2C5F2D"/>
+                </a:solidFill>
+                <a:latin typeface="Calibri"/>
+              </a:rPr>
+              <a:t>Connect with Mission</a:t>
+            </a:r>
+            <a:r>
+              <a:rPr sz="1800" b="0">
+                <a:solidFill>
+                  <a:srgbClr val="222B22"/>
+                </a:solidFill>
+                <a:latin typeface="Calibri"/>
+              </a:rPr>
+              <a:t>: the works He prepared (Eph. 2:10). Each connection makes the next one real (Matt. 22:37–40).</a:t>
+            </a:r>
+          </a:p>
+        </p:txBody>
+      </p:sp>
+      <p:sp>
+        <p:nvSpPr>
+          <p:cNvPr id="90" name="SlideNum"/>
+          <p:cNvSpPr txBox="1"/>
+          <p:nvPr/>
+        </p:nvSpPr>
+        <p:spPr>
+          <a:xfrm>
+            <a:off x="11384280" y="6446520"/>
+            <a:ext cx="640080" cy="292608"/>
+          </a:xfrm>
+          <a:prstGeom prst="rect">
+            <a:avLst/>
+          </a:prstGeom>
+          <a:noFill/>
+        </p:spPr>
+        <p:txBody>
+          <a:bodyPr wrap="none" lIns="0" tIns="0" rIns="45720" bIns="0" anchor="ctr"/>
+          <a:lstStyle/>
+          <a:p>
+            <a:pPr algn="r"/>
+            <a:r>
+              <a:t>164a</a:t>
+            </a:r>
+            <a:endParaRPr sz="1000" b="1">
+              <a:solidFill>
+                <a:srgbClr val="7A8A6E"/>
+              </a:solidFill>
+              <a:latin typeface="Calibri"/>
+            </a:endParaRPr>
+          </a:p>
+        </p:txBody>
+      </p:sp>
+    </p:spTree>
+  </p:cSld>
+  <p:clrMapOvr>
+    <a:masterClrMapping/>
+  </p:clrMapOvr>
+</p:sld>
+</file>
+
+<file path=ppt/slides/slide16.xml><?xml version="1.0" encoding="utf-8"?>
+<p:sld xmlns:a="http://schemas.openxmlformats.org/drawingml/2006/main" xmlns:p="http://schemas.openxmlformats.org/presentationml/2006/main" xmlns:r="http://schemas.openxmlformats.org/officeDocument/2006/relationships">
+  <p:cSld>
+    <p:spTree>
+      <p:nvGrpSpPr>
+        <p:cNvPr id="1" name=""/>
+        <p:cNvGrpSpPr/>
+        <p:nvPr/>
+      </p:nvGrpSpPr>
+      <p:grpSpPr/>
+      <p:sp>
+        <p:nvSpPr>
+          <p:cNvPr id="2" name="Rectangle 1"/>
+          <p:cNvSpPr/>
+          <p:nvPr/>
+        </p:nvSpPr>
+        <p:spPr>
+          <a:xfrm>
+            <a:off x="0" y="0"/>
+            <a:ext cx="12192000" cy="6858000"/>
+          </a:xfrm>
+          <a:prstGeom prst="rect">
+            <a:avLst/>
+          </a:prstGeom>
+          <a:solidFill>
+            <a:srgbClr val="FFFFFF"/>
+          </a:solidFill>
+          <a:ln>
+            <a:noFill/>
+          </a:ln>
+          <a:effectLst/>
+        </p:spPr>
+        <p:style>
+          <a:lnRef idx="1">
+            <a:schemeClr val="accent1"/>
+          </a:lnRef>
+          <a:fillRef idx="3">
+            <a:schemeClr val="accent1"/>
+          </a:fillRef>
+          <a:effectRef idx="2">
+            <a:schemeClr val="accent1"/>
+          </a:effectRef>
+          <a:fontRef idx="minor">
+            <a:schemeClr val="lt1"/>
+          </a:fontRef>
+        </p:style>
+        <p:txBody>
+          <a:bodyPr rtlCol="0" anchor="ctr"/>
+          <a:lstStyle/>
+          <a:p>
+            <a:pPr algn="ctr"/>
+          </a:p>
+        </p:txBody>
+      </p:sp>
+      <p:sp>
+        <p:nvSpPr>
+          <p:cNvPr id="3" name="TextBox 2"/>
+          <p:cNvSpPr txBox="1"/>
+          <p:nvPr/>
+        </p:nvSpPr>
+        <p:spPr>
+          <a:xfrm>
+            <a:off x="822960" y="502920"/>
+            <a:ext cx="10515600" cy="822960"/>
+          </a:xfrm>
+          <a:prstGeom prst="rect">
+            <a:avLst/>
+          </a:prstGeom>
+          <a:noFill/>
+        </p:spPr>
+        <p:txBody>
+          <a:bodyPr wrap="square">
+            <a:spAutoFit/>
+          </a:bodyPr>
+          <a:lstStyle/>
+          <a:p>
+            <a:r>
+              <a:rPr sz="2800" b="1">
+                <a:solidFill>
+                  <a:srgbClr val="2C5F2D"/>
+                </a:solidFill>
+                <a:latin typeface="Cambria"/>
+              </a:rPr>
+              <a:t>The Take-Home Sheet — the Daily Rhythm</a:t>
+            </a:r>
+          </a:p>
+        </p:txBody>
+      </p:sp>
+      <p:pic>
+        <p:nvPicPr>
+          <p:cNvPr id="4" name="Picture 3" descr="s13_part1.png"/>
+          <p:cNvPicPr>
+            <a:picLocks noChangeAspect="1"/>
+          </p:cNvPicPr>
+          <p:nvPr/>
+        </p:nvPicPr>
+        <p:blipFill>
+          <a:blip r:embed="rId2"/>
+          <a:stretch>
+            <a:fillRect/>
+          </a:stretch>
+        </p:blipFill>
+        <p:spPr>
+          <a:xfrm>
+            <a:off x="1798167" y="1463040"/>
+            <a:ext cx="8595360" cy="4457308"/>
+          </a:xfrm>
+          <a:prstGeom prst="rect">
+            <a:avLst/>
+          </a:prstGeom>
+          <a:ln w="12700">
+            <a:solidFill>
+              <a:srgbClr val="C8C8C8"/>
+            </a:solidFill>
+          </a:ln>
+        </p:spPr>
+      </p:pic>
+      <p:sp>
+        <p:nvSpPr>
+          <p:cNvPr id="5" name="TextBox 4"/>
+          <p:cNvSpPr txBox="1"/>
+          <p:nvPr/>
+        </p:nvSpPr>
+        <p:spPr>
+          <a:xfrm>
+            <a:off x="822960" y="6355080"/>
+            <a:ext cx="10515600" cy="411480"/>
+          </a:xfrm>
+          <a:prstGeom prst="rect">
+            <a:avLst/>
+          </a:prstGeom>
+          <a:noFill/>
+        </p:spPr>
+        <p:txBody>
+          <a:bodyPr wrap="square">
+            <a:spAutoFit/>
+          </a:bodyPr>
+          <a:lstStyle/>
+          <a:p>
+            <a:r>
+              <a:rPr sz="1400" i="1">
+                <a:solidFill>
+                  <a:srgbClr val="595959"/>
+                </a:solidFill>
+                <a:latin typeface="Calibri"/>
+              </a:rPr>
+              <a:t>Handed out now — this is the sheet in your hands.</a:t>
+            </a:r>
+          </a:p>
+        </p:txBody>
+      </p:sp>
+      <p:sp>
+        <p:nvSpPr>
+          <p:cNvPr id="90" name="SlideNum"/>
+          <p:cNvSpPr txBox="1"/>
+          <p:nvPr/>
+        </p:nvSpPr>
+        <p:spPr>
+          <a:xfrm>
+            <a:off x="11384280" y="6446520"/>
+            <a:ext cx="640080" cy="292608"/>
+          </a:xfrm>
+          <a:prstGeom prst="rect">
+            <a:avLst/>
+          </a:prstGeom>
+          <a:noFill/>
+        </p:spPr>
+        <p:txBody>
+          <a:bodyPr wrap="none" lIns="0" tIns="0" rIns="45720" bIns="0" anchor="ctr"/>
+          <a:lstStyle/>
+          <a:p>
+            <a:pPr algn="r"/>
+            <a:r>
+              <a:t>174</a:t>
+            </a:r>
+            <a:endParaRPr sz="1000" b="1">
+              <a:solidFill>
+                <a:srgbClr val="7A8A6E"/>
+              </a:solidFill>
+              <a:latin typeface="Calibri"/>
+            </a:endParaRPr>
+          </a:p>
+        </p:txBody>
+      </p:sp>
+    </p:spTree>
+  </p:cSld>
+  <p:clrMapOvr>
+    <a:masterClrMapping/>
+  </p:clrMapOvr>
+</p:sld>
+</file>
+
+<file path=ppt/slides/slide17.xml><?xml version="1.0" encoding="utf-8"?>
+<p:sld xmlns:a="http://schemas.openxmlformats.org/drawingml/2006/main" xmlns:p="http://schemas.openxmlformats.org/presentationml/2006/main" xmlns:r="http://schemas.openxmlformats.org/officeDocument/2006/relationships">
+  <p:cSld>
+    <p:spTree>
+      <p:nvGrpSpPr>
+        <p:cNvPr id="1" name=""/>
+        <p:cNvGrpSpPr/>
+        <p:nvPr/>
+      </p:nvGrpSpPr>
+      <p:grpSpPr/>
+      <p:sp>
+        <p:nvSpPr>
+          <p:cNvPr id="2" name="Rectangle 1"/>
+          <p:cNvSpPr/>
+          <p:nvPr/>
+        </p:nvSpPr>
+        <p:spPr>
+          <a:xfrm>
+            <a:off x="0" y="0"/>
+            <a:ext cx="12192000" cy="6858000"/>
+          </a:xfrm>
+          <a:prstGeom prst="rect">
+            <a:avLst/>
+          </a:prstGeom>
+          <a:solidFill>
+            <a:srgbClr val="FFFFFF"/>
+          </a:solidFill>
+          <a:ln>
+            <a:noFill/>
+          </a:ln>
+          <a:effectLst/>
+        </p:spPr>
+        <p:style>
+          <a:lnRef idx="1">
+            <a:schemeClr val="accent1"/>
+          </a:lnRef>
+          <a:fillRef idx="3">
+            <a:schemeClr val="accent1"/>
+          </a:fillRef>
+          <a:effectRef idx="2">
+            <a:schemeClr val="accent1"/>
+          </a:effectRef>
+          <a:fontRef idx="minor">
+            <a:schemeClr val="lt1"/>
+          </a:fontRef>
+        </p:style>
+        <p:txBody>
+          <a:bodyPr rtlCol="0" anchor="ctr"/>
+          <a:lstStyle/>
+          <a:p>
+            <a:pPr algn="ctr"/>
+          </a:p>
+        </p:txBody>
+      </p:sp>
+      <p:sp>
+        <p:nvSpPr>
+          <p:cNvPr id="3" name="TextBox 2"/>
+          <p:cNvSpPr txBox="1"/>
+          <p:nvPr/>
+        </p:nvSpPr>
+        <p:spPr>
+          <a:xfrm>
+            <a:off x="822960" y="502920"/>
+            <a:ext cx="10515600" cy="822960"/>
+          </a:xfrm>
+          <a:prstGeom prst="rect">
+            <a:avLst/>
+          </a:prstGeom>
+          <a:noFill/>
+        </p:spPr>
+        <p:txBody>
+          <a:bodyPr wrap="square">
+            <a:spAutoFit/>
+          </a:bodyPr>
+          <a:lstStyle/>
+          <a:p>
+            <a:r>
+              <a:rPr sz="2800" b="1">
+                <a:solidFill>
+                  <a:srgbClr val="2C5F2D"/>
+                </a:solidFill>
+                <a:latin typeface="Cambria"/>
+              </a:rPr>
+              <a:t>The Take-Home Sheet — the Four Parts</a:t>
+            </a:r>
+          </a:p>
+        </p:txBody>
+      </p:sp>
+      <p:pic>
+        <p:nvPicPr>
+          <p:cNvPr id="4" name="Picture 3" descr="s13_part2.png"/>
+          <p:cNvPicPr>
+            <a:picLocks noChangeAspect="1"/>
+          </p:cNvPicPr>
+          <p:nvPr/>
+        </p:nvPicPr>
+        <p:blipFill>
+          <a:blip r:embed="rId2"/>
+          <a:stretch>
+            <a:fillRect/>
+          </a:stretch>
+        </p:blipFill>
+        <p:spPr>
+          <a:xfrm>
+            <a:off x="2070924" y="1463040"/>
+            <a:ext cx="8049846" cy="4709160"/>
+          </a:xfrm>
+          <a:prstGeom prst="rect">
+            <a:avLst/>
+          </a:prstGeom>
+          <a:ln w="12700">
+            <a:solidFill>
+              <a:srgbClr val="C8C8C8"/>
+            </a:solidFill>
+          </a:ln>
+        </p:spPr>
+      </p:pic>
+      <p:sp>
+        <p:nvSpPr>
+          <p:cNvPr id="5" name="TextBox 4"/>
+          <p:cNvSpPr txBox="1"/>
+          <p:nvPr/>
+        </p:nvSpPr>
+        <p:spPr>
+          <a:xfrm>
+            <a:off x="822960" y="6355080"/>
+            <a:ext cx="10515600" cy="411480"/>
+          </a:xfrm>
+          <a:prstGeom prst="rect">
+            <a:avLst/>
+          </a:prstGeom>
+          <a:noFill/>
+        </p:spPr>
+        <p:txBody>
+          <a:bodyPr wrap="square">
+            <a:spAutoFit/>
+          </a:bodyPr>
+          <a:lstStyle/>
+          <a:p>
+            <a:r>
+              <a:rPr sz="1400" i="1">
+                <a:solidFill>
+                  <a:srgbClr val="595959"/>
+                </a:solidFill>
+                <a:latin typeface="Calibri"/>
+              </a:rPr>
+              <a:t>One practice at a time — and a partner expecting you at the end of week one.</a:t>
+            </a:r>
+          </a:p>
+        </p:txBody>
+      </p:sp>
+      <p:sp>
+        <p:nvSpPr>
+          <p:cNvPr id="90" name="SlideNum"/>
+          <p:cNvSpPr txBox="1"/>
+          <p:nvPr/>
+        </p:nvSpPr>
+        <p:spPr>
+          <a:xfrm>
+            <a:off x="11384280" y="6446520"/>
+            <a:ext cx="640080" cy="292608"/>
+          </a:xfrm>
+          <a:prstGeom prst="rect">
+            <a:avLst/>
+          </a:prstGeom>
+          <a:noFill/>
+        </p:spPr>
+        <p:txBody>
+          <a:bodyPr wrap="none" lIns="0" tIns="0" rIns="45720" bIns="0" anchor="ctr"/>
+          <a:lstStyle/>
+          <a:p>
+            <a:pPr algn="r"/>
+            <a:r>
+              <a:t>174a</a:t>
+            </a:r>
+            <a:endParaRPr sz="1000" b="1">
+              <a:solidFill>
+                <a:srgbClr val="7A8A6E"/>
+              </a:solidFill>
+              <a:latin typeface="Calibri"/>
+            </a:endParaRPr>
+          </a:p>
+        </p:txBody>
+      </p:sp>
+    </p:spTree>
+  </p:cSld>
+  <p:clrMapOvr>
+    <a:masterClrMapping/>
+  </p:clrMapOvr>
+</p:sld>
+</file>
+
+<file path=ppt/slides/slide2.xml><?xml version="1.0" encoding="utf-8"?>
 <p:sld xmlns:a="http://schemas.openxmlformats.org/drawingml/2006/main" xmlns:r="http://schemas.openxmlformats.org/officeDocument/2006/relationships" xmlns:p="http://schemas.openxmlformats.org/presentationml/2006/main">
   <p:cSld>
     <p:spTree>
@@ -4978,7 +7026,7 @@
 </p:sld>
 </file>
 
-<file path=ppt/slides/slide165.xml><?xml version="1.0" encoding="utf-8"?>
+<file path=ppt/slides/slide3.xml><?xml version="1.0" encoding="utf-8"?>
 <p:sld xmlns:a="http://schemas.openxmlformats.org/drawingml/2006/main" xmlns:r="http://schemas.openxmlformats.org/officeDocument/2006/relationships" xmlns:p="http://schemas.openxmlformats.org/presentationml/2006/main">
   <p:cSld>
     <p:spTree>
@@ -5404,7 +7452,7 @@
 </p:sld>
 </file>
 
-<file path=ppt/slides/slide166.xml><?xml version="1.0" encoding="utf-8"?>
+<file path=ppt/slides/slide4.xml><?xml version="1.0" encoding="utf-8"?>
 <p:sld xmlns:a="http://schemas.openxmlformats.org/drawingml/2006/main" xmlns:r="http://schemas.openxmlformats.org/officeDocument/2006/relationships" xmlns:p="http://schemas.openxmlformats.org/presentationml/2006/main">
   <p:cSld>
     <p:spTree>
@@ -5751,7 +7799,7 @@
 </p:sld>
 </file>
 
-<file path=ppt/slides/slide167.xml><?xml version="1.0" encoding="utf-8"?>
+<file path=ppt/slides/slide5.xml><?xml version="1.0" encoding="utf-8"?>
 <p:sld xmlns:a="http://schemas.openxmlformats.org/drawingml/2006/main" xmlns:r="http://schemas.openxmlformats.org/officeDocument/2006/relationships" xmlns:p="http://schemas.openxmlformats.org/presentationml/2006/main">
   <p:cSld>
     <p:spTree>
@@ -6034,7 +8082,7 @@
 </p:sld>
 </file>
 
-<file path=ppt/slides/slide168.xml><?xml version="1.0" encoding="utf-8"?>
+<file path=ppt/slides/slide6.xml><?xml version="1.0" encoding="utf-8"?>
 <p:sld xmlns:a="http://schemas.openxmlformats.org/drawingml/2006/main" xmlns:r="http://schemas.openxmlformats.org/officeDocument/2006/relationships" xmlns:p="http://schemas.openxmlformats.org/presentationml/2006/main">
   <p:cSld>
     <p:spTree>
@@ -6361,7 +8409,7 @@
 </p:sld>
 </file>
 
-<file path=ppt/slides/slide169.xml><?xml version="1.0" encoding="utf-8"?>
+<file path=ppt/slides/slide7.xml><?xml version="1.0" encoding="utf-8"?>
 <p:sld xmlns:a="http://schemas.openxmlformats.org/drawingml/2006/main" xmlns:r="http://schemas.openxmlformats.org/officeDocument/2006/relationships" xmlns:p="http://schemas.openxmlformats.org/presentationml/2006/main">
   <p:cSld>
     <p:spTree>
@@ -6523,7 +8571,7 @@
 </p:sld>
 </file>
 
-<file path=ppt/slides/slide170.xml><?xml version="1.0" encoding="utf-8"?>
+<file path=ppt/slides/slide8.xml><?xml version="1.0" encoding="utf-8"?>
 <p:sld xmlns:a="http://schemas.openxmlformats.org/drawingml/2006/main" xmlns:r="http://schemas.openxmlformats.org/officeDocument/2006/relationships" xmlns:p="http://schemas.openxmlformats.org/presentationml/2006/main">
   <p:cSld>
     <p:spTree>
@@ -6820,7 +8868,7 @@
 </p:sld>
 </file>
 
-<file path=ppt/slides/slide171.xml><?xml version="1.0" encoding="utf-8"?>
+<file path=ppt/slides/slide9.xml><?xml version="1.0" encoding="utf-8"?>
 <p:sld xmlns:a="http://schemas.openxmlformats.org/drawingml/2006/main" xmlns:r="http://schemas.openxmlformats.org/officeDocument/2006/relationships" xmlns:p="http://schemas.openxmlformats.org/presentationml/2006/main">
   <p:cSld>
     <p:spTree>
@@ -7099,1498 +9147,6 @@
             <a:pPr algn="r"/>
             <a:r>
               <a:t>171</a:t>
-            </a:r>
-            <a:endParaRPr sz="1000" b="1">
-              <a:solidFill>
-                <a:srgbClr val="7A8A6E"/>
-              </a:solidFill>
-              <a:latin typeface="Calibri"/>
-            </a:endParaRPr>
-          </a:p>
-        </p:txBody>
-      </p:sp>
-    </p:spTree>
-  </p:cSld>
-  <p:clrMapOvr>
-    <a:masterClrMapping/>
-  </p:clrMapOvr>
-</p:sld>
-</file>
-
-<file path=ppt/slides/slide172.xml><?xml version="1.0" encoding="utf-8"?>
-<p:sld xmlns:a="http://schemas.openxmlformats.org/drawingml/2006/main" xmlns:r="http://schemas.openxmlformats.org/officeDocument/2006/relationships" xmlns:p="http://schemas.openxmlformats.org/presentationml/2006/main">
-  <p:cSld>
-    <p:spTree>
-      <p:nvGrpSpPr>
-        <p:cNvPr id="1" name=""/>
-        <p:cNvGrpSpPr/>
-        <p:nvPr/>
-      </p:nvGrpSpPr>
-      <p:grpSpPr>
-        <a:xfrm>
-          <a:off x="0" y="0"/>
-          <a:ext cx="0" cy="0"/>
-          <a:chOff x="0" y="0"/>
-          <a:chExt cx="0" cy="0"/>
-        </a:xfrm>
-      </p:grpSpPr>
-      <p:sp>
-        <p:nvSpPr>
-          <p:cNvPr id="2" name="Rectangle 1"/>
-          <p:cNvSpPr/>
-          <p:nvPr/>
-        </p:nvSpPr>
-        <p:spPr>
-          <a:xfrm>
-            <a:off x="0" y="0"/>
-            <a:ext cx="12191695" cy="6858000"/>
-          </a:xfrm>
-          <a:prstGeom prst="rect">
-            <a:avLst/>
-          </a:prstGeom>
-          <a:solidFill>
-            <a:srgbClr val="FFFFFF"/>
-          </a:solidFill>
-          <a:ln>
-            <a:noFill/>
-          </a:ln>
-        </p:spPr>
-        <p:txBody>
-          <a:bodyPr/>
-          <a:lstStyle/>
-          <a:p>
-            <a:endParaRPr/>
-          </a:p>
-        </p:txBody>
-      </p:sp>
-      <p:sp>
-        <p:nvSpPr>
-          <p:cNvPr id="3" name="TextBox 2"/>
-          <p:cNvSpPr txBox="1"/>
-          <p:nvPr/>
-        </p:nvSpPr>
-        <p:spPr>
-          <a:xfrm>
-            <a:off x="822960" y="502920"/>
-            <a:ext cx="10515600" cy="822960"/>
-          </a:xfrm>
-          <a:prstGeom prst="rect">
-            <a:avLst/>
-          </a:prstGeom>
-          <a:noFill/>
-        </p:spPr>
-        <p:txBody>
-          <a:bodyPr wrap="square">
-            <a:spAutoFit/>
-          </a:bodyPr>
-          <a:lstStyle/>
-          <a:p>
-            <a:pPr algn="l">
-              <a:spcAft>
-                <a:spcPts val="600"/>
-              </a:spcAft>
-            </a:pPr>
-            <a:r>
-              <a:rPr sz="2800" b="1" i="0">
-                <a:solidFill>
-                  <a:srgbClr val="2C5F2D"/>
-                </a:solidFill>
-                <a:latin typeface="Cambria"/>
-              </a:rPr>
-              <a:t>Merge and Surface</a:t>
-            </a:r>
-          </a:p>
-        </p:txBody>
-      </p:sp>
-      <p:sp>
-        <p:nvSpPr>
-          <p:cNvPr id="4" name="TextBox 4"/>
-          <p:cNvSpPr txBox="1"/>
-          <p:nvPr/>
-        </p:nvSpPr>
-        <p:spPr>
-          <a:xfrm>
-            <a:off x="822960" y="1554480"/>
-            <a:ext cx="10515600" cy="4892040"/>
-          </a:xfrm>
-          <a:prstGeom prst="rect">
-            <a:avLst/>
-          </a:prstGeom>
-          <a:noFill/>
-        </p:spPr>
-        <p:txBody>
-          <a:bodyPr wrap="square" lIns="91440" tIns="91440" rIns="91440" bIns="91440"/>
-          <a:lstStyle/>
-          <a:p>
-            <a:pPr marL="274320" indent="-274320">
-              <a:spcAft>
-                <a:spcPts val="900"/>
-              </a:spcAft>
-            </a:pPr>
-            <a:r>
-              <a:rPr sz="2800" b="1" i="0">
-                <a:solidFill>
-                  <a:srgbClr val="97BC62"/>
-                </a:solidFill>
-                <a:latin typeface="Calibri"/>
-              </a:rPr>
-              <a:t>•  </a:t>
-            </a:r>
-            <a:r>
-              <a:rPr sz="2800" b="0" i="0">
-                <a:solidFill>
-                  <a:srgbClr val="222B22"/>
-                </a:solidFill>
-                <a:latin typeface="Calibri"/>
-              </a:rPr>
-              <a:t>What was named in your pair stays in your pair — nobody repeats their downhill answer</a:t>
-            </a:r>
-          </a:p>
-          <a:p>
-            <a:pPr marL="274320" indent="-274320">
-              <a:spcAft>
-                <a:spcPts val="900"/>
-              </a:spcAft>
-            </a:pPr>
-            <a:r>
-              <a:rPr sz="2800" b="1" i="0">
-                <a:solidFill>
-                  <a:srgbClr val="97BC62"/>
-                </a:solidFill>
-                <a:latin typeface="Calibri"/>
-              </a:rPr>
-              <a:t>•  </a:t>
-            </a:r>
-            <a:r>
-              <a:rPr sz="2800" b="0" i="0">
-                <a:solidFill>
-                  <a:srgbClr val="222B22"/>
-                </a:solidFill>
-                <a:latin typeface="Calibri"/>
-              </a:rPr>
-              <a:t>One sentence from each leadsanion — one general thing they noticed, not a specific person</a:t>
-            </a:r>
-          </a:p>
-          <a:p>
-            <a:pPr marL="274320" indent="-274320">
-              <a:spcAft>
-                <a:spcPts val="900"/>
-              </a:spcAft>
-            </a:pPr>
-            <a:r>
-              <a:rPr sz="2800" b="1" i="0">
-                <a:solidFill>
-                  <a:srgbClr val="97BC62"/>
-                </a:solidFill>
-                <a:latin typeface="Calibri"/>
-              </a:rPr>
-              <a:t>•  </a:t>
-            </a:r>
-            <a:r>
-              <a:rPr sz="2800" b="0" i="0">
-                <a:solidFill>
-                  <a:srgbClr val="222B22"/>
-                </a:solidFill>
-                <a:latin typeface="Calibri"/>
-              </a:rPr>
-              <a:t>Then one observation across the room</a:t>
-            </a:r>
-          </a:p>
-          <a:p>
-            <a:pPr marL="274320" indent="-274320">
-              <a:spcAft>
-                <a:spcPts val="900"/>
-              </a:spcAft>
-            </a:pPr>
-            <a:r>
-              <a:rPr sz="2800" b="1" i="0">
-                <a:solidFill>
-                  <a:srgbClr val="97BC62"/>
-                </a:solidFill>
-                <a:latin typeface="Calibri"/>
-              </a:rPr>
-              <a:t>•  </a:t>
-            </a:r>
-            <a:r>
-              <a:rPr sz="2800" b="0" i="0">
-                <a:solidFill>
-                  <a:srgbClr val="222B22"/>
-                </a:solidFill>
-                <a:latin typeface="Calibri"/>
-              </a:rPr>
-              <a:t>“The downhill mission you named is not a final answer. It is the working draft you are walking in this season.” It will deepen. It will sharpen</a:t>
-            </a:r>
-          </a:p>
-        </p:txBody>
-      </p:sp>
-      <p:sp>
-        <p:nvSpPr>
-          <p:cNvPr id="90" name="SlideNum"/>
-          <p:cNvSpPr txBox="1"/>
-          <p:nvPr/>
-        </p:nvSpPr>
-        <p:spPr>
-          <a:xfrm>
-            <a:off x="11384280" y="6446520"/>
-            <a:ext cx="640080" cy="292608"/>
-          </a:xfrm>
-          <a:prstGeom prst="rect">
-            <a:avLst/>
-          </a:prstGeom>
-          <a:noFill/>
-        </p:spPr>
-        <p:txBody>
-          <a:bodyPr wrap="none" lIns="0" tIns="0" rIns="45720" bIns="0" anchor="ctr"/>
-          <a:lstStyle/>
-          <a:p>
-            <a:pPr algn="r"/>
-            <a:r>
-              <a:t>172</a:t>
-            </a:r>
-            <a:endParaRPr sz="1000" b="1">
-              <a:solidFill>
-                <a:srgbClr val="7A8A6E"/>
-              </a:solidFill>
-              <a:latin typeface="Calibri"/>
-            </a:endParaRPr>
-          </a:p>
-        </p:txBody>
-      </p:sp>
-    </p:spTree>
-  </p:cSld>
-  <p:clrMapOvr>
-    <a:masterClrMapping/>
-  </p:clrMapOvr>
-</p:sld>
-</file>
-
-<file path=ppt/slides/slide173.xml><?xml version="1.0" encoding="utf-8"?>
-<p:sld xmlns:a="http://schemas.openxmlformats.org/drawingml/2006/main" xmlns:r="http://schemas.openxmlformats.org/officeDocument/2006/relationships" xmlns:p="http://schemas.openxmlformats.org/presentationml/2006/main">
-  <p:cSld>
-    <p:spTree>
-      <p:nvGrpSpPr>
-        <p:cNvPr id="1" name=""/>
-        <p:cNvGrpSpPr/>
-        <p:nvPr/>
-      </p:nvGrpSpPr>
-      <p:grpSpPr>
-        <a:xfrm>
-          <a:off x="0" y="0"/>
-          <a:ext cx="0" cy="0"/>
-          <a:chOff x="0" y="0"/>
-          <a:chExt cx="0" cy="0"/>
-        </a:xfrm>
-      </p:grpSpPr>
-      <p:sp>
-        <p:nvSpPr>
-          <p:cNvPr id="2" name="Rectangle 1"/>
-          <p:cNvSpPr/>
-          <p:nvPr/>
-        </p:nvSpPr>
-        <p:spPr>
-          <a:xfrm>
-            <a:off x="0" y="0"/>
-            <a:ext cx="12191695" cy="6858000"/>
-          </a:xfrm>
-          <a:prstGeom prst="rect">
-            <a:avLst/>
-          </a:prstGeom>
-          <a:solidFill>
-            <a:srgbClr val="FFFFFF"/>
-          </a:solidFill>
-          <a:ln>
-            <a:noFill/>
-          </a:ln>
-        </p:spPr>
-        <p:txBody>
-          <a:bodyPr/>
-          <a:lstStyle/>
-          <a:p>
-            <a:endParaRPr/>
-          </a:p>
-        </p:txBody>
-      </p:sp>
-      <p:sp>
-        <p:nvSpPr>
-          <p:cNvPr id="3" name="TextBox 2"/>
-          <p:cNvSpPr txBox="1"/>
-          <p:nvPr/>
-        </p:nvSpPr>
-        <p:spPr>
-          <a:xfrm>
-            <a:off x="822960" y="502920"/>
-            <a:ext cx="10515600" cy="822960"/>
-          </a:xfrm>
-          <a:prstGeom prst="rect">
-            <a:avLst/>
-          </a:prstGeom>
-          <a:noFill/>
-        </p:spPr>
-        <p:txBody>
-          <a:bodyPr wrap="square">
-            <a:spAutoFit/>
-          </a:bodyPr>
-          <a:lstStyle/>
-          <a:p>
-            <a:pPr algn="l">
-              <a:spcAft>
-                <a:spcPts val="600"/>
-              </a:spcAft>
-            </a:pPr>
-            <a:r>
-              <a:rPr sz="2800" b="1" i="0">
-                <a:solidFill>
-                  <a:srgbClr val="2C5F2D"/>
-                </a:solidFill>
-                <a:latin typeface="Cambria"/>
-              </a:rPr>
-              <a:t>Practice This Week — and the Road Ahead</a:t>
-            </a:r>
-          </a:p>
-        </p:txBody>
-      </p:sp>
-      <p:sp>
-        <p:nvSpPr>
-          <p:cNvPr id="4" name="TextBox 4"/>
-          <p:cNvSpPr txBox="1"/>
-          <p:nvPr/>
-        </p:nvSpPr>
-        <p:spPr>
-          <a:xfrm>
-            <a:off x="822960" y="1554480"/>
-            <a:ext cx="6675120" cy="4892040"/>
-          </a:xfrm>
-          <a:prstGeom prst="rect">
-            <a:avLst/>
-          </a:prstGeom>
-          <a:noFill/>
-        </p:spPr>
-        <p:txBody>
-          <a:bodyPr wrap="square" lIns="91440" tIns="91440" rIns="91440" bIns="91440"/>
-          <a:lstStyle/>
-          <a:p>
-            <a:pPr marL="274320" indent="-274320">
-              <a:spcAft>
-                <a:spcPts val="900"/>
-              </a:spcAft>
-            </a:pPr>
-            <a:r>
-              <a:rPr sz="2200" b="1" i="0">
-                <a:solidFill>
-                  <a:srgbClr val="97BC62"/>
-                </a:solidFill>
-                <a:latin typeface="Calibri"/>
-              </a:rPr>
-              <a:t>•  </a:t>
-            </a:r>
-            <a:r>
-              <a:rPr sz="2200" b="0" i="0">
-                <a:solidFill>
-                  <a:srgbClr val="222B22"/>
-                </a:solidFill>
-                <a:latin typeface="Calibri"/>
-              </a:rPr>
-              <a:t>One small action this week, aligned with your downhill answer. One. Not a campaign. Specific — then journal what happens</a:t>
-            </a:r>
-          </a:p>
-          <a:p>
-            <a:pPr marL="685800" indent="-274320">
-              <a:spcAft>
-                <a:spcPts val="700"/>
-              </a:spcAft>
-            </a:pPr>
-            <a:r>
-              <a:rPr sz="1800" b="1" i="0">
-                <a:solidFill>
-                  <a:srgbClr val="97BC62"/>
-                </a:solidFill>
-                <a:latin typeface="Calibri"/>
-              </a:rPr>
-              <a:t>–  </a:t>
-            </a:r>
-            <a:r>
-              <a:rPr sz="1800" b="0" i="1">
-                <a:solidFill>
-                  <a:srgbClr val="222B22"/>
-                </a:solidFill>
-                <a:latin typeface="Calibri"/>
-              </a:rPr>
-              <a:t>If your downhill is “the room gets calmer” — sit with a friend in distress this week instead of trying to fix them</a:t>
-            </a:r>
-          </a:p>
-          <a:p>
-            <a:pPr marL="274320" indent="-274320">
-              <a:spcAft>
-                <a:spcPts val="900"/>
-              </a:spcAft>
-            </a:pPr>
-            <a:r>
-              <a:rPr sz="2200" b="1" i="0">
-                <a:solidFill>
-                  <a:srgbClr val="97BC62"/>
-                </a:solidFill>
-                <a:latin typeface="Calibri"/>
-              </a:rPr>
-              <a:t>•  </a:t>
-            </a:r>
-            <a:r>
-              <a:rPr sz="2200" b="0" i="0">
-                <a:solidFill>
-                  <a:srgbClr val="222B22"/>
-                </a:solidFill>
-                <a:latin typeface="Calibri"/>
-              </a:rPr>
-              <a:t>Ahead: the Rhythm week — we build the practices you will carry when the Wednesdays stop</a:t>
-            </a:r>
-          </a:p>
-          <a:p>
-            <a:pPr marL="274320" indent="-274320">
-              <a:spcAft>
-                <a:spcPts val="900"/>
-              </a:spcAft>
-            </a:pPr>
-            <a:r>
-              <a:rPr sz="2200" b="1" i="0">
-                <a:solidFill>
-                  <a:srgbClr val="97BC62"/>
-                </a:solidFill>
-                <a:latin typeface="Calibri"/>
-              </a:rPr>
-              <a:t>•  </a:t>
-            </a:r>
-            <a:r>
-              <a:rPr sz="2200" b="0" i="0">
-                <a:solidFill>
-                  <a:srgbClr val="222B22"/>
-                </a:solidFill>
-                <a:latin typeface="Calibri"/>
-              </a:rPr>
-              <a:t>Week 21 — the family commissioning: bring your whole family, even members who have not been here. We run to 6:15 that night — light food from 4:00 as the room builds</a:t>
-            </a:r>
-          </a:p>
-          <a:p>
-            <a:pPr marL="274320" indent="-274320">
-              <a:spcAft>
-                <a:spcPts val="900"/>
-              </a:spcAft>
-            </a:pPr>
-            <a:r>
-              <a:rPr sz="2200" b="1" i="0">
-                <a:solidFill>
-                  <a:srgbClr val="97BC62"/>
-                </a:solidFill>
-                <a:latin typeface="Calibri"/>
-              </a:rPr>
-              <a:t>•  </a:t>
-            </a:r>
-            <a:r>
-              <a:rPr sz="2200" b="0" i="0">
-                <a:solidFill>
-                  <a:srgbClr val="222B22"/>
-                </a:solidFill>
-                <a:latin typeface="Calibri"/>
-              </a:rPr>
-              <a:t>Week 22 — the commissioning of our Companions-in-Formation. Their night; come to witness it</a:t>
-            </a:r>
-          </a:p>
-        </p:txBody>
-      </p:sp>
-      <p:sp>
-        <p:nvSpPr>
-          <p:cNvPr id="90" name="SlideNum"/>
-          <p:cNvSpPr txBox="1"/>
-          <p:nvPr/>
-        </p:nvSpPr>
-        <p:spPr>
-          <a:xfrm>
-            <a:off x="11384280" y="6446520"/>
-            <a:ext cx="640080" cy="292608"/>
-          </a:xfrm>
-          <a:prstGeom prst="rect">
-            <a:avLst/>
-          </a:prstGeom>
-          <a:noFill/>
-        </p:spPr>
-        <p:txBody>
-          <a:bodyPr wrap="none" lIns="0" tIns="0" rIns="45720" bIns="0" anchor="ctr"/>
-          <a:lstStyle/>
-          <a:p>
-            <a:pPr algn="r"/>
-            <a:r>
-              <a:t>173</a:t>
-            </a:r>
-            <a:endParaRPr sz="1000" b="1">
-              <a:solidFill>
-                <a:srgbClr val="7A8A6E"/>
-              </a:solidFill>
-              <a:latin typeface="Calibri"/>
-            </a:endParaRPr>
-          </a:p>
-        </p:txBody>
-      </p:sp>
-      <p:pic>
-        <p:nvPicPr>
-          <p:cNvPr id="33" name="Picture 33" descr="seedling - what grows between Wednesdays"/>
-          <p:cNvPicPr>
-            <a:picLocks noChangeAspect="1"/>
-          </p:cNvPicPr>
-          <p:nvPr/>
-        </p:nvPicPr>
-        <p:blipFill>
-          <a:blip r:embed="rId3"/>
-          <a:stretch>
-            <a:fillRect/>
-          </a:stretch>
-        </p:blipFill>
-        <p:spPr>
-          <a:xfrm>
-            <a:off x="8103612" y="1463040"/>
-            <a:ext cx="3262379" cy="4892040"/>
-          </a:xfrm>
-          <a:prstGeom prst="rect">
-            <a:avLst/>
-          </a:prstGeom>
-          <a:ln w="76200">
-            <a:solidFill>
-              <a:srgbClr val="FFFFFF"/>
-            </a:solidFill>
-          </a:ln>
-          <a:effectLst>
-            <a:outerShdw blurRad="63500" dist="25400" dir="5400000" rotWithShape="0">
-              <a:srgbClr val="000000">
-                <a:alpha val="35000"/>
-              </a:srgbClr>
-            </a:outerShdw>
-          </a:effectLst>
-        </p:spPr>
-      </p:pic>
-    </p:spTree>
-  </p:cSld>
-  <p:clrMapOvr>
-    <a:masterClrMapping/>
-  </p:clrMapOvr>
-</p:sld>
-</file>
-
-<file path=ppt/slides/slide174.xml><?xml version="1.0" encoding="utf-8"?>
-<p:sld xmlns:a="http://schemas.openxmlformats.org/drawingml/2006/main" xmlns:r="http://schemas.openxmlformats.org/officeDocument/2006/relationships" xmlns:p="http://schemas.openxmlformats.org/presentationml/2006/main">
-  <p:cSld>
-    <p:spTree>
-      <p:nvGrpSpPr>
-        <p:cNvPr id="1" name=""/>
-        <p:cNvGrpSpPr/>
-        <p:nvPr/>
-      </p:nvGrpSpPr>
-      <p:grpSpPr>
-        <a:xfrm>
-          <a:off x="0" y="0"/>
-          <a:ext cx="0" cy="0"/>
-          <a:chOff x="0" y="0"/>
-          <a:chExt cx="0" cy="0"/>
-        </a:xfrm>
-      </p:grpSpPr>
-      <p:sp>
-        <p:nvSpPr>
-          <p:cNvPr id="2" name="Rectangle 1"/>
-          <p:cNvSpPr/>
-          <p:nvPr/>
-        </p:nvSpPr>
-        <p:spPr>
-          <a:xfrm>
-            <a:off x="0" y="0"/>
-            <a:ext cx="12191695" cy="6858000"/>
-          </a:xfrm>
-          <a:prstGeom prst="rect">
-            <a:avLst/>
-          </a:prstGeom>
-          <a:solidFill>
-            <a:srgbClr val="FFFFFF"/>
-          </a:solidFill>
-          <a:ln>
-            <a:noFill/>
-          </a:ln>
-        </p:spPr>
-        <p:txBody>
-          <a:bodyPr/>
-          <a:lstStyle/>
-          <a:p>
-            <a:endParaRPr/>
-          </a:p>
-        </p:txBody>
-      </p:sp>
-      <p:sp>
-        <p:nvSpPr>
-          <p:cNvPr id="3" name="TextBox 2"/>
-          <p:cNvSpPr txBox="1"/>
-          <p:nvPr/>
-        </p:nvSpPr>
-        <p:spPr>
-          <a:xfrm>
-            <a:off x="822960" y="502920"/>
-            <a:ext cx="10515600" cy="822960"/>
-          </a:xfrm>
-          <a:prstGeom prst="rect">
-            <a:avLst/>
-          </a:prstGeom>
-          <a:noFill/>
-        </p:spPr>
-        <p:txBody>
-          <a:bodyPr wrap="square">
-            <a:spAutoFit/>
-          </a:bodyPr>
-          <a:lstStyle/>
-          <a:p>
-            <a:pPr algn="l">
-              <a:spcAft>
-                <a:spcPts val="600"/>
-              </a:spcAft>
-            </a:pPr>
-            <a:r>
-              <a:rPr sz="2800" b="1" i="0">
-                <a:solidFill>
-                  <a:srgbClr val="2C5F2D"/>
-                </a:solidFill>
-                <a:latin typeface="Cambria"/>
-              </a:rPr>
-              <a:t>Your Take-Home Card — This Session’s Practice</a:t>
-            </a:r>
-          </a:p>
-        </p:txBody>
-      </p:sp>
-      <p:sp>
-        <p:nvSpPr>
-          <p:cNvPr id="90" name="SlideNum"/>
-          <p:cNvSpPr txBox="1"/>
-          <p:nvPr/>
-        </p:nvSpPr>
-        <p:spPr>
-          <a:xfrm>
-            <a:off x="11384280" y="6446520"/>
-            <a:ext cx="640080" cy="292608"/>
-          </a:xfrm>
-          <a:prstGeom prst="rect">
-            <a:avLst/>
-          </a:prstGeom>
-          <a:noFill/>
-        </p:spPr>
-        <p:txBody>
-          <a:bodyPr wrap="none" lIns="0" tIns="0" rIns="45720" bIns="0" anchor="ctr"/>
-          <a:lstStyle/>
-          <a:p>
-            <a:pPr algn="r"/>
-            <a:r>
-              <a:t>174</a:t>
-            </a:r>
-            <a:endParaRPr sz="1000" b="1">
-              <a:solidFill>
-                <a:srgbClr val="7A8A6E"/>
-              </a:solidFill>
-              <a:latin typeface="Calibri"/>
-            </a:endParaRPr>
-          </a:p>
-        </p:txBody>
-      </p:sp>
-      <p:pic>
-        <p:nvPicPr>
-          <p:cNvPr id="270" name="CardImage" descr="the Week 13 check-off card, as handed out"/>
-          <p:cNvPicPr>
-            <a:picLocks noChangeAspect="1"/>
-          </p:cNvPicPr>
-          <p:nvPr/>
-        </p:nvPicPr>
-        <p:blipFill>
-          <a:blip r:embed="rId3"/>
-          <a:stretch>
-            <a:fillRect/>
-          </a:stretch>
-        </p:blipFill>
-        <p:spPr>
-          <a:xfrm>
-            <a:off x="1182102" y="1554480"/>
-            <a:ext cx="9827490" cy="4480560"/>
-          </a:xfrm>
-          <a:prstGeom prst="rect">
-            <a:avLst/>
-          </a:prstGeom>
-          <a:ln w="76200">
-            <a:solidFill>
-              <a:srgbClr val="FFFFFF"/>
-            </a:solidFill>
-          </a:ln>
-          <a:effectLst>
-            <a:outerShdw blurRad="63500" dist="25400" dir="5400000" rotWithShape="0">
-              <a:srgbClr val="000000">
-                <a:alpha val="35000"/>
-              </a:srgbClr>
-            </a:outerShdw>
-          </a:effectLst>
-        </p:spPr>
-      </p:pic>
-      <p:sp>
-        <p:nvSpPr>
-          <p:cNvPr id="271" name="Caption"/>
-          <p:cNvSpPr txBox="1"/>
-          <p:nvPr/>
-        </p:nvSpPr>
-        <p:spPr>
-          <a:xfrm>
-            <a:off x="822960" y="6217920"/>
-            <a:ext cx="10515600" cy="457200"/>
-          </a:xfrm>
-          <a:prstGeom prst="rect">
-            <a:avLst/>
-          </a:prstGeom>
-          <a:noFill/>
-        </p:spPr>
-        <p:txBody>
-          <a:bodyPr wrap="square"/>
-          <a:lstStyle/>
-          <a:p>
-            <a:pPr algn="ctr"/>
-            <a:r>
-              <a:rPr sz="1800" b="0" i="1">
-                <a:solidFill>
-                  <a:srgbClr val="222B22"/>
-                </a:solidFill>
-                <a:latin typeface="Calibri"/>
-              </a:rPr>
-              <a:t>Handed out now — fridge, mirror, journal pocket.</a:t>
-            </a:r>
-          </a:p>
-        </p:txBody>
-      </p:sp>
-    </p:spTree>
-  </p:cSld>
-  <p:clrMapOvr>
-    <a:masterClrMapping/>
-  </p:clrMapOvr>
-</p:sld>
-</file>
-
-<file path=ppt/slides/slide175.xml><?xml version="1.0" encoding="utf-8"?>
-<p:sld xmlns:a="http://schemas.openxmlformats.org/drawingml/2006/main" xmlns:r="http://schemas.openxmlformats.org/officeDocument/2006/relationships" xmlns:p="http://schemas.openxmlformats.org/presentationml/2006/main">
-  <p:cSld>
-    <p:spTree>
-      <p:nvGrpSpPr>
-        <p:cNvPr id="1" name=""/>
-        <p:cNvGrpSpPr/>
-        <p:nvPr/>
-      </p:nvGrpSpPr>
-      <p:grpSpPr>
-        <a:xfrm>
-          <a:off x="0" y="0"/>
-          <a:ext cx="0" cy="0"/>
-          <a:chOff x="0" y="0"/>
-          <a:chExt cx="0" cy="0"/>
-        </a:xfrm>
-      </p:grpSpPr>
-      <p:sp>
-        <p:nvSpPr>
-          <p:cNvPr id="2" name="Rectangle 1"/>
-          <p:cNvSpPr/>
-          <p:nvPr/>
-        </p:nvSpPr>
-        <p:spPr>
-          <a:xfrm>
-            <a:off x="0" y="0"/>
-            <a:ext cx="12191695" cy="6858000"/>
-          </a:xfrm>
-          <a:prstGeom prst="rect">
-            <a:avLst/>
-          </a:prstGeom>
-          <a:solidFill>
-            <a:srgbClr val="FFFFFF"/>
-          </a:solidFill>
-          <a:ln>
-            <a:noFill/>
-          </a:ln>
-        </p:spPr>
-        <p:txBody>
-          <a:bodyPr/>
-          <a:lstStyle/>
-          <a:p>
-            <a:endParaRPr/>
-          </a:p>
-        </p:txBody>
-      </p:sp>
-      <p:sp>
-        <p:nvSpPr>
-          <p:cNvPr id="3" name="TextBox 2"/>
-          <p:cNvSpPr txBox="1"/>
-          <p:nvPr/>
-        </p:nvSpPr>
-        <p:spPr>
-          <a:xfrm>
-            <a:off x="822960" y="502920"/>
-            <a:ext cx="10515600" cy="822960"/>
-          </a:xfrm>
-          <a:prstGeom prst="rect">
-            <a:avLst/>
-          </a:prstGeom>
-          <a:noFill/>
-        </p:spPr>
-        <p:txBody>
-          <a:bodyPr wrap="square">
-            <a:spAutoFit/>
-          </a:bodyPr>
-          <a:lstStyle/>
-          <a:p>
-            <a:pPr algn="l">
-              <a:spcAft>
-                <a:spcPts val="600"/>
-              </a:spcAft>
-            </a:pPr>
-            <a:r>
-              <a:rPr sz="2800" b="1" i="0">
-                <a:solidFill>
-                  <a:srgbClr val="2C5F2D"/>
-                </a:solidFill>
-                <a:latin typeface="Cambria"/>
-              </a:rPr>
-              <a:t>The Leader Feedback Round</a:t>
-            </a:r>
-          </a:p>
-        </p:txBody>
-      </p:sp>
-      <p:sp>
-        <p:nvSpPr>
-          <p:cNvPr id="4" name="TextBox 4"/>
-          <p:cNvSpPr txBox="1"/>
-          <p:nvPr/>
-        </p:nvSpPr>
-        <p:spPr>
-          <a:xfrm>
-            <a:off x="822960" y="1554480"/>
-            <a:ext cx="6675120" cy="4892040"/>
-          </a:xfrm>
-          <a:prstGeom prst="rect">
-            <a:avLst/>
-          </a:prstGeom>
-          <a:noFill/>
-        </p:spPr>
-        <p:txBody>
-          <a:bodyPr wrap="square" lIns="91440" tIns="91440" rIns="91440" bIns="91440"/>
-          <a:lstStyle/>
-          <a:p>
-            <a:pPr marL="274320" indent="-274320">
-              <a:spcAft>
-                <a:spcPts val="900"/>
-              </a:spcAft>
-            </a:pPr>
-            <a:r>
-              <a:rPr sz="2800" b="1" i="0">
-                <a:solidFill>
-                  <a:srgbClr val="97BC62"/>
-                </a:solidFill>
-                <a:latin typeface="Calibri"/>
-              </a:rPr>
-              <a:t>•  </a:t>
-            </a:r>
-            <a:r>
-              <a:rPr sz="2800" b="0" i="0">
-                <a:solidFill>
-                  <a:srgbClr val="222B22"/>
-                </a:solidFill>
-                <a:latin typeface="Calibri"/>
-              </a:rPr>
-              <a:t>Two rounds, same as every session — the container holder first, then the content presenter: three things each</a:t>
-            </a:r>
-          </a:p>
-          <a:p>
-            <a:pPr marL="685800" indent="-274320">
-              <a:spcAft>
-                <a:spcPts val="700"/>
-              </a:spcAft>
-            </a:pPr>
-            <a:r>
-              <a:rPr sz="2000" b="1" i="0">
-                <a:solidFill>
-                  <a:srgbClr val="97BC62"/>
-                </a:solidFill>
-                <a:latin typeface="Calibri"/>
-              </a:rPr>
-              <a:t>–  </a:t>
-            </a:r>
-            <a:r>
-              <a:rPr sz="2000" b="0" i="1">
-                <a:solidFill>
-                  <a:srgbClr val="222B22"/>
-                </a:solidFill>
-                <a:latin typeface="Calibri"/>
-              </a:rPr>
-              <a:t>“What I think went well tonight: ______”</a:t>
-            </a:r>
-          </a:p>
-          <a:p>
-            <a:pPr marL="685800" indent="-274320">
-              <a:spcAft>
-                <a:spcPts val="700"/>
-              </a:spcAft>
-            </a:pPr>
-            <a:r>
-              <a:rPr sz="2000" b="1" i="0">
-                <a:solidFill>
-                  <a:srgbClr val="97BC62"/>
-                </a:solidFill>
-                <a:latin typeface="Calibri"/>
-              </a:rPr>
-              <a:t>–  </a:t>
-            </a:r>
-            <a:r>
-              <a:rPr sz="2000" b="0" i="1">
-                <a:solidFill>
-                  <a:srgbClr val="222B22"/>
-                </a:solidFill>
-                <a:latin typeface="Calibri"/>
-              </a:rPr>
-              <a:t>“What I’d do differently next time: ______”</a:t>
-            </a:r>
-          </a:p>
-          <a:p>
-            <a:pPr marL="685800" indent="-274320">
-              <a:spcAft>
-                <a:spcPts val="700"/>
-              </a:spcAft>
-            </a:pPr>
-            <a:r>
-              <a:rPr sz="2000" b="1" i="0">
-                <a:solidFill>
-                  <a:srgbClr val="97BC62"/>
-                </a:solidFill>
-                <a:latin typeface="Calibri"/>
-              </a:rPr>
-              <a:t>–  </a:t>
-            </a:r>
-            <a:r>
-              <a:rPr sz="2000" b="0" i="1">
-                <a:solidFill>
-                  <a:srgbClr val="222B22"/>
-                </a:solidFill>
-                <a:latin typeface="Calibri"/>
-              </a:rPr>
-              <a:t>“If I were to teach tonight’s process to someone, I would tell them: ______”</a:t>
-            </a:r>
-          </a:p>
-          <a:p>
-            <a:pPr marL="274320" indent="-274320">
-              <a:spcAft>
-                <a:spcPts val="900"/>
-              </a:spcAft>
-            </a:pPr>
-            <a:r>
-              <a:rPr sz="2800" b="1" i="0">
-                <a:solidFill>
-                  <a:srgbClr val="97BC62"/>
-                </a:solidFill>
-                <a:latin typeface="Calibri"/>
-              </a:rPr>
-              <a:t>•  </a:t>
-            </a:r>
-            <a:r>
-              <a:rPr sz="2800" b="0" i="0">
-                <a:solidFill>
-                  <a:srgbClr val="222B22"/>
-                </a:solidFill>
-                <a:latin typeface="Calibri"/>
-              </a:rPr>
-              <a:t>Then the room — the same two questions about tonight</a:t>
-            </a:r>
-          </a:p>
-          <a:p>
-            <a:pPr marL="274320" indent="-274320">
-              <a:spcAft>
-                <a:spcPts val="900"/>
-              </a:spcAft>
-            </a:pPr>
-            <a:r>
-              <a:rPr sz="2800" b="1" i="0">
-                <a:solidFill>
-                  <a:srgbClr val="97BC62"/>
-                </a:solidFill>
-                <a:latin typeface="Calibri"/>
-              </a:rPr>
-              <a:t>•  </a:t>
-            </a:r>
-            <a:r>
-              <a:rPr sz="2800" b="0" i="0">
-                <a:solidFill>
-                  <a:srgbClr val="222B22"/>
-                </a:solidFill>
-                <a:latin typeface="Calibri"/>
-              </a:rPr>
-              <a:t>The leaders receive without defending — “thank you” is the whole response</a:t>
-            </a:r>
-          </a:p>
-        </p:txBody>
-      </p:sp>
-      <p:sp>
-        <p:nvSpPr>
-          <p:cNvPr id="90" name="SlideNum"/>
-          <p:cNvSpPr txBox="1"/>
-          <p:nvPr/>
-        </p:nvSpPr>
-        <p:spPr>
-          <a:xfrm>
-            <a:off x="11384280" y="6446520"/>
-            <a:ext cx="640080" cy="292608"/>
-          </a:xfrm>
-          <a:prstGeom prst="rect">
-            <a:avLst/>
-          </a:prstGeom>
-          <a:noFill/>
-        </p:spPr>
-        <p:txBody>
-          <a:bodyPr wrap="none" lIns="0" tIns="0" rIns="45720" bIns="0" anchor="ctr"/>
-          <a:lstStyle/>
-          <a:p>
-            <a:pPr algn="r"/>
-            <a:r>
-              <a:t>175</a:t>
-            </a:r>
-            <a:endParaRPr sz="1000" b="1">
-              <a:solidFill>
-                <a:srgbClr val="7A8A6E"/>
-              </a:solidFill>
-              <a:latin typeface="Calibri"/>
-            </a:endParaRPr>
-          </a:p>
-        </p:txBody>
-      </p:sp>
-      <p:pic>
-        <p:nvPicPr>
-          <p:cNvPr id="33" name="Picture 33" descr="compass on the trail - the weekly bearing check"/>
-          <p:cNvPicPr>
-            <a:picLocks noChangeAspect="1"/>
-          </p:cNvPicPr>
-          <p:nvPr/>
-        </p:nvPicPr>
-        <p:blipFill>
-          <a:blip r:embed="rId3"/>
-          <a:stretch>
-            <a:fillRect/>
-          </a:stretch>
-        </p:blipFill>
-        <p:spPr>
-          <a:xfrm>
-            <a:off x="8106160" y="1463040"/>
-            <a:ext cx="3259831" cy="4892040"/>
-          </a:xfrm>
-          <a:prstGeom prst="rect">
-            <a:avLst/>
-          </a:prstGeom>
-          <a:ln w="76200">
-            <a:solidFill>
-              <a:srgbClr val="FFFFFF"/>
-            </a:solidFill>
-          </a:ln>
-          <a:effectLst>
-            <a:outerShdw blurRad="63500" dist="25400" dir="5400000" rotWithShape="0">
-              <a:srgbClr val="000000">
-                <a:alpha val="35000"/>
-              </a:srgbClr>
-            </a:outerShdw>
-          </a:effectLst>
-        </p:spPr>
-      </p:pic>
-    </p:spTree>
-  </p:cSld>
-  <p:clrMapOvr>
-    <a:masterClrMapping/>
-  </p:clrMapOvr>
-</p:sld>
-</file>
-
-<file path=ppt/slides/slide176.xml><?xml version="1.0" encoding="utf-8"?>
-<p:sld xmlns:a="http://schemas.openxmlformats.org/drawingml/2006/main" xmlns:r="http://schemas.openxmlformats.org/officeDocument/2006/relationships" xmlns:p="http://schemas.openxmlformats.org/presentationml/2006/main">
-  <p:cSld>
-    <p:spTree>
-      <p:nvGrpSpPr>
-        <p:cNvPr id="1" name=""/>
-        <p:cNvGrpSpPr/>
-        <p:nvPr/>
-      </p:nvGrpSpPr>
-      <p:grpSpPr>
-        <a:xfrm>
-          <a:off x="0" y="0"/>
-          <a:ext cx="0" cy="0"/>
-          <a:chOff x="0" y="0"/>
-          <a:chExt cx="0" cy="0"/>
-        </a:xfrm>
-      </p:grpSpPr>
-      <p:sp>
-        <p:nvSpPr>
-          <p:cNvPr id="2" name="Rectangle 1"/>
-          <p:cNvSpPr/>
-          <p:nvPr/>
-        </p:nvSpPr>
-        <p:spPr>
-          <a:xfrm>
-            <a:off x="0" y="0"/>
-            <a:ext cx="12191695" cy="6858000"/>
-          </a:xfrm>
-          <a:prstGeom prst="rect">
-            <a:avLst/>
-          </a:prstGeom>
-          <a:solidFill>
-            <a:srgbClr val="FFFFFF"/>
-          </a:solidFill>
-          <a:ln>
-            <a:noFill/>
-          </a:ln>
-        </p:spPr>
-        <p:txBody>
-          <a:bodyPr/>
-          <a:lstStyle/>
-          <a:p>
-            <a:endParaRPr/>
-          </a:p>
-        </p:txBody>
-      </p:sp>
-      <p:sp>
-        <p:nvSpPr>
-          <p:cNvPr id="3" name="TextBox 2"/>
-          <p:cNvSpPr txBox="1"/>
-          <p:nvPr/>
-        </p:nvSpPr>
-        <p:spPr>
-          <a:xfrm>
-            <a:off x="822960" y="502920"/>
-            <a:ext cx="10515600" cy="822960"/>
-          </a:xfrm>
-          <a:prstGeom prst="rect">
-            <a:avLst/>
-          </a:prstGeom>
-          <a:noFill/>
-        </p:spPr>
-        <p:txBody>
-          <a:bodyPr wrap="square">
-            <a:spAutoFit/>
-          </a:bodyPr>
-          <a:lstStyle/>
-          <a:p>
-            <a:pPr algn="l">
-              <a:spcAft>
-                <a:spcPts val="600"/>
-              </a:spcAft>
-            </a:pPr>
-            <a:r>
-              <a:rPr sz="2800" b="1" i="0">
-                <a:solidFill>
-                  <a:srgbClr val="2C5F2D"/>
-                </a:solidFill>
-                <a:latin typeface="Cambria"/>
-              </a:rPr>
-              <a:t>Closing the Container + Aaronic Blessing</a:t>
-            </a:r>
-          </a:p>
-        </p:txBody>
-      </p:sp>
-      <p:sp>
-        <p:nvSpPr>
-          <p:cNvPr id="4" name="TextBox 4"/>
-          <p:cNvSpPr txBox="1"/>
-          <p:nvPr/>
-        </p:nvSpPr>
-        <p:spPr>
-          <a:xfrm>
-            <a:off x="822960" y="1600200"/>
-            <a:ext cx="5669280" cy="4572000"/>
-          </a:xfrm>
-          <a:prstGeom prst="rect">
-            <a:avLst/>
-          </a:prstGeom>
-          <a:noFill/>
-        </p:spPr>
-        <p:txBody>
-          <a:bodyPr wrap="square" lIns="91440" tIns="91440" rIns="91440" bIns="91440"/>
-          <a:lstStyle/>
-          <a:p>
-            <a:pPr marL="274320" indent="-274320">
-              <a:spcAft>
-                <a:spcPts val="900"/>
-              </a:spcAft>
-            </a:pPr>
-            <a:r>
-              <a:rPr sz="2200" b="1" i="0">
-                <a:solidFill>
-                  <a:srgbClr val="97BC62"/>
-                </a:solidFill>
-                <a:latin typeface="Calibri"/>
-              </a:rPr>
-              <a:t>•  </a:t>
-            </a:r>
-            <a:r>
-              <a:rPr sz="2200" b="0" i="0">
-                <a:solidFill>
-                  <a:srgbClr val="222B22"/>
-                </a:solidFill>
-                <a:latin typeface="Calibri"/>
-              </a:rPr>
-              <a:t>We close the way we opened — the container, six steps:</a:t>
-            </a:r>
-          </a:p>
-          <a:p>
-            <a:pPr marL="685800" indent="-274320">
-              <a:spcAft>
-                <a:spcPts val="700"/>
-              </a:spcAft>
-            </a:pPr>
-            <a:r>
-              <a:rPr sz="2000" b="1" i="0">
-                <a:solidFill>
-                  <a:srgbClr val="97BC62"/>
-                </a:solidFill>
-                <a:latin typeface="Calibri"/>
-              </a:rPr>
-              <a:t>1   </a:t>
-            </a:r>
-            <a:r>
-              <a:rPr sz="2000" b="0" i="0">
-                <a:solidFill>
-                  <a:srgbClr val="222B22"/>
-                </a:solidFill>
-                <a:latin typeface="Calibri"/>
-              </a:rPr>
-              <a:t>Stand again — same circle, same posture as the open</a:t>
-            </a:r>
-          </a:p>
-          <a:p>
-            <a:pPr marL="685800" indent="-274320">
-              <a:spcAft>
-                <a:spcPts val="700"/>
-              </a:spcAft>
-            </a:pPr>
-            <a:r>
-              <a:rPr sz="2000" b="1" i="0">
-                <a:solidFill>
-                  <a:srgbClr val="97BC62"/>
-                </a:solidFill>
-                <a:latin typeface="Calibri"/>
-              </a:rPr>
-              <a:t>2   </a:t>
-            </a:r>
-            <a:r>
-              <a:rPr sz="2000" b="0" i="0">
-                <a:solidFill>
-                  <a:srgbClr val="222B22"/>
-                </a:solidFill>
-                <a:latin typeface="Calibri"/>
-              </a:rPr>
-              <a:t>One-word landing — compare it to your opening word</a:t>
-            </a:r>
-          </a:p>
-          <a:p>
-            <a:pPr marL="685800" indent="-274320">
-              <a:spcAft>
-                <a:spcPts val="700"/>
-              </a:spcAft>
-            </a:pPr>
-            <a:r>
-              <a:rPr sz="2000" b="1" i="0">
-                <a:solidFill>
-                  <a:srgbClr val="97BC62"/>
-                </a:solidFill>
-                <a:latin typeface="Calibri"/>
-              </a:rPr>
-              <a:t>3   </a:t>
-            </a:r>
-            <a:r>
-              <a:rPr sz="2000" b="0" i="0">
-                <a:solidFill>
-                  <a:srgbClr val="222B22"/>
-                </a:solidFill>
-                <a:latin typeface="Calibri"/>
-              </a:rPr>
-              <a:t>The one thing you are taking from tonight</a:t>
-            </a:r>
-          </a:p>
-          <a:p>
-            <a:pPr marL="685800" indent="-274320">
-              <a:spcAft>
-                <a:spcPts val="700"/>
-              </a:spcAft>
-            </a:pPr>
-            <a:r>
-              <a:rPr sz="2000" b="1" i="0">
-                <a:solidFill>
-                  <a:srgbClr val="97BC62"/>
-                </a:solidFill>
-                <a:latin typeface="Calibri"/>
-              </a:rPr>
-              <a:t>4   </a:t>
-            </a:r>
-            <a:r>
-              <a:rPr sz="2000" b="0" i="0">
-                <a:solidFill>
-                  <a:srgbClr val="222B22"/>
-                </a:solidFill>
-                <a:latin typeface="Calibri"/>
-              </a:rPr>
-              <a:t>The one practice — committed aloud, or modified to one you will actually keep</a:t>
-            </a:r>
-          </a:p>
-          <a:p>
-            <a:pPr marL="685800" indent="-274320">
-              <a:spcAft>
-                <a:spcPts val="700"/>
-              </a:spcAft>
-            </a:pPr>
-            <a:r>
-              <a:rPr sz="2000" b="1" i="0">
-                <a:solidFill>
-                  <a:srgbClr val="97BC62"/>
-                </a:solidFill>
-                <a:latin typeface="Calibri"/>
-              </a:rPr>
-              <a:t>5   </a:t>
-            </a:r>
-            <a:r>
-              <a:rPr sz="2000" b="0" i="0">
-                <a:solidFill>
-                  <a:srgbClr val="222B22"/>
-                </a:solidFill>
-                <a:latin typeface="Calibri"/>
-              </a:rPr>
-              <a:t>Blessings — specific, witnessed, short</a:t>
-            </a:r>
-          </a:p>
-          <a:p>
-            <a:pPr marL="685800" indent="-274320">
-              <a:spcAft>
-                <a:spcPts val="700"/>
-              </a:spcAft>
-            </a:pPr>
-            <a:r>
-              <a:rPr sz="2000" b="1" i="0">
-                <a:solidFill>
-                  <a:srgbClr val="97BC62"/>
-                </a:solidFill>
-                <a:latin typeface="Calibri"/>
-              </a:rPr>
-              <a:t>6   </a:t>
-            </a:r>
-            <a:r>
-              <a:rPr sz="2000" b="0" i="0">
-                <a:solidFill>
-                  <a:srgbClr val="222B22"/>
-                </a:solidFill>
-                <a:latin typeface="Calibri"/>
-              </a:rPr>
-              <a:t>Closing prayer — and the Aaronic blessing, spoken over each other, face to face</a:t>
-            </a:r>
-          </a:p>
-        </p:txBody>
-      </p:sp>
-      <p:sp>
-        <p:nvSpPr>
-          <p:cNvPr id="6" name="TextBox 6"/>
-          <p:cNvSpPr txBox="1"/>
-          <p:nvPr/>
-        </p:nvSpPr>
-        <p:spPr>
-          <a:xfrm>
-            <a:off x="6766560" y="1737360"/>
-            <a:ext cx="4663440" cy="2926080"/>
-          </a:xfrm>
-          <a:prstGeom prst="rect">
-            <a:avLst/>
-          </a:prstGeom>
-          <a:solidFill>
-            <a:srgbClr val="F1F6EC"/>
-          </a:solidFill>
-        </p:spPr>
-        <p:txBody>
-          <a:bodyPr wrap="square" lIns="91440" tIns="91440" rIns="91440" bIns="91440" anchor="ctr"/>
-          <a:lstStyle/>
-          <a:p>
-            <a:pPr>
-              <a:spcAft>
-                <a:spcPts val="900"/>
-              </a:spcAft>
-            </a:pPr>
-            <a:r>
-              <a:rPr sz="1200" b="1" i="0">
-                <a:solidFill>
-                  <a:srgbClr val="97BC62"/>
-                </a:solidFill>
-                <a:latin typeface="Calibri"/>
-              </a:rPr>
-              <a:t>THE AARONIC BLESSING — NUMBERS 6:24–26</a:t>
-            </a:r>
-          </a:p>
-          <a:p>
-            <a:pPr>
-              <a:spcAft>
-                <a:spcPts val="600"/>
-              </a:spcAft>
-            </a:pPr>
-            <a:r>
-              <a:rPr sz="2400" b="0" i="1">
-                <a:solidFill>
-                  <a:srgbClr val="222B22"/>
-                </a:solidFill>
-                <a:latin typeface="Cambria"/>
-              </a:rPr>
-              <a:t>“The Lord bless you and keep you;</a:t>
-            </a:r>
-          </a:p>
-          <a:p>
-            <a:pPr>
-              <a:spcAft>
-                <a:spcPts val="600"/>
-              </a:spcAft>
-            </a:pPr>
-            <a:r>
-              <a:rPr sz="2400" b="0" i="1">
-                <a:solidFill>
-                  <a:srgbClr val="222B22"/>
-                </a:solidFill>
-                <a:latin typeface="Cambria"/>
-              </a:rPr>
-              <a:t>the Lord make his face to shine upon you, and be gracious to you;</a:t>
-            </a:r>
-          </a:p>
-          <a:p>
-            <a:pPr>
-              <a:spcAft>
-                <a:spcPts val="600"/>
-              </a:spcAft>
-            </a:pPr>
-            <a:r>
-              <a:rPr sz="2400" b="0" i="1">
-                <a:solidFill>
-                  <a:srgbClr val="222B22"/>
-                </a:solidFill>
-                <a:latin typeface="Cambria"/>
-              </a:rPr>
-              <a:t>the Lord lift up his countenance upon you, and give you peace.”</a:t>
-            </a:r>
-          </a:p>
-        </p:txBody>
-      </p:sp>
-      <p:sp>
-        <p:nvSpPr>
-          <p:cNvPr id="90" name="SlideNum"/>
-          <p:cNvSpPr txBox="1"/>
-          <p:nvPr/>
-        </p:nvSpPr>
-        <p:spPr>
-          <a:xfrm>
-            <a:off x="11384280" y="6446520"/>
-            <a:ext cx="640080" cy="292608"/>
-          </a:xfrm>
-          <a:prstGeom prst="rect">
-            <a:avLst/>
-          </a:prstGeom>
-          <a:noFill/>
-        </p:spPr>
-        <p:txBody>
-          <a:bodyPr wrap="none" lIns="0" tIns="0" rIns="45720" bIns="0" anchor="ctr"/>
-          <a:lstStyle/>
-          <a:p>
-            <a:pPr algn="r"/>
-            <a:r>
-              <a:t>176</a:t>
             </a:r>
             <a:endParaRPr sz="1000" b="1">
               <a:solidFill>

--- a/_implementation-notes/evening-series/FotH Evening Session 13 Slides DRAFT v1.pptx
+++ b/_implementation-notes/evening-series/FotH Evening Session 13 Slides DRAFT v1.pptx
@@ -4971,7 +4971,7 @@
                 </a:solidFill>
                 <a:latin typeface="Cambria"/>
               </a:rPr>
-              <a:t>Merge and Surface</a:t>
+              <a:t>Gifts and Downhill in pairs</a:t>
             </a:r>
           </a:p>
         </p:txBody>
@@ -4998,11 +4998,11 @@
           <a:p>
             <a:pPr marL="274320" indent="-274320">
               <a:spcAft>
-                <a:spcPts val="900"/>
+                <a:spcPts val="750"/>
               </a:spcAft>
             </a:pPr>
             <a:r>
-              <a:rPr sz="2800" b="1" i="0">
+              <a:rPr sz="2400" b="1" i="0">
                 <a:solidFill>
                   <a:srgbClr val="97BC62"/>
                 </a:solidFill>
@@ -5011,23 +5011,23 @@
               <a:t>•  </a:t>
             </a:r>
             <a:r>
-              <a:rPr sz="2800" b="0" i="0">
+              <a:rPr sz="2400" b="0" i="0">
                 <a:solidFill>
                   <a:srgbClr val="222B22"/>
                 </a:solidFill>
                 <a:latin typeface="Calibri"/>
               </a:rPr>
-              <a:t>What was named in your pair stays in your pair — nobody repeats their downhill answer</a:t>
+              <a:t>Phase 1 — Gifts and Passions: quiet writing (10 min), then 60 seconds each: “The three things I noticed are ___. The one I’m most surprised by is ___.”</a:t>
             </a:r>
           </a:p>
           <a:p>
             <a:pPr marL="274320" indent="-274320">
               <a:spcAft>
-                <a:spcPts val="900"/>
+                <a:spcPts val="750"/>
               </a:spcAft>
             </a:pPr>
             <a:r>
-              <a:rPr sz="2800" b="1" i="0">
+              <a:rPr sz="2400" b="1" i="0">
                 <a:solidFill>
                   <a:srgbClr val="97BC62"/>
                 </a:solidFill>
@@ -5036,23 +5036,23 @@
               <a:t>•  </a:t>
             </a:r>
             <a:r>
-              <a:rPr sz="2800" b="0" i="0">
+              <a:rPr sz="2400" b="0" i="0">
                 <a:solidFill>
                   <a:srgbClr val="222B22"/>
                 </a:solidFill>
                 <a:latin typeface="Calibri"/>
               </a:rPr>
-              <a:t>One sentence from each leadsanion — one general thing they noticed, not a specific person</a:t>
+              <a:t>After each share the pair affirms what it has seen — specific and brief: “Yes — we see that in you. Specifically: ___.”</a:t>
             </a:r>
           </a:p>
           <a:p>
             <a:pPr marL="274320" indent="-274320">
               <a:spcAft>
-                <a:spcPts val="900"/>
+                <a:spcPts val="750"/>
               </a:spcAft>
             </a:pPr>
             <a:r>
-              <a:rPr sz="2800" b="1" i="0">
+              <a:rPr sz="2400" b="1" i="0">
                 <a:solidFill>
                   <a:srgbClr val="97BC62"/>
                 </a:solidFill>
@@ -5061,23 +5061,48 @@
               <a:t>•  </a:t>
             </a:r>
             <a:r>
-              <a:rPr sz="2800" b="0" i="0">
+              <a:rPr sz="2400" b="0" i="0">
                 <a:solidFill>
                   <a:srgbClr val="222B22"/>
                 </a:solidFill>
                 <a:latin typeface="Calibri"/>
               </a:rPr>
-              <a:t>Then one observation across the room</a:t>
+              <a:t>Phase 2 — Downhill Mission: five quiet minutes, then around the circle, 90 seconds each</a:t>
+            </a:r>
+          </a:p>
+          <a:p>
+            <a:pPr marL="685800" indent="-274320">
+              <a:spcAft>
+                <a:spcPts val="550"/>
+              </a:spcAft>
+            </a:pPr>
+            <a:r>
+              <a:rPr sz="1800" b="1" i="0">
+                <a:solidFill>
+                  <a:srgbClr val="97BC62"/>
+                </a:solidFill>
+                <a:latin typeface="Calibri"/>
+              </a:rPr>
+              <a:t>–  </a:t>
+            </a:r>
+            <a:r>
+              <a:rPr sz="1800" b="0" i="1">
+                <a:solidFill>
+                  <a:srgbClr val="222B22"/>
+                </a:solidFill>
+                <a:latin typeface="Calibri"/>
+              </a:rPr>
+              <a:t>“What I noticed is that when I’m at my best, what the room gets is ___.”</a:t>
             </a:r>
           </a:p>
           <a:p>
             <a:pPr marL="274320" indent="-274320">
               <a:spcAft>
-                <a:spcPts val="900"/>
+                <a:spcPts val="750"/>
               </a:spcAft>
             </a:pPr>
             <a:r>
-              <a:rPr sz="2800" b="1" i="0">
+              <a:rPr sz="2400" b="1" i="0">
                 <a:solidFill>
                   <a:srgbClr val="97BC62"/>
                 </a:solidFill>
@@ -5086,13 +5111,38 @@
               <a:t>•  </a:t>
             </a:r>
             <a:r>
-              <a:rPr sz="2800" b="0" i="0">
+              <a:rPr sz="2400" b="0" i="0">
                 <a:solidFill>
                   <a:srgbClr val="222B22"/>
                 </a:solidFill>
                 <a:latin typeface="Calibri"/>
               </a:rPr>
-              <a:t>“The downhill mission you named is not a final answer. It is the working draft you are walking in this season.” It will deepen. It will sharpen</a:t>
+              <a:t>One or two voices add what they have actually seen across Getting Started — especially each other’s family</a:t>
+            </a:r>
+          </a:p>
+          <a:p>
+            <a:pPr marL="274320" indent="-274320">
+              <a:spcAft>
+                <a:spcPts val="750"/>
+              </a:spcAft>
+            </a:pPr>
+            <a:r>
+              <a:rPr sz="2400" b="1" i="0">
+                <a:solidFill>
+                  <a:srgbClr val="97BC62"/>
+                </a:solidFill>
+                <a:latin typeface="Calibri"/>
+              </a:rPr>
+              <a:t>•  </a:t>
+            </a:r>
+            <a:r>
+              <a:rPr sz="2400" b="0" i="0">
+                <a:solidFill>
+                  <a:srgbClr val="222B22"/>
+                </a:solidFill>
+                <a:latin typeface="Calibri"/>
+              </a:rPr>
+              <a:t>The naming is the gift — no over-processing. Pass-anytime holds</a:t>
             </a:r>
           </a:p>
         </p:txBody>
@@ -5119,7 +5169,7 @@
           <a:p>
             <a:pPr algn="r"/>
             <a:r>
-              <a:t>172</a:t>
+              <a:t>171</a:t>
             </a:r>
             <a:endParaRPr sz="1000" b="1">
               <a:solidFill>
@@ -5139,6 +5189,253 @@
 </file>
 
 <file path=ppt/slides/slide11.xml><?xml version="1.0" encoding="utf-8"?>
+<p:sld xmlns:a="http://schemas.openxmlformats.org/drawingml/2006/main" xmlns:r="http://schemas.openxmlformats.org/officeDocument/2006/relationships" xmlns:p="http://schemas.openxmlformats.org/presentationml/2006/main">
+  <p:cSld>
+    <p:spTree>
+      <p:nvGrpSpPr>
+        <p:cNvPr id="1" name=""/>
+        <p:cNvGrpSpPr/>
+        <p:nvPr/>
+      </p:nvGrpSpPr>
+      <p:grpSpPr>
+        <a:xfrm>
+          <a:off x="0" y="0"/>
+          <a:ext cx="0" cy="0"/>
+          <a:chOff x="0" y="0"/>
+          <a:chExt cx="0" cy="0"/>
+        </a:xfrm>
+      </p:grpSpPr>
+      <p:sp>
+        <p:nvSpPr>
+          <p:cNvPr id="2" name="Rectangle 1"/>
+          <p:cNvSpPr/>
+          <p:nvPr/>
+        </p:nvSpPr>
+        <p:spPr>
+          <a:xfrm>
+            <a:off x="0" y="0"/>
+            <a:ext cx="12191695" cy="6858000"/>
+          </a:xfrm>
+          <a:prstGeom prst="rect">
+            <a:avLst/>
+          </a:prstGeom>
+          <a:solidFill>
+            <a:srgbClr val="FFFFFF"/>
+          </a:solidFill>
+          <a:ln>
+            <a:noFill/>
+          </a:ln>
+        </p:spPr>
+        <p:txBody>
+          <a:bodyPr/>
+          <a:lstStyle/>
+          <a:p>
+            <a:endParaRPr/>
+          </a:p>
+        </p:txBody>
+      </p:sp>
+      <p:sp>
+        <p:nvSpPr>
+          <p:cNvPr id="3" name="TextBox 2"/>
+          <p:cNvSpPr txBox="1"/>
+          <p:nvPr/>
+        </p:nvSpPr>
+        <p:spPr>
+          <a:xfrm>
+            <a:off x="822960" y="502920"/>
+            <a:ext cx="10515600" cy="822960"/>
+          </a:xfrm>
+          <a:prstGeom prst="rect">
+            <a:avLst/>
+          </a:prstGeom>
+          <a:noFill/>
+        </p:spPr>
+        <p:txBody>
+          <a:bodyPr wrap="square">
+            <a:spAutoFit/>
+          </a:bodyPr>
+          <a:lstStyle/>
+          <a:p>
+            <a:pPr algn="l">
+              <a:spcAft>
+                <a:spcPts val="600"/>
+              </a:spcAft>
+            </a:pPr>
+            <a:r>
+              <a:rPr sz="2800" b="1" i="0">
+                <a:solidFill>
+                  <a:srgbClr val="2C5F2D"/>
+                </a:solidFill>
+                <a:latin typeface="Cambria"/>
+              </a:rPr>
+              <a:t>Merge and Surface</a:t>
+            </a:r>
+          </a:p>
+        </p:txBody>
+      </p:sp>
+      <p:sp>
+        <p:nvSpPr>
+          <p:cNvPr id="4" name="TextBox 4"/>
+          <p:cNvSpPr txBox="1"/>
+          <p:nvPr/>
+        </p:nvSpPr>
+        <p:spPr>
+          <a:xfrm>
+            <a:off x="822960" y="1554480"/>
+            <a:ext cx="10515600" cy="4892040"/>
+          </a:xfrm>
+          <a:prstGeom prst="rect">
+            <a:avLst/>
+          </a:prstGeom>
+          <a:noFill/>
+        </p:spPr>
+        <p:txBody>
+          <a:bodyPr wrap="square" lIns="91440" tIns="91440" rIns="91440" bIns="91440"/>
+          <a:lstStyle/>
+          <a:p>
+            <a:pPr marL="274320" indent="-274320">
+              <a:spcAft>
+                <a:spcPts val="900"/>
+              </a:spcAft>
+            </a:pPr>
+            <a:r>
+              <a:rPr sz="2800" b="1" i="0">
+                <a:solidFill>
+                  <a:srgbClr val="97BC62"/>
+                </a:solidFill>
+                <a:latin typeface="Calibri"/>
+              </a:rPr>
+              <a:t>•  </a:t>
+            </a:r>
+            <a:r>
+              <a:rPr sz="2800" b="0" i="0">
+                <a:solidFill>
+                  <a:srgbClr val="222B22"/>
+                </a:solidFill>
+                <a:latin typeface="Calibri"/>
+              </a:rPr>
+              <a:t>What was named in your pair stays in your pair — nobody repeats their downhill answer</a:t>
+            </a:r>
+          </a:p>
+          <a:p>
+            <a:pPr marL="274320" indent="-274320">
+              <a:spcAft>
+                <a:spcPts val="900"/>
+              </a:spcAft>
+            </a:pPr>
+            <a:r>
+              <a:rPr sz="2800" b="1" i="0">
+                <a:solidFill>
+                  <a:srgbClr val="97BC62"/>
+                </a:solidFill>
+                <a:latin typeface="Calibri"/>
+              </a:rPr>
+              <a:t>•  </a:t>
+            </a:r>
+            <a:r>
+              <a:rPr sz="2800" b="0" i="0">
+                <a:solidFill>
+                  <a:srgbClr val="222B22"/>
+                </a:solidFill>
+                <a:latin typeface="Calibri"/>
+              </a:rPr>
+              <a:t>One sentence from each leadsanion — one general thing they noticed, not a specific person</a:t>
+            </a:r>
+          </a:p>
+          <a:p>
+            <a:pPr marL="274320" indent="-274320">
+              <a:spcAft>
+                <a:spcPts val="900"/>
+              </a:spcAft>
+            </a:pPr>
+            <a:r>
+              <a:rPr sz="2800" b="1" i="0">
+                <a:solidFill>
+                  <a:srgbClr val="97BC62"/>
+                </a:solidFill>
+                <a:latin typeface="Calibri"/>
+              </a:rPr>
+              <a:t>•  </a:t>
+            </a:r>
+            <a:r>
+              <a:rPr sz="2800" b="0" i="0">
+                <a:solidFill>
+                  <a:srgbClr val="222B22"/>
+                </a:solidFill>
+                <a:latin typeface="Calibri"/>
+              </a:rPr>
+              <a:t>Then one observation across the room</a:t>
+            </a:r>
+          </a:p>
+          <a:p>
+            <a:pPr marL="274320" indent="-274320">
+              <a:spcAft>
+                <a:spcPts val="900"/>
+              </a:spcAft>
+            </a:pPr>
+            <a:r>
+              <a:rPr sz="2800" b="1" i="0">
+                <a:solidFill>
+                  <a:srgbClr val="97BC62"/>
+                </a:solidFill>
+                <a:latin typeface="Calibri"/>
+              </a:rPr>
+              <a:t>•  </a:t>
+            </a:r>
+            <a:r>
+              <a:rPr sz="2800" b="0" i="0">
+                <a:solidFill>
+                  <a:srgbClr val="222B22"/>
+                </a:solidFill>
+                <a:latin typeface="Calibri"/>
+              </a:rPr>
+              <a:t>“The downhill mission you named is not a final answer. It is the working draft you are walking in this season.” It will deepen. It will sharpen</a:t>
+            </a:r>
+          </a:p>
+        </p:txBody>
+      </p:sp>
+      <p:sp>
+        <p:nvSpPr>
+          <p:cNvPr id="90" name="SlideNum"/>
+          <p:cNvSpPr txBox="1"/>
+          <p:nvPr/>
+        </p:nvSpPr>
+        <p:spPr>
+          <a:xfrm>
+            <a:off x="11384280" y="6446520"/>
+            <a:ext cx="640080" cy="292608"/>
+          </a:xfrm>
+          <a:prstGeom prst="rect">
+            <a:avLst/>
+          </a:prstGeom>
+          <a:noFill/>
+        </p:spPr>
+        <p:txBody>
+          <a:bodyPr wrap="none" lIns="0" tIns="0" rIns="45720" bIns="0" anchor="ctr"/>
+          <a:lstStyle/>
+          <a:p>
+            <a:pPr algn="r"/>
+            <a:r>
+              <a:t>172</a:t>
+            </a:r>
+            <a:endParaRPr sz="1000" b="1">
+              <a:solidFill>
+                <a:srgbClr val="7A8A6E"/>
+              </a:solidFill>
+              <a:latin typeface="Calibri"/>
+            </a:endParaRPr>
+          </a:p>
+        </p:txBody>
+      </p:sp>
+    </p:spTree>
+  </p:cSld>
+  <p:clrMapOvr>
+    <a:masterClrMapping/>
+  </p:clrMapOvr>
+</p:sld>
+</file>
+
+<file path=ppt/slides/slide12.xml><?xml version="1.0" encoding="utf-8"?>
 <p:sld xmlns:a="http://schemas.openxmlformats.org/drawingml/2006/main" xmlns:r="http://schemas.openxmlformats.org/officeDocument/2006/relationships" xmlns:p="http://schemas.openxmlformats.org/presentationml/2006/main">
   <p:cSld>
     <p:spTree>
@@ -5447,6 +5744,390 @@
 </file>
 
 <file path=ppt/slides/slide13.xml><?xml version="1.0" encoding="utf-8"?>
+<p:sld xmlns:a="http://schemas.openxmlformats.org/drawingml/2006/main" xmlns:p="http://schemas.openxmlformats.org/presentationml/2006/main" xmlns:r="http://schemas.openxmlformats.org/officeDocument/2006/relationships">
+  <p:cSld>
+    <p:spTree>
+      <p:nvGrpSpPr>
+        <p:cNvPr id="1" name=""/>
+        <p:cNvGrpSpPr/>
+        <p:nvPr/>
+      </p:nvGrpSpPr>
+      <p:grpSpPr/>
+      <p:sp>
+        <p:nvSpPr>
+          <p:cNvPr id="2" name="Rectangle 1"/>
+          <p:cNvSpPr/>
+          <p:nvPr/>
+        </p:nvSpPr>
+        <p:spPr>
+          <a:xfrm>
+            <a:off x="0" y="0"/>
+            <a:ext cx="12192000" cy="6858000"/>
+          </a:xfrm>
+          <a:prstGeom prst="rect">
+            <a:avLst/>
+          </a:prstGeom>
+          <a:solidFill>
+            <a:srgbClr val="FFFFFF"/>
+          </a:solidFill>
+          <a:ln>
+            <a:noFill/>
+          </a:ln>
+          <a:effectLst/>
+        </p:spPr>
+        <p:style>
+          <a:lnRef idx="1">
+            <a:schemeClr val="accent1"/>
+          </a:lnRef>
+          <a:fillRef idx="3">
+            <a:schemeClr val="accent1"/>
+          </a:fillRef>
+          <a:effectRef idx="2">
+            <a:schemeClr val="accent1"/>
+          </a:effectRef>
+          <a:fontRef idx="minor">
+            <a:schemeClr val="lt1"/>
+          </a:fontRef>
+        </p:style>
+        <p:txBody>
+          <a:bodyPr rtlCol="0" anchor="ctr"/>
+          <a:lstStyle/>
+          <a:p>
+            <a:pPr algn="ctr"/>
+          </a:p>
+        </p:txBody>
+      </p:sp>
+      <p:sp>
+        <p:nvSpPr>
+          <p:cNvPr id="3" name="TextBox 2"/>
+          <p:cNvSpPr txBox="1"/>
+          <p:nvPr/>
+        </p:nvSpPr>
+        <p:spPr>
+          <a:xfrm>
+            <a:off x="822960" y="502920"/>
+            <a:ext cx="10515600" cy="822960"/>
+          </a:xfrm>
+          <a:prstGeom prst="rect">
+            <a:avLst/>
+          </a:prstGeom>
+          <a:noFill/>
+        </p:spPr>
+        <p:txBody>
+          <a:bodyPr wrap="square">
+            <a:spAutoFit/>
+          </a:bodyPr>
+          <a:lstStyle/>
+          <a:p>
+            <a:r>
+              <a:rPr sz="2800" b="1">
+                <a:solidFill>
+                  <a:srgbClr val="2C5F2D"/>
+                </a:solidFill>
+                <a:latin typeface="Cambria"/>
+              </a:rPr>
+              <a:t>The Take-Home Sheet — the Daily Rhythm</a:t>
+            </a:r>
+          </a:p>
+        </p:txBody>
+      </p:sp>
+      <p:pic>
+        <p:nvPicPr>
+          <p:cNvPr id="4" name="Picture 3" descr="s13_part1.png"/>
+          <p:cNvPicPr>
+            <a:picLocks noChangeAspect="1"/>
+          </p:cNvPicPr>
+          <p:nvPr/>
+        </p:nvPicPr>
+        <p:blipFill>
+          <a:blip r:embed="rId2"/>
+          <a:stretch>
+            <a:fillRect/>
+          </a:stretch>
+        </p:blipFill>
+        <p:spPr>
+          <a:xfrm>
+            <a:off x="1798167" y="1463040"/>
+            <a:ext cx="8595360" cy="4457308"/>
+          </a:xfrm>
+          <a:prstGeom prst="rect">
+            <a:avLst/>
+          </a:prstGeom>
+          <a:ln w="12700">
+            <a:solidFill>
+              <a:srgbClr val="C8C8C8"/>
+            </a:solidFill>
+          </a:ln>
+        </p:spPr>
+      </p:pic>
+      <p:sp>
+        <p:nvSpPr>
+          <p:cNvPr id="5" name="TextBox 4"/>
+          <p:cNvSpPr txBox="1"/>
+          <p:nvPr/>
+        </p:nvSpPr>
+        <p:spPr>
+          <a:xfrm>
+            <a:off x="822960" y="6355080"/>
+            <a:ext cx="10515600" cy="411480"/>
+          </a:xfrm>
+          <a:prstGeom prst="rect">
+            <a:avLst/>
+          </a:prstGeom>
+          <a:noFill/>
+        </p:spPr>
+        <p:txBody>
+          <a:bodyPr wrap="square">
+            <a:spAutoFit/>
+          </a:bodyPr>
+          <a:lstStyle/>
+          <a:p>
+            <a:r>
+              <a:rPr sz="1400" i="1">
+                <a:solidFill>
+                  <a:srgbClr val="595959"/>
+                </a:solidFill>
+                <a:latin typeface="Calibri"/>
+              </a:rPr>
+              <a:t>Handed out now — this is the sheet in your hands.</a:t>
+            </a:r>
+          </a:p>
+        </p:txBody>
+      </p:sp>
+      <p:sp>
+        <p:nvSpPr>
+          <p:cNvPr id="90" name="SlideNum"/>
+          <p:cNvSpPr txBox="1"/>
+          <p:nvPr/>
+        </p:nvSpPr>
+        <p:spPr>
+          <a:xfrm>
+            <a:off x="11384280" y="6446520"/>
+            <a:ext cx="640080" cy="292608"/>
+          </a:xfrm>
+          <a:prstGeom prst="rect">
+            <a:avLst/>
+          </a:prstGeom>
+          <a:noFill/>
+        </p:spPr>
+        <p:txBody>
+          <a:bodyPr wrap="none" lIns="0" tIns="0" rIns="45720" bIns="0" anchor="ctr"/>
+          <a:lstStyle/>
+          <a:p>
+            <a:pPr algn="r"/>
+            <a:r>
+              <a:t>174</a:t>
+            </a:r>
+            <a:endParaRPr sz="1000" b="1">
+              <a:solidFill>
+                <a:srgbClr val="7A8A6E"/>
+              </a:solidFill>
+              <a:latin typeface="Calibri"/>
+            </a:endParaRPr>
+          </a:p>
+        </p:txBody>
+      </p:sp>
+    </p:spTree>
+  </p:cSld>
+  <p:clrMapOvr>
+    <a:masterClrMapping/>
+  </p:clrMapOvr>
+</p:sld>
+</file>
+
+<file path=ppt/slides/slide14.xml><?xml version="1.0" encoding="utf-8"?>
+<p:sld xmlns:a="http://schemas.openxmlformats.org/drawingml/2006/main" xmlns:p="http://schemas.openxmlformats.org/presentationml/2006/main" xmlns:r="http://schemas.openxmlformats.org/officeDocument/2006/relationships">
+  <p:cSld>
+    <p:spTree>
+      <p:nvGrpSpPr>
+        <p:cNvPr id="1" name=""/>
+        <p:cNvGrpSpPr/>
+        <p:nvPr/>
+      </p:nvGrpSpPr>
+      <p:grpSpPr/>
+      <p:sp>
+        <p:nvSpPr>
+          <p:cNvPr id="2" name="Rectangle 1"/>
+          <p:cNvSpPr/>
+          <p:nvPr/>
+        </p:nvSpPr>
+        <p:spPr>
+          <a:xfrm>
+            <a:off x="0" y="0"/>
+            <a:ext cx="12192000" cy="6858000"/>
+          </a:xfrm>
+          <a:prstGeom prst="rect">
+            <a:avLst/>
+          </a:prstGeom>
+          <a:solidFill>
+            <a:srgbClr val="FFFFFF"/>
+          </a:solidFill>
+          <a:ln>
+            <a:noFill/>
+          </a:ln>
+          <a:effectLst/>
+        </p:spPr>
+        <p:style>
+          <a:lnRef idx="1">
+            <a:schemeClr val="accent1"/>
+          </a:lnRef>
+          <a:fillRef idx="3">
+            <a:schemeClr val="accent1"/>
+          </a:fillRef>
+          <a:effectRef idx="2">
+            <a:schemeClr val="accent1"/>
+          </a:effectRef>
+          <a:fontRef idx="minor">
+            <a:schemeClr val="lt1"/>
+          </a:fontRef>
+        </p:style>
+        <p:txBody>
+          <a:bodyPr rtlCol="0" anchor="ctr"/>
+          <a:lstStyle/>
+          <a:p>
+            <a:pPr algn="ctr"/>
+          </a:p>
+        </p:txBody>
+      </p:sp>
+      <p:sp>
+        <p:nvSpPr>
+          <p:cNvPr id="3" name="TextBox 2"/>
+          <p:cNvSpPr txBox="1"/>
+          <p:nvPr/>
+        </p:nvSpPr>
+        <p:spPr>
+          <a:xfrm>
+            <a:off x="822960" y="502920"/>
+            <a:ext cx="10515600" cy="822960"/>
+          </a:xfrm>
+          <a:prstGeom prst="rect">
+            <a:avLst/>
+          </a:prstGeom>
+          <a:noFill/>
+        </p:spPr>
+        <p:txBody>
+          <a:bodyPr wrap="square">
+            <a:spAutoFit/>
+          </a:bodyPr>
+          <a:lstStyle/>
+          <a:p>
+            <a:r>
+              <a:rPr sz="2800" b="1">
+                <a:solidFill>
+                  <a:srgbClr val="2C5F2D"/>
+                </a:solidFill>
+                <a:latin typeface="Cambria"/>
+              </a:rPr>
+              <a:t>The Take-Home Sheet — the Four Parts</a:t>
+            </a:r>
+          </a:p>
+        </p:txBody>
+      </p:sp>
+      <p:pic>
+        <p:nvPicPr>
+          <p:cNvPr id="4" name="Picture 3" descr="s13_part2.png"/>
+          <p:cNvPicPr>
+            <a:picLocks noChangeAspect="1"/>
+          </p:cNvPicPr>
+          <p:nvPr/>
+        </p:nvPicPr>
+        <p:blipFill>
+          <a:blip r:embed="rId2"/>
+          <a:stretch>
+            <a:fillRect/>
+          </a:stretch>
+        </p:blipFill>
+        <p:spPr>
+          <a:xfrm>
+            <a:off x="2070924" y="1463040"/>
+            <a:ext cx="8049846" cy="4709160"/>
+          </a:xfrm>
+          <a:prstGeom prst="rect">
+            <a:avLst/>
+          </a:prstGeom>
+          <a:ln w="12700">
+            <a:solidFill>
+              <a:srgbClr val="C8C8C8"/>
+            </a:solidFill>
+          </a:ln>
+        </p:spPr>
+      </p:pic>
+      <p:sp>
+        <p:nvSpPr>
+          <p:cNvPr id="5" name="TextBox 4"/>
+          <p:cNvSpPr txBox="1"/>
+          <p:nvPr/>
+        </p:nvSpPr>
+        <p:spPr>
+          <a:xfrm>
+            <a:off x="822960" y="6355080"/>
+            <a:ext cx="10515600" cy="411480"/>
+          </a:xfrm>
+          <a:prstGeom prst="rect">
+            <a:avLst/>
+          </a:prstGeom>
+          <a:noFill/>
+        </p:spPr>
+        <p:txBody>
+          <a:bodyPr wrap="square">
+            <a:spAutoFit/>
+          </a:bodyPr>
+          <a:lstStyle/>
+          <a:p>
+            <a:r>
+              <a:rPr sz="1400" i="1">
+                <a:solidFill>
+                  <a:srgbClr val="595959"/>
+                </a:solidFill>
+                <a:latin typeface="Calibri"/>
+              </a:rPr>
+              <a:t>One practice at a time — and a partner expecting you at the end of week one.</a:t>
+            </a:r>
+          </a:p>
+        </p:txBody>
+      </p:sp>
+      <p:sp>
+        <p:nvSpPr>
+          <p:cNvPr id="90" name="SlideNum"/>
+          <p:cNvSpPr txBox="1"/>
+          <p:nvPr/>
+        </p:nvSpPr>
+        <p:spPr>
+          <a:xfrm>
+            <a:off x="11384280" y="6446520"/>
+            <a:ext cx="640080" cy="292608"/>
+          </a:xfrm>
+          <a:prstGeom prst="rect">
+            <a:avLst/>
+          </a:prstGeom>
+          <a:noFill/>
+        </p:spPr>
+        <p:txBody>
+          <a:bodyPr wrap="none" lIns="0" tIns="0" rIns="45720" bIns="0" anchor="ctr"/>
+          <a:lstStyle/>
+          <a:p>
+            <a:pPr algn="r"/>
+            <a:r>
+              <a:t>174a</a:t>
+            </a:r>
+            <a:endParaRPr sz="1000" b="1">
+              <a:solidFill>
+                <a:srgbClr val="7A8A6E"/>
+              </a:solidFill>
+              <a:latin typeface="Calibri"/>
+            </a:endParaRPr>
+          </a:p>
+        </p:txBody>
+      </p:sp>
+    </p:spTree>
+  </p:cSld>
+  <p:clrMapOvr>
+    <a:masterClrMapping/>
+  </p:clrMapOvr>
+</p:sld>
+</file>
+
+<file path=ppt/slides/slide15.xml><?xml version="1.0" encoding="utf-8"?>
 <p:sld xmlns:a="http://schemas.openxmlformats.org/drawingml/2006/main" xmlns:r="http://schemas.openxmlformats.org/officeDocument/2006/relationships" xmlns:p="http://schemas.openxmlformats.org/presentationml/2006/main">
   <p:cSld>
     <p:spTree>
@@ -5779,7 +6460,7 @@
 </p:sld>
 </file>
 
-<file path=ppt/slides/slide14.xml><?xml version="1.0" encoding="utf-8"?>
+<file path=ppt/slides/slide16.xml><?xml version="1.0" encoding="utf-8"?>
 <p:sld xmlns:a="http://schemas.openxmlformats.org/drawingml/2006/main" xmlns:r="http://schemas.openxmlformats.org/officeDocument/2006/relationships" xmlns:p="http://schemas.openxmlformats.org/presentationml/2006/main">
   <p:cSld>
     <p:spTree>
@@ -6170,595 +6851,6 @@
             <a:pPr algn="r"/>
             <a:r>
               <a:t>176</a:t>
-            </a:r>
-            <a:endParaRPr sz="1000" b="1">
-              <a:solidFill>
-                <a:srgbClr val="7A8A6E"/>
-              </a:solidFill>
-              <a:latin typeface="Calibri"/>
-            </a:endParaRPr>
-          </a:p>
-        </p:txBody>
-      </p:sp>
-    </p:spTree>
-  </p:cSld>
-  <p:clrMapOvr>
-    <a:masterClrMapping/>
-  </p:clrMapOvr>
-</p:sld>
-</file>
-
-<file path=ppt/slides/slide15.xml><?xml version="1.0" encoding="utf-8"?>
-<p:sld xmlns:a="http://schemas.openxmlformats.org/drawingml/2006/main" xmlns:p="http://schemas.openxmlformats.org/presentationml/2006/main" xmlns:r="http://schemas.openxmlformats.org/officeDocument/2006/relationships">
-  <p:cSld>
-    <p:spTree>
-      <p:nvGrpSpPr>
-        <p:cNvPr id="1" name=""/>
-        <p:cNvGrpSpPr/>
-        <p:nvPr/>
-      </p:nvGrpSpPr>
-      <p:grpSpPr/>
-      <p:sp>
-        <p:nvSpPr>
-          <p:cNvPr id="2" name="Rectangle 1"/>
-          <p:cNvSpPr/>
-          <p:nvPr/>
-        </p:nvSpPr>
-        <p:spPr>
-          <a:xfrm>
-            <a:off x="0" y="0"/>
-            <a:ext cx="12192000" cy="6858000"/>
-          </a:xfrm>
-          <a:prstGeom prst="rect">
-            <a:avLst/>
-          </a:prstGeom>
-          <a:solidFill>
-            <a:srgbClr val="FFFFFF"/>
-          </a:solidFill>
-          <a:ln>
-            <a:noFill/>
-          </a:ln>
-          <a:effectLst/>
-        </p:spPr>
-        <p:style>
-          <a:lnRef idx="1">
-            <a:schemeClr val="accent1"/>
-          </a:lnRef>
-          <a:fillRef idx="3">
-            <a:schemeClr val="accent1"/>
-          </a:fillRef>
-          <a:effectRef idx="2">
-            <a:schemeClr val="accent1"/>
-          </a:effectRef>
-          <a:fontRef idx="minor">
-            <a:schemeClr val="lt1"/>
-          </a:fontRef>
-        </p:style>
-        <p:txBody>
-          <a:bodyPr rtlCol="0" anchor="ctr"/>
-          <a:lstStyle/>
-          <a:p>
-            <a:pPr algn="ctr"/>
-          </a:p>
-        </p:txBody>
-      </p:sp>
-      <p:sp>
-        <p:nvSpPr>
-          <p:cNvPr id="3" name="TextBox 2"/>
-          <p:cNvSpPr txBox="1"/>
-          <p:nvPr/>
-        </p:nvSpPr>
-        <p:spPr>
-          <a:xfrm>
-            <a:off x="822960" y="502920"/>
-            <a:ext cx="10515600" cy="822960"/>
-          </a:xfrm>
-          <a:prstGeom prst="rect">
-            <a:avLst/>
-          </a:prstGeom>
-          <a:noFill/>
-        </p:spPr>
-        <p:txBody>
-          <a:bodyPr wrap="square">
-            <a:spAutoFit/>
-          </a:bodyPr>
-          <a:lstStyle/>
-          <a:p>
-            <a:r>
-              <a:rPr sz="2800" b="1">
-                <a:solidFill>
-                  <a:srgbClr val="2C5F2D"/>
-                </a:solidFill>
-                <a:latin typeface="Cambria"/>
-              </a:rPr>
-              <a:t>Where We Are — the Four Connects</a:t>
-            </a:r>
-          </a:p>
-        </p:txBody>
-      </p:sp>
-      <p:pic>
-        <p:nvPicPr>
-          <p:cNvPr id="4" name="Picture 3" descr="four-connects.png"/>
-          <p:cNvPicPr>
-            <a:picLocks noChangeAspect="1"/>
-          </p:cNvPicPr>
-          <p:nvPr/>
-        </p:nvPicPr>
-        <p:blipFill>
-          <a:blip r:embed="rId2"/>
-          <a:stretch>
-            <a:fillRect/>
-          </a:stretch>
-        </p:blipFill>
-        <p:spPr>
-          <a:xfrm>
-            <a:off x="932688" y="1645920"/>
-            <a:ext cx="10332720" cy="3708663"/>
-          </a:xfrm>
-          <a:prstGeom prst="rect">
-            <a:avLst/>
-          </a:prstGeom>
-        </p:spPr>
-      </p:pic>
-      <p:sp>
-        <p:nvSpPr>
-          <p:cNvPr id="5" name="TextBox 4"/>
-          <p:cNvSpPr txBox="1"/>
-          <p:nvPr/>
-        </p:nvSpPr>
-        <p:spPr>
-          <a:xfrm>
-            <a:off x="822960" y="5623560"/>
-            <a:ext cx="10515600" cy="914400"/>
-          </a:xfrm>
-          <a:prstGeom prst="rect">
-            <a:avLst/>
-          </a:prstGeom>
-          <a:noFill/>
-        </p:spPr>
-        <p:txBody>
-          <a:bodyPr wrap="square">
-            <a:spAutoFit/>
-          </a:bodyPr>
-          <a:lstStyle/>
-          <a:p>
-            <a:r>
-              <a:rPr sz="1800" b="0">
-                <a:solidFill>
-                  <a:srgbClr val="222B22"/>
-                </a:solidFill>
-                <a:latin typeface="Calibri"/>
-              </a:rPr>
-              <a:t>Session 13 stands in the fourth box — </a:t>
-            </a:r>
-            <a:r>
-              <a:rPr sz="1800" b="1">
-                <a:solidFill>
-                  <a:srgbClr val="2C5F2D"/>
-                </a:solidFill>
-                <a:latin typeface="Calibri"/>
-              </a:rPr>
-              <a:t>Connect with Mission</a:t>
-            </a:r>
-            <a:r>
-              <a:rPr sz="1800" b="0">
-                <a:solidFill>
-                  <a:srgbClr val="222B22"/>
-                </a:solidFill>
-                <a:latin typeface="Calibri"/>
-              </a:rPr>
-              <a:t>: the works He prepared (Eph. 2:10). Each connection makes the next one real (Matt. 22:37–40).</a:t>
-            </a:r>
-          </a:p>
-        </p:txBody>
-      </p:sp>
-      <p:sp>
-        <p:nvSpPr>
-          <p:cNvPr id="90" name="SlideNum"/>
-          <p:cNvSpPr txBox="1"/>
-          <p:nvPr/>
-        </p:nvSpPr>
-        <p:spPr>
-          <a:xfrm>
-            <a:off x="11384280" y="6446520"/>
-            <a:ext cx="640080" cy="292608"/>
-          </a:xfrm>
-          <a:prstGeom prst="rect">
-            <a:avLst/>
-          </a:prstGeom>
-          <a:noFill/>
-        </p:spPr>
-        <p:txBody>
-          <a:bodyPr wrap="none" lIns="0" tIns="0" rIns="45720" bIns="0" anchor="ctr"/>
-          <a:lstStyle/>
-          <a:p>
-            <a:pPr algn="r"/>
-            <a:r>
-              <a:t>164a</a:t>
-            </a:r>
-            <a:endParaRPr sz="1000" b="1">
-              <a:solidFill>
-                <a:srgbClr val="7A8A6E"/>
-              </a:solidFill>
-              <a:latin typeface="Calibri"/>
-            </a:endParaRPr>
-          </a:p>
-        </p:txBody>
-      </p:sp>
-    </p:spTree>
-  </p:cSld>
-  <p:clrMapOvr>
-    <a:masterClrMapping/>
-  </p:clrMapOvr>
-</p:sld>
-</file>
-
-<file path=ppt/slides/slide16.xml><?xml version="1.0" encoding="utf-8"?>
-<p:sld xmlns:a="http://schemas.openxmlformats.org/drawingml/2006/main" xmlns:p="http://schemas.openxmlformats.org/presentationml/2006/main" xmlns:r="http://schemas.openxmlformats.org/officeDocument/2006/relationships">
-  <p:cSld>
-    <p:spTree>
-      <p:nvGrpSpPr>
-        <p:cNvPr id="1" name=""/>
-        <p:cNvGrpSpPr/>
-        <p:nvPr/>
-      </p:nvGrpSpPr>
-      <p:grpSpPr/>
-      <p:sp>
-        <p:nvSpPr>
-          <p:cNvPr id="2" name="Rectangle 1"/>
-          <p:cNvSpPr/>
-          <p:nvPr/>
-        </p:nvSpPr>
-        <p:spPr>
-          <a:xfrm>
-            <a:off x="0" y="0"/>
-            <a:ext cx="12192000" cy="6858000"/>
-          </a:xfrm>
-          <a:prstGeom prst="rect">
-            <a:avLst/>
-          </a:prstGeom>
-          <a:solidFill>
-            <a:srgbClr val="FFFFFF"/>
-          </a:solidFill>
-          <a:ln>
-            <a:noFill/>
-          </a:ln>
-          <a:effectLst/>
-        </p:spPr>
-        <p:style>
-          <a:lnRef idx="1">
-            <a:schemeClr val="accent1"/>
-          </a:lnRef>
-          <a:fillRef idx="3">
-            <a:schemeClr val="accent1"/>
-          </a:fillRef>
-          <a:effectRef idx="2">
-            <a:schemeClr val="accent1"/>
-          </a:effectRef>
-          <a:fontRef idx="minor">
-            <a:schemeClr val="lt1"/>
-          </a:fontRef>
-        </p:style>
-        <p:txBody>
-          <a:bodyPr rtlCol="0" anchor="ctr"/>
-          <a:lstStyle/>
-          <a:p>
-            <a:pPr algn="ctr"/>
-          </a:p>
-        </p:txBody>
-      </p:sp>
-      <p:sp>
-        <p:nvSpPr>
-          <p:cNvPr id="3" name="TextBox 2"/>
-          <p:cNvSpPr txBox="1"/>
-          <p:nvPr/>
-        </p:nvSpPr>
-        <p:spPr>
-          <a:xfrm>
-            <a:off x="822960" y="502920"/>
-            <a:ext cx="10515600" cy="822960"/>
-          </a:xfrm>
-          <a:prstGeom prst="rect">
-            <a:avLst/>
-          </a:prstGeom>
-          <a:noFill/>
-        </p:spPr>
-        <p:txBody>
-          <a:bodyPr wrap="square">
-            <a:spAutoFit/>
-          </a:bodyPr>
-          <a:lstStyle/>
-          <a:p>
-            <a:r>
-              <a:rPr sz="2800" b="1">
-                <a:solidFill>
-                  <a:srgbClr val="2C5F2D"/>
-                </a:solidFill>
-                <a:latin typeface="Cambria"/>
-              </a:rPr>
-              <a:t>The Take-Home Sheet — the Daily Rhythm</a:t>
-            </a:r>
-          </a:p>
-        </p:txBody>
-      </p:sp>
-      <p:pic>
-        <p:nvPicPr>
-          <p:cNvPr id="4" name="Picture 3" descr="s13_part1.png"/>
-          <p:cNvPicPr>
-            <a:picLocks noChangeAspect="1"/>
-          </p:cNvPicPr>
-          <p:nvPr/>
-        </p:nvPicPr>
-        <p:blipFill>
-          <a:blip r:embed="rId2"/>
-          <a:stretch>
-            <a:fillRect/>
-          </a:stretch>
-        </p:blipFill>
-        <p:spPr>
-          <a:xfrm>
-            <a:off x="1798167" y="1463040"/>
-            <a:ext cx="8595360" cy="4457308"/>
-          </a:xfrm>
-          <a:prstGeom prst="rect">
-            <a:avLst/>
-          </a:prstGeom>
-          <a:ln w="12700">
-            <a:solidFill>
-              <a:srgbClr val="C8C8C8"/>
-            </a:solidFill>
-          </a:ln>
-        </p:spPr>
-      </p:pic>
-      <p:sp>
-        <p:nvSpPr>
-          <p:cNvPr id="5" name="TextBox 4"/>
-          <p:cNvSpPr txBox="1"/>
-          <p:nvPr/>
-        </p:nvSpPr>
-        <p:spPr>
-          <a:xfrm>
-            <a:off x="822960" y="6355080"/>
-            <a:ext cx="10515600" cy="411480"/>
-          </a:xfrm>
-          <a:prstGeom prst="rect">
-            <a:avLst/>
-          </a:prstGeom>
-          <a:noFill/>
-        </p:spPr>
-        <p:txBody>
-          <a:bodyPr wrap="square">
-            <a:spAutoFit/>
-          </a:bodyPr>
-          <a:lstStyle/>
-          <a:p>
-            <a:r>
-              <a:rPr sz="1400" i="1">
-                <a:solidFill>
-                  <a:srgbClr val="595959"/>
-                </a:solidFill>
-                <a:latin typeface="Calibri"/>
-              </a:rPr>
-              <a:t>Handed out now — this is the sheet in your hands.</a:t>
-            </a:r>
-          </a:p>
-        </p:txBody>
-      </p:sp>
-      <p:sp>
-        <p:nvSpPr>
-          <p:cNvPr id="90" name="SlideNum"/>
-          <p:cNvSpPr txBox="1"/>
-          <p:nvPr/>
-        </p:nvSpPr>
-        <p:spPr>
-          <a:xfrm>
-            <a:off x="11384280" y="6446520"/>
-            <a:ext cx="640080" cy="292608"/>
-          </a:xfrm>
-          <a:prstGeom prst="rect">
-            <a:avLst/>
-          </a:prstGeom>
-          <a:noFill/>
-        </p:spPr>
-        <p:txBody>
-          <a:bodyPr wrap="none" lIns="0" tIns="0" rIns="45720" bIns="0" anchor="ctr"/>
-          <a:lstStyle/>
-          <a:p>
-            <a:pPr algn="r"/>
-            <a:r>
-              <a:t>174</a:t>
-            </a:r>
-            <a:endParaRPr sz="1000" b="1">
-              <a:solidFill>
-                <a:srgbClr val="7A8A6E"/>
-              </a:solidFill>
-              <a:latin typeface="Calibri"/>
-            </a:endParaRPr>
-          </a:p>
-        </p:txBody>
-      </p:sp>
-    </p:spTree>
-  </p:cSld>
-  <p:clrMapOvr>
-    <a:masterClrMapping/>
-  </p:clrMapOvr>
-</p:sld>
-</file>
-
-<file path=ppt/slides/slide17.xml><?xml version="1.0" encoding="utf-8"?>
-<p:sld xmlns:a="http://schemas.openxmlformats.org/drawingml/2006/main" xmlns:p="http://schemas.openxmlformats.org/presentationml/2006/main" xmlns:r="http://schemas.openxmlformats.org/officeDocument/2006/relationships">
-  <p:cSld>
-    <p:spTree>
-      <p:nvGrpSpPr>
-        <p:cNvPr id="1" name=""/>
-        <p:cNvGrpSpPr/>
-        <p:nvPr/>
-      </p:nvGrpSpPr>
-      <p:grpSpPr/>
-      <p:sp>
-        <p:nvSpPr>
-          <p:cNvPr id="2" name="Rectangle 1"/>
-          <p:cNvSpPr/>
-          <p:nvPr/>
-        </p:nvSpPr>
-        <p:spPr>
-          <a:xfrm>
-            <a:off x="0" y="0"/>
-            <a:ext cx="12192000" cy="6858000"/>
-          </a:xfrm>
-          <a:prstGeom prst="rect">
-            <a:avLst/>
-          </a:prstGeom>
-          <a:solidFill>
-            <a:srgbClr val="FFFFFF"/>
-          </a:solidFill>
-          <a:ln>
-            <a:noFill/>
-          </a:ln>
-          <a:effectLst/>
-        </p:spPr>
-        <p:style>
-          <a:lnRef idx="1">
-            <a:schemeClr val="accent1"/>
-          </a:lnRef>
-          <a:fillRef idx="3">
-            <a:schemeClr val="accent1"/>
-          </a:fillRef>
-          <a:effectRef idx="2">
-            <a:schemeClr val="accent1"/>
-          </a:effectRef>
-          <a:fontRef idx="minor">
-            <a:schemeClr val="lt1"/>
-          </a:fontRef>
-        </p:style>
-        <p:txBody>
-          <a:bodyPr rtlCol="0" anchor="ctr"/>
-          <a:lstStyle/>
-          <a:p>
-            <a:pPr algn="ctr"/>
-          </a:p>
-        </p:txBody>
-      </p:sp>
-      <p:sp>
-        <p:nvSpPr>
-          <p:cNvPr id="3" name="TextBox 2"/>
-          <p:cNvSpPr txBox="1"/>
-          <p:nvPr/>
-        </p:nvSpPr>
-        <p:spPr>
-          <a:xfrm>
-            <a:off x="822960" y="502920"/>
-            <a:ext cx="10515600" cy="822960"/>
-          </a:xfrm>
-          <a:prstGeom prst="rect">
-            <a:avLst/>
-          </a:prstGeom>
-          <a:noFill/>
-        </p:spPr>
-        <p:txBody>
-          <a:bodyPr wrap="square">
-            <a:spAutoFit/>
-          </a:bodyPr>
-          <a:lstStyle/>
-          <a:p>
-            <a:r>
-              <a:rPr sz="2800" b="1">
-                <a:solidFill>
-                  <a:srgbClr val="2C5F2D"/>
-                </a:solidFill>
-                <a:latin typeface="Cambria"/>
-              </a:rPr>
-              <a:t>The Take-Home Sheet — the Four Parts</a:t>
-            </a:r>
-          </a:p>
-        </p:txBody>
-      </p:sp>
-      <p:pic>
-        <p:nvPicPr>
-          <p:cNvPr id="4" name="Picture 3" descr="s13_part2.png"/>
-          <p:cNvPicPr>
-            <a:picLocks noChangeAspect="1"/>
-          </p:cNvPicPr>
-          <p:nvPr/>
-        </p:nvPicPr>
-        <p:blipFill>
-          <a:blip r:embed="rId2"/>
-          <a:stretch>
-            <a:fillRect/>
-          </a:stretch>
-        </p:blipFill>
-        <p:spPr>
-          <a:xfrm>
-            <a:off x="2070924" y="1463040"/>
-            <a:ext cx="8049846" cy="4709160"/>
-          </a:xfrm>
-          <a:prstGeom prst="rect">
-            <a:avLst/>
-          </a:prstGeom>
-          <a:ln w="12700">
-            <a:solidFill>
-              <a:srgbClr val="C8C8C8"/>
-            </a:solidFill>
-          </a:ln>
-        </p:spPr>
-      </p:pic>
-      <p:sp>
-        <p:nvSpPr>
-          <p:cNvPr id="5" name="TextBox 4"/>
-          <p:cNvSpPr txBox="1"/>
-          <p:nvPr/>
-        </p:nvSpPr>
-        <p:spPr>
-          <a:xfrm>
-            <a:off x="822960" y="6355080"/>
-            <a:ext cx="10515600" cy="411480"/>
-          </a:xfrm>
-          <a:prstGeom prst="rect">
-            <a:avLst/>
-          </a:prstGeom>
-          <a:noFill/>
-        </p:spPr>
-        <p:txBody>
-          <a:bodyPr wrap="square">
-            <a:spAutoFit/>
-          </a:bodyPr>
-          <a:lstStyle/>
-          <a:p>
-            <a:r>
-              <a:rPr sz="1400" i="1">
-                <a:solidFill>
-                  <a:srgbClr val="595959"/>
-                </a:solidFill>
-                <a:latin typeface="Calibri"/>
-              </a:rPr>
-              <a:t>One practice at a time — and a partner expecting you at the end of week one.</a:t>
-            </a:r>
-          </a:p>
-        </p:txBody>
-      </p:sp>
-      <p:sp>
-        <p:nvSpPr>
-          <p:cNvPr id="90" name="SlideNum"/>
-          <p:cNvSpPr txBox="1"/>
-          <p:nvPr/>
-        </p:nvSpPr>
-        <p:spPr>
-          <a:xfrm>
-            <a:off x="11384280" y="6446520"/>
-            <a:ext cx="640080" cy="292608"/>
-          </a:xfrm>
-          <a:prstGeom prst="rect">
-            <a:avLst/>
-          </a:prstGeom>
-          <a:noFill/>
-        </p:spPr>
-        <p:txBody>
-          <a:bodyPr wrap="none" lIns="0" tIns="0" rIns="45720" bIns="0" anchor="ctr"/>
-          <a:lstStyle/>
-          <a:p>
-            <a:pPr algn="r"/>
-            <a:r>
-              <a:t>174a</a:t>
             </a:r>
             <a:endParaRPr sz="1000" b="1">
               <a:solidFill>
@@ -7027,6 +7119,211 @@
 </file>
 
 <file path=ppt/slides/slide3.xml><?xml version="1.0" encoding="utf-8"?>
+<p:sld xmlns:a="http://schemas.openxmlformats.org/drawingml/2006/main" xmlns:p="http://schemas.openxmlformats.org/presentationml/2006/main" xmlns:r="http://schemas.openxmlformats.org/officeDocument/2006/relationships">
+  <p:cSld>
+    <p:spTree>
+      <p:nvGrpSpPr>
+        <p:cNvPr id="1" name=""/>
+        <p:cNvGrpSpPr/>
+        <p:nvPr/>
+      </p:nvGrpSpPr>
+      <p:grpSpPr/>
+      <p:sp>
+        <p:nvSpPr>
+          <p:cNvPr id="2" name="Rectangle 1"/>
+          <p:cNvSpPr/>
+          <p:nvPr/>
+        </p:nvSpPr>
+        <p:spPr>
+          <a:xfrm>
+            <a:off x="0" y="0"/>
+            <a:ext cx="12192000" cy="6858000"/>
+          </a:xfrm>
+          <a:prstGeom prst="rect">
+            <a:avLst/>
+          </a:prstGeom>
+          <a:solidFill>
+            <a:srgbClr val="FFFFFF"/>
+          </a:solidFill>
+          <a:ln>
+            <a:noFill/>
+          </a:ln>
+          <a:effectLst/>
+        </p:spPr>
+        <p:style>
+          <a:lnRef idx="1">
+            <a:schemeClr val="accent1"/>
+          </a:lnRef>
+          <a:fillRef idx="3">
+            <a:schemeClr val="accent1"/>
+          </a:fillRef>
+          <a:effectRef idx="2">
+            <a:schemeClr val="accent1"/>
+          </a:effectRef>
+          <a:fontRef idx="minor">
+            <a:schemeClr val="lt1"/>
+          </a:fontRef>
+        </p:style>
+        <p:txBody>
+          <a:bodyPr rtlCol="0" anchor="ctr"/>
+          <a:lstStyle/>
+          <a:p>
+            <a:pPr algn="ctr"/>
+          </a:p>
+        </p:txBody>
+      </p:sp>
+      <p:sp>
+        <p:nvSpPr>
+          <p:cNvPr id="3" name="TextBox 2"/>
+          <p:cNvSpPr txBox="1"/>
+          <p:nvPr/>
+        </p:nvSpPr>
+        <p:spPr>
+          <a:xfrm>
+            <a:off x="822960" y="502920"/>
+            <a:ext cx="10515600" cy="822960"/>
+          </a:xfrm>
+          <a:prstGeom prst="rect">
+            <a:avLst/>
+          </a:prstGeom>
+          <a:noFill/>
+        </p:spPr>
+        <p:txBody>
+          <a:bodyPr wrap="square">
+            <a:spAutoFit/>
+          </a:bodyPr>
+          <a:lstStyle/>
+          <a:p>
+            <a:r>
+              <a:rPr sz="2800" b="1">
+                <a:solidFill>
+                  <a:srgbClr val="2C5F2D"/>
+                </a:solidFill>
+                <a:latin typeface="Cambria"/>
+              </a:rPr>
+              <a:t>Where We Are — the Four Connects</a:t>
+            </a:r>
+          </a:p>
+        </p:txBody>
+      </p:sp>
+      <p:sp>
+        <p:nvSpPr>
+          <p:cNvPr id="5" name="TextBox 4"/>
+          <p:cNvSpPr txBox="1"/>
+          <p:nvPr/>
+        </p:nvSpPr>
+        <p:spPr>
+          <a:xfrm>
+            <a:off x="822960" y="5623560"/>
+            <a:ext cx="10515600" cy="914400"/>
+          </a:xfrm>
+          <a:prstGeom prst="rect">
+            <a:avLst/>
+          </a:prstGeom>
+          <a:noFill/>
+        </p:spPr>
+        <p:txBody>
+          <a:bodyPr wrap="square">
+            <a:spAutoFit/>
+          </a:bodyPr>
+          <a:lstStyle/>
+          <a:p>
+            <a:r>
+              <a:rPr sz="1800" b="0">
+                <a:solidFill>
+                  <a:srgbClr val="222B22"/>
+                </a:solidFill>
+                <a:latin typeface="Calibri"/>
+              </a:rPr>
+              <a:t>Session 13 stands in the fourth box — </a:t>
+            </a:r>
+            <a:r>
+              <a:rPr sz="1800" b="1">
+                <a:solidFill>
+                  <a:srgbClr val="2C5F2D"/>
+                </a:solidFill>
+                <a:latin typeface="Calibri"/>
+              </a:rPr>
+              <a:t>Connect with Mission</a:t>
+            </a:r>
+            <a:r>
+              <a:rPr sz="1800" b="0">
+                <a:solidFill>
+                  <a:srgbClr val="222B22"/>
+                </a:solidFill>
+                <a:latin typeface="Calibri"/>
+              </a:rPr>
+              <a:t>: the works He prepared (Eph. 2:10). Each connection makes the next one real (Matt. 22:37–40).</a:t>
+            </a:r>
+          </a:p>
+        </p:txBody>
+      </p:sp>
+      <p:sp>
+        <p:nvSpPr>
+          <p:cNvPr id="90" name="SlideNum"/>
+          <p:cNvSpPr txBox="1"/>
+          <p:nvPr/>
+        </p:nvSpPr>
+        <p:spPr>
+          <a:xfrm>
+            <a:off x="11384280" y="6446520"/>
+            <a:ext cx="640080" cy="292608"/>
+          </a:xfrm>
+          <a:prstGeom prst="rect">
+            <a:avLst/>
+          </a:prstGeom>
+          <a:noFill/>
+        </p:spPr>
+        <p:txBody>
+          <a:bodyPr wrap="none" lIns="0" tIns="0" rIns="45720" bIns="0" anchor="ctr"/>
+          <a:lstStyle/>
+          <a:p>
+            <a:pPr algn="r"/>
+            <a:r>
+              <a:t>164a</a:t>
+            </a:r>
+            <a:endParaRPr sz="1000" b="1">
+              <a:solidFill>
+                <a:srgbClr val="7A8A6E"/>
+              </a:solidFill>
+              <a:latin typeface="Calibri"/>
+            </a:endParaRPr>
+          </a:p>
+        </p:txBody>
+      </p:sp>
+      <p:pic>
+        <p:nvPicPr>
+          <p:cNvPr id="91" name="Picture 90" descr="four-connects.png"/>
+          <p:cNvPicPr>
+            <a:picLocks noChangeAspect="1"/>
+          </p:cNvPicPr>
+          <p:nvPr/>
+        </p:nvPicPr>
+        <p:blipFill>
+          <a:blip r:embed="rId4"/>
+          <a:stretch>
+            <a:fillRect/>
+          </a:stretch>
+        </p:blipFill>
+        <p:spPr>
+          <a:xfrm>
+            <a:off x="932688" y="1645920"/>
+            <a:ext cx="10332720" cy="3708663"/>
+          </a:xfrm>
+          <a:prstGeom prst="rect">
+            <a:avLst/>
+          </a:prstGeom>
+        </p:spPr>
+      </p:pic>
+    </p:spTree>
+  </p:cSld>
+  <p:clrMapOvr>
+    <a:masterClrMapping/>
+  </p:clrMapOvr>
+</p:sld>
+</file>
+
+<file path=ppt/slides/slide4.xml><?xml version="1.0" encoding="utf-8"?>
 <p:sld xmlns:a="http://schemas.openxmlformats.org/drawingml/2006/main" xmlns:r="http://schemas.openxmlformats.org/officeDocument/2006/relationships" xmlns:p="http://schemas.openxmlformats.org/presentationml/2006/main">
   <p:cSld>
     <p:spTree>
@@ -7452,7 +7749,7 @@
 </p:sld>
 </file>
 
-<file path=ppt/slides/slide4.xml><?xml version="1.0" encoding="utf-8"?>
+<file path=ppt/slides/slide5.xml><?xml version="1.0" encoding="utf-8"?>
 <p:sld xmlns:a="http://schemas.openxmlformats.org/drawingml/2006/main" xmlns:r="http://schemas.openxmlformats.org/officeDocument/2006/relationships" xmlns:p="http://schemas.openxmlformats.org/presentationml/2006/main">
   <p:cSld>
     <p:spTree>
@@ -7799,7 +8096,7 @@
 </p:sld>
 </file>
 
-<file path=ppt/slides/slide5.xml><?xml version="1.0" encoding="utf-8"?>
+<file path=ppt/slides/slide6.xml><?xml version="1.0" encoding="utf-8"?>
 <p:sld xmlns:a="http://schemas.openxmlformats.org/drawingml/2006/main" xmlns:r="http://schemas.openxmlformats.org/officeDocument/2006/relationships" xmlns:p="http://schemas.openxmlformats.org/presentationml/2006/main">
   <p:cSld>
     <p:spTree>
@@ -8082,7 +8379,7 @@
 </p:sld>
 </file>
 
-<file path=ppt/slides/slide6.xml><?xml version="1.0" encoding="utf-8"?>
+<file path=ppt/slides/slide7.xml><?xml version="1.0" encoding="utf-8"?>
 <p:sld xmlns:a="http://schemas.openxmlformats.org/drawingml/2006/main" xmlns:r="http://schemas.openxmlformats.org/officeDocument/2006/relationships" xmlns:p="http://schemas.openxmlformats.org/presentationml/2006/main">
   <p:cSld>
     <p:spTree>
@@ -8409,7 +8706,7 @@
 </p:sld>
 </file>
 
-<file path=ppt/slides/slide7.xml><?xml version="1.0" encoding="utf-8"?>
+<file path=ppt/slides/slide8.xml><?xml version="1.0" encoding="utf-8"?>
 <p:sld xmlns:a="http://schemas.openxmlformats.org/drawingml/2006/main" xmlns:r="http://schemas.openxmlformats.org/officeDocument/2006/relationships" xmlns:p="http://schemas.openxmlformats.org/presentationml/2006/main">
   <p:cSld>
     <p:spTree>
@@ -8571,303 +8868,6 @@
 </p:sld>
 </file>
 
-<file path=ppt/slides/slide8.xml><?xml version="1.0" encoding="utf-8"?>
-<p:sld xmlns:a="http://schemas.openxmlformats.org/drawingml/2006/main" xmlns:r="http://schemas.openxmlformats.org/officeDocument/2006/relationships" xmlns:p="http://schemas.openxmlformats.org/presentationml/2006/main">
-  <p:cSld>
-    <p:spTree>
-      <p:nvGrpSpPr>
-        <p:cNvPr id="1" name=""/>
-        <p:cNvGrpSpPr/>
-        <p:nvPr/>
-      </p:nvGrpSpPr>
-      <p:grpSpPr>
-        <a:xfrm>
-          <a:off x="0" y="0"/>
-          <a:ext cx="0" cy="0"/>
-          <a:chOff x="0" y="0"/>
-          <a:chExt cx="0" cy="0"/>
-        </a:xfrm>
-      </p:grpSpPr>
-      <p:sp>
-        <p:nvSpPr>
-          <p:cNvPr id="2" name="Rectangle 1"/>
-          <p:cNvSpPr/>
-          <p:nvPr/>
-        </p:nvSpPr>
-        <p:spPr>
-          <a:xfrm>
-            <a:off x="0" y="0"/>
-            <a:ext cx="12191695" cy="6858000"/>
-          </a:xfrm>
-          <a:prstGeom prst="rect">
-            <a:avLst/>
-          </a:prstGeom>
-          <a:solidFill>
-            <a:srgbClr val="FFFFFF"/>
-          </a:solidFill>
-          <a:ln>
-            <a:noFill/>
-          </a:ln>
-        </p:spPr>
-        <p:txBody>
-          <a:bodyPr/>
-          <a:lstStyle/>
-          <a:p>
-            <a:endParaRPr/>
-          </a:p>
-        </p:txBody>
-      </p:sp>
-      <p:sp>
-        <p:nvSpPr>
-          <p:cNvPr id="3" name="TextBox 2"/>
-          <p:cNvSpPr txBox="1"/>
-          <p:nvPr/>
-        </p:nvSpPr>
-        <p:spPr>
-          <a:xfrm>
-            <a:off x="822960" y="502920"/>
-            <a:ext cx="10515600" cy="822960"/>
-          </a:xfrm>
-          <a:prstGeom prst="rect">
-            <a:avLst/>
-          </a:prstGeom>
-          <a:noFill/>
-        </p:spPr>
-        <p:txBody>
-          <a:bodyPr wrap="square">
-            <a:spAutoFit/>
-          </a:bodyPr>
-          <a:lstStyle/>
-          <a:p>
-            <a:pPr algn="l">
-              <a:spcAft>
-                <a:spcPts val="600"/>
-              </a:spcAft>
-            </a:pPr>
-            <a:r>
-              <a:rPr sz="2800" b="1" i="0">
-                <a:solidFill>
-                  <a:srgbClr val="2C5F2D"/>
-                </a:solidFill>
-                <a:latin typeface="Cambria"/>
-              </a:rPr>
-              <a:t>Bridge to the Split — Two Exercises</a:t>
-            </a:r>
-          </a:p>
-        </p:txBody>
-      </p:sp>
-      <p:sp>
-        <p:nvSpPr>
-          <p:cNvPr id="4" name="TextBox 4"/>
-          <p:cNvSpPr txBox="1"/>
-          <p:nvPr/>
-        </p:nvSpPr>
-        <p:spPr>
-          <a:xfrm>
-            <a:off x="822960" y="1554480"/>
-            <a:ext cx="10515600" cy="4892040"/>
-          </a:xfrm>
-          <a:prstGeom prst="rect">
-            <a:avLst/>
-          </a:prstGeom>
-          <a:noFill/>
-        </p:spPr>
-        <p:txBody>
-          <a:bodyPr wrap="square" lIns="91440" tIns="91440" rIns="91440" bIns="91440"/>
-          <a:lstStyle/>
-          <a:p>
-            <a:pPr marL="342900" indent="-342900">
-              <a:spcAft>
-                <a:spcPts val="900"/>
-              </a:spcAft>
-            </a:pPr>
-            <a:r>
-              <a:rPr sz="2400" b="1" i="0">
-                <a:solidFill>
-                  <a:srgbClr val="97BC62"/>
-                </a:solidFill>
-                <a:latin typeface="Calibri"/>
-              </a:rPr>
-              <a:t>1   </a:t>
-            </a:r>
-            <a:r>
-              <a:rPr sz="2400" b="0" i="0">
-                <a:solidFill>
-                  <a:srgbClr val="222B22"/>
-                </a:solidFill>
-                <a:latin typeface="Calibri"/>
-              </a:rPr>
-              <a:t>Gifts and Passions — about twenty minutes: ten alone, ten sharing. Where are you alive? What comes naturally? Where do others tell you you have something to offer?</a:t>
-            </a:r>
-          </a:p>
-          <a:p>
-            <a:pPr marL="685800" indent="-274320">
-              <a:spcAft>
-                <a:spcPts val="650"/>
-              </a:spcAft>
-            </a:pPr>
-            <a:r>
-              <a:rPr sz="1800" b="1" i="0">
-                <a:solidFill>
-                  <a:srgbClr val="97BC62"/>
-                </a:solidFill>
-                <a:latin typeface="Calibri"/>
-              </a:rPr>
-              <a:t>–  </a:t>
-            </a:r>
-            <a:r>
-              <a:rPr sz="1800" b="0" i="1">
-                <a:solidFill>
-                  <a:srgbClr val="222B22"/>
-                </a:solidFill>
-                <a:latin typeface="Calibri"/>
-              </a:rPr>
-              <a:t>Share frame: “The three things I noticed are ______. The one I’m most surprised by is ______.”</a:t>
-            </a:r>
-          </a:p>
-          <a:p>
-            <a:pPr marL="342900" indent="-342900">
-              <a:spcAft>
-                <a:spcPts val="900"/>
-              </a:spcAft>
-            </a:pPr>
-            <a:r>
-              <a:rPr sz="2400" b="1" i="0">
-                <a:solidFill>
-                  <a:srgbClr val="97BC62"/>
-                </a:solidFill>
-                <a:latin typeface="Calibri"/>
-              </a:rPr>
-              <a:t>2   </a:t>
-            </a:r>
-            <a:r>
-              <a:rPr sz="2400" b="0" i="0">
-                <a:solidFill>
-                  <a:srgbClr val="222B22"/>
-                </a:solidFill>
-                <a:latin typeface="Calibri"/>
-              </a:rPr>
-              <a:t>Downhill Mission — about twenty minutes: five alone, then name your answer to the pair. “When I am at my best, what the room gets is ___.”</a:t>
-            </a:r>
-          </a:p>
-          <a:p>
-            <a:pPr marL="685800" indent="-274320">
-              <a:spcAft>
-                <a:spcPts val="650"/>
-              </a:spcAft>
-            </a:pPr>
-            <a:r>
-              <a:rPr sz="1800" b="1" i="0">
-                <a:solidFill>
-                  <a:srgbClr val="97BC62"/>
-                </a:solidFill>
-                <a:latin typeface="Calibri"/>
-              </a:rPr>
-              <a:t>–  </a:t>
-            </a:r>
-            <a:r>
-              <a:rPr sz="1800" b="0" i="1">
-                <a:solidFill>
-                  <a:srgbClr val="222B22"/>
-                </a:solidFill>
-                <a:latin typeface="Calibri"/>
-              </a:rPr>
-              <a:t>The pair adds: “What I’ve seen in you is ______.” — specific, brief, something actually seen</a:t>
-            </a:r>
-          </a:p>
-          <a:p>
-            <a:pPr marL="274320" indent="-274320">
-              <a:spcAft>
-                <a:spcPts val="900"/>
-              </a:spcAft>
-            </a:pPr>
-            <a:r>
-              <a:rPr sz="2400" b="1" i="0">
-                <a:solidFill>
-                  <a:srgbClr val="97BC62"/>
-                </a:solidFill>
-                <a:latin typeface="Calibri"/>
-              </a:rPr>
-              <a:t>•  </a:t>
-            </a:r>
-            <a:r>
-              <a:rPr sz="2400" b="0" i="0">
-                <a:solidFill>
-                  <a:srgbClr val="222B22"/>
-                </a:solidFill>
-                <a:latin typeface="Calibri"/>
-              </a:rPr>
-              <a:t>In each round a parent goes first — teens choose their own depth, and passing holds</a:t>
-            </a:r>
-          </a:p>
-          <a:p>
-            <a:pPr marL="274320" indent="-274320">
-              <a:spcAft>
-                <a:spcPts val="900"/>
-              </a:spcAft>
-            </a:pPr>
-            <a:r>
-              <a:rPr sz="2400" b="1" i="0">
-                <a:solidFill>
-                  <a:srgbClr val="97BC62"/>
-                </a:solidFill>
-                <a:latin typeface="Calibri"/>
-              </a:rPr>
-              <a:t>•  </a:t>
-            </a:r>
-            <a:r>
-              <a:rPr sz="2400" b="0" i="0">
-                <a:solidFill>
-                  <a:srgbClr val="222B22"/>
-                </a:solidFill>
-                <a:latin typeface="Calibri"/>
-              </a:rPr>
-              <a:t>The pair may add what they have noticed — a parent may speak to a teen’s gifts, and a teen to a parent’s</a:t>
-            </a:r>
-          </a:p>
-        </p:txBody>
-      </p:sp>
-      <p:sp>
-        <p:nvSpPr>
-          <p:cNvPr id="90" name="SlideNum"/>
-          <p:cNvSpPr txBox="1"/>
-          <p:nvPr/>
-        </p:nvSpPr>
-        <p:spPr>
-          <a:xfrm>
-            <a:off x="11384280" y="6446520"/>
-            <a:ext cx="640080" cy="292608"/>
-          </a:xfrm>
-          <a:prstGeom prst="rect">
-            <a:avLst/>
-          </a:prstGeom>
-          <a:noFill/>
-        </p:spPr>
-        <p:txBody>
-          <a:bodyPr wrap="none" lIns="0" tIns="0" rIns="45720" bIns="0" anchor="ctr"/>
-          <a:lstStyle/>
-          <a:p>
-            <a:pPr algn="r"/>
-            <a:r>
-              <a:t>170</a:t>
-            </a:r>
-            <a:endParaRPr sz="1000" b="1">
-              <a:solidFill>
-                <a:srgbClr val="7A8A6E"/>
-              </a:solidFill>
-              <a:latin typeface="Calibri"/>
-            </a:endParaRPr>
-          </a:p>
-        </p:txBody>
-      </p:sp>
-    </p:spTree>
-  </p:cSld>
-  <p:clrMapOvr>
-    <a:masterClrMapping/>
-  </p:clrMapOvr>
-</p:sld>
-</file>
-
 <file path=ppt/slides/slide9.xml><?xml version="1.0" encoding="utf-8"?>
 <p:sld xmlns:a="http://schemas.openxmlformats.org/drawingml/2006/main" xmlns:r="http://schemas.openxmlformats.org/officeDocument/2006/relationships" xmlns:p="http://schemas.openxmlformats.org/presentationml/2006/main">
   <p:cSld>
@@ -8948,7 +8948,7 @@
                 </a:solidFill>
                 <a:latin typeface="Cambria"/>
               </a:rPr>
-              <a:t>Gifts and Downhill in pairs</a:t>
+              <a:t>Bridge to the Split — Two Exercises</a:t>
             </a:r>
           </a:p>
         </p:txBody>
@@ -8973,9 +8973,109 @@
           <a:bodyPr wrap="square" lIns="91440" tIns="91440" rIns="91440" bIns="91440"/>
           <a:lstStyle/>
           <a:p>
+            <a:pPr marL="342900" indent="-342900">
+              <a:spcAft>
+                <a:spcPts val="900"/>
+              </a:spcAft>
+            </a:pPr>
+            <a:r>
+              <a:rPr sz="2400" b="1" i="0">
+                <a:solidFill>
+                  <a:srgbClr val="97BC62"/>
+                </a:solidFill>
+                <a:latin typeface="Calibri"/>
+              </a:rPr>
+              <a:t>1   </a:t>
+            </a:r>
+            <a:r>
+              <a:rPr sz="2400" b="0" i="0">
+                <a:solidFill>
+                  <a:srgbClr val="222B22"/>
+                </a:solidFill>
+                <a:latin typeface="Calibri"/>
+              </a:rPr>
+              <a:t>Gifts and Passions — about twenty minutes: ten alone, ten sharing. Where are you alive? What comes naturally? Where do others tell you you have something to offer?</a:t>
+            </a:r>
+          </a:p>
+          <a:p>
+            <a:pPr marL="685800" indent="-274320">
+              <a:spcAft>
+                <a:spcPts val="650"/>
+              </a:spcAft>
+            </a:pPr>
+            <a:r>
+              <a:rPr sz="1800" b="1" i="0">
+                <a:solidFill>
+                  <a:srgbClr val="97BC62"/>
+                </a:solidFill>
+                <a:latin typeface="Calibri"/>
+              </a:rPr>
+              <a:t>–  </a:t>
+            </a:r>
+            <a:r>
+              <a:rPr sz="1800" b="0" i="1">
+                <a:solidFill>
+                  <a:srgbClr val="222B22"/>
+                </a:solidFill>
+                <a:latin typeface="Calibri"/>
+              </a:rPr>
+              <a:t>Share frame: “The three things I noticed are ______. The one I’m most surprised by is ______.”</a:t>
+            </a:r>
+          </a:p>
+          <a:p>
+            <a:pPr marL="342900" indent="-342900">
+              <a:spcAft>
+                <a:spcPts val="900"/>
+              </a:spcAft>
+            </a:pPr>
+            <a:r>
+              <a:rPr sz="2400" b="1" i="0">
+                <a:solidFill>
+                  <a:srgbClr val="97BC62"/>
+                </a:solidFill>
+                <a:latin typeface="Calibri"/>
+              </a:rPr>
+              <a:t>2   </a:t>
+            </a:r>
+            <a:r>
+              <a:rPr sz="2400" b="0" i="0">
+                <a:solidFill>
+                  <a:srgbClr val="222B22"/>
+                </a:solidFill>
+                <a:latin typeface="Calibri"/>
+              </a:rPr>
+              <a:t>Downhill Mission — about twenty minutes: five alone, then name your answer to the pair. “When I am at my best, what the room gets is ___.”</a:t>
+            </a:r>
+          </a:p>
+          <a:p>
+            <a:pPr marL="685800" indent="-274320">
+              <a:spcAft>
+                <a:spcPts val="650"/>
+              </a:spcAft>
+            </a:pPr>
+            <a:r>
+              <a:rPr sz="1800" b="1" i="0">
+                <a:solidFill>
+                  <a:srgbClr val="97BC62"/>
+                </a:solidFill>
+                <a:latin typeface="Calibri"/>
+              </a:rPr>
+              <a:t>–  </a:t>
+            </a:r>
+            <a:r>
+              <a:rPr sz="1800" b="0" i="1">
+                <a:solidFill>
+                  <a:srgbClr val="222B22"/>
+                </a:solidFill>
+                <a:latin typeface="Calibri"/>
+              </a:rPr>
+              <a:t>The pair adds: “What I’ve seen in you is ______.” — specific, brief, something actually seen</a:t>
+            </a:r>
+          </a:p>
+          <a:p>
             <a:pPr marL="274320" indent="-274320">
               <a:spcAft>
-                <a:spcPts val="750"/>
+                <a:spcPts val="900"/>
               </a:spcAft>
             </a:pPr>
             <a:r>
@@ -8994,13 +9094,13 @@
                 </a:solidFill>
                 <a:latin typeface="Calibri"/>
               </a:rPr>
-              <a:t>Phase 1 — Gifts and Passions: quiet writing (10 min), then 60 seconds each: “The three things I noticed are ___. The one I’m most surprised by is ___.”</a:t>
+              <a:t>In each round a parent goes first — teens choose their own depth, and passing holds</a:t>
             </a:r>
           </a:p>
           <a:p>
             <a:pPr marL="274320" indent="-274320">
               <a:spcAft>
-                <a:spcPts val="750"/>
+                <a:spcPts val="900"/>
               </a:spcAft>
             </a:pPr>
             <a:r>
@@ -9019,107 +9119,7 @@
                 </a:solidFill>
                 <a:latin typeface="Calibri"/>
               </a:rPr>
-              <a:t>After each share the pair affirms what it has seen — specific and brief: “Yes — we see that in you. Specifically: ___.”</a:t>
-            </a:r>
-          </a:p>
-          <a:p>
-            <a:pPr marL="274320" indent="-274320">
-              <a:spcAft>
-                <a:spcPts val="750"/>
-              </a:spcAft>
-            </a:pPr>
-            <a:r>
-              <a:rPr sz="2400" b="1" i="0">
-                <a:solidFill>
-                  <a:srgbClr val="97BC62"/>
-                </a:solidFill>
-                <a:latin typeface="Calibri"/>
-              </a:rPr>
-              <a:t>•  </a:t>
-            </a:r>
-            <a:r>
-              <a:rPr sz="2400" b="0" i="0">
-                <a:solidFill>
-                  <a:srgbClr val="222B22"/>
-                </a:solidFill>
-                <a:latin typeface="Calibri"/>
-              </a:rPr>
-              <a:t>Phase 2 — Downhill Mission: five quiet minutes, then around the circle, 90 seconds each</a:t>
-            </a:r>
-          </a:p>
-          <a:p>
-            <a:pPr marL="685800" indent="-274320">
-              <a:spcAft>
-                <a:spcPts val="550"/>
-              </a:spcAft>
-            </a:pPr>
-            <a:r>
-              <a:rPr sz="1800" b="1" i="0">
-                <a:solidFill>
-                  <a:srgbClr val="97BC62"/>
-                </a:solidFill>
-                <a:latin typeface="Calibri"/>
-              </a:rPr>
-              <a:t>–  </a:t>
-            </a:r>
-            <a:r>
-              <a:rPr sz="1800" b="0" i="1">
-                <a:solidFill>
-                  <a:srgbClr val="222B22"/>
-                </a:solidFill>
-                <a:latin typeface="Calibri"/>
-              </a:rPr>
-              <a:t>“What I noticed is that when I’m at my best, what the room gets is ___.”</a:t>
-            </a:r>
-          </a:p>
-          <a:p>
-            <a:pPr marL="274320" indent="-274320">
-              <a:spcAft>
-                <a:spcPts val="750"/>
-              </a:spcAft>
-            </a:pPr>
-            <a:r>
-              <a:rPr sz="2400" b="1" i="0">
-                <a:solidFill>
-                  <a:srgbClr val="97BC62"/>
-                </a:solidFill>
-                <a:latin typeface="Calibri"/>
-              </a:rPr>
-              <a:t>•  </a:t>
-            </a:r>
-            <a:r>
-              <a:rPr sz="2400" b="0" i="0">
-                <a:solidFill>
-                  <a:srgbClr val="222B22"/>
-                </a:solidFill>
-                <a:latin typeface="Calibri"/>
-              </a:rPr>
-              <a:t>One or two voices add what they have actually seen across Getting Started — especially each other’s family</a:t>
-            </a:r>
-          </a:p>
-          <a:p>
-            <a:pPr marL="274320" indent="-274320">
-              <a:spcAft>
-                <a:spcPts val="750"/>
-              </a:spcAft>
-            </a:pPr>
-            <a:r>
-              <a:rPr sz="2400" b="1" i="0">
-                <a:solidFill>
-                  <a:srgbClr val="97BC62"/>
-                </a:solidFill>
-                <a:latin typeface="Calibri"/>
-              </a:rPr>
-              <a:t>•  </a:t>
-            </a:r>
-            <a:r>
-              <a:rPr sz="2400" b="0" i="0">
-                <a:solidFill>
-                  <a:srgbClr val="222B22"/>
-                </a:solidFill>
-                <a:latin typeface="Calibri"/>
-              </a:rPr>
-              <a:t>The naming is the gift — no over-processing. Pass-anytime holds</a:t>
+              <a:t>The pair may add what they have noticed — a parent may speak to a teen’s gifts, and a teen to a parent’s</a:t>
             </a:r>
           </a:p>
         </p:txBody>
@@ -9146,7 +9146,7 @@
           <a:p>
             <a:pPr algn="r"/>
             <a:r>
-              <a:t>171</a:t>
+              <a:t>170</a:t>
             </a:r>
             <a:endParaRPr sz="1000" b="1">
               <a:solidFill>

--- a/_implementation-notes/evening-series/FotH Evening Session 13 Slides DRAFT v1.pptx
+++ b/_implementation-notes/evening-series/FotH Evening Session 13 Slides DRAFT v1.pptx
@@ -7300,7 +7300,7 @@
           <p:nvPr/>
         </p:nvPicPr>
         <p:blipFill>
-          <a:blip r:embed="rId4"/>
+          <a:blip r:embed="rId5"/>
           <a:stretch>
             <a:fillRect/>
           </a:stretch>

--- a/_implementation-notes/evening-series/FotH Evening Session 13 Slides DRAFT v1.pptx
+++ b/_implementation-notes/evening-series/FotH Evening Session 13 Slides DRAFT v1.pptx
@@ -5169,7 +5169,7 @@
           <a:p>
             <a:pPr algn="r"/>
             <a:r>
-              <a:t>171</a:t>
+              <a:t>196</a:t>
             </a:r>
             <a:endParaRPr sz="1000" b="1">
               <a:solidFill>
@@ -5416,7 +5416,7 @@
           <a:p>
             <a:pPr algn="r"/>
             <a:r>
-              <a:t>172</a:t>
+              <a:t>197</a:t>
             </a:r>
             <a:endParaRPr sz="1000" b="1">
               <a:solidFill>
@@ -5688,7 +5688,7 @@
           <a:p>
             <a:pPr algn="r"/>
             <a:r>
-              <a:t>173</a:t>
+              <a:t>198</a:t>
             </a:r>
             <a:endParaRPr sz="1000" b="1">
               <a:solidFill>
@@ -5916,7 +5916,7 @@
           <a:p>
             <a:pPr algn="r"/>
             <a:r>
-              <a:t>174</a:t>
+              <a:t>199</a:t>
             </a:r>
             <a:endParaRPr sz="1000" b="1">
               <a:solidFill>
@@ -6108,7 +6108,7 @@
           <a:p>
             <a:pPr algn="r"/>
             <a:r>
-              <a:t>174a</a:t>
+              <a:t>200</a:t>
             </a:r>
             <a:endParaRPr sz="1000" b="1">
               <a:solidFill>
@@ -6405,7 +6405,7 @@
           <a:p>
             <a:pPr algn="r"/>
             <a:r>
-              <a:t>175</a:t>
+              <a:t>201</a:t>
             </a:r>
             <a:endParaRPr sz="1000" b="1">
               <a:solidFill>
@@ -6850,7 +6850,7 @@
           <a:p>
             <a:pPr algn="r"/>
             <a:r>
-              <a:t>176</a:t>
+              <a:t>202</a:t>
             </a:r>
             <a:endParaRPr sz="1000" b="1">
               <a:solidFill>
@@ -7099,7 +7099,7 @@
           <a:p>
             <a:pPr algn="r"/>
             <a:r>
-              <a:t>164</a:t>
+              <a:t>188</a:t>
             </a:r>
             <a:endParaRPr sz="1000" b="1">
               <a:solidFill>
@@ -7280,7 +7280,7 @@
           <a:p>
             <a:pPr algn="r"/>
             <a:r>
-              <a:t>164a</a:t>
+              <a:t>189</a:t>
             </a:r>
             <a:endParaRPr sz="1000" b="1">
               <a:solidFill>
@@ -7694,7 +7694,7 @@
           <a:p>
             <a:pPr algn="r"/>
             <a:r>
-              <a:t>165</a:t>
+              <a:t>190</a:t>
             </a:r>
             <a:endParaRPr sz="1000" b="1">
               <a:solidFill>
@@ -8077,7 +8077,7 @@
           <a:p>
             <a:pPr algn="r"/>
             <a:r>
-              <a:t>166</a:t>
+              <a:t>191</a:t>
             </a:r>
             <a:endParaRPr sz="1000" b="1">
               <a:solidFill>
@@ -8324,7 +8324,7 @@
           <a:p>
             <a:pPr algn="r"/>
             <a:r>
-              <a:t>167</a:t>
+              <a:t>192</a:t>
             </a:r>
             <a:endParaRPr sz="1000" b="1">
               <a:solidFill>
@@ -8687,7 +8687,7 @@
           <a:p>
             <a:pPr algn="r"/>
             <a:r>
-              <a:t>168</a:t>
+              <a:t>193</a:t>
             </a:r>
             <a:endParaRPr sz="1000" b="1">
               <a:solidFill>
@@ -8813,7 +8813,7 @@
           <a:p>
             <a:pPr algn="r"/>
             <a:r>
-              <a:t>169</a:t>
+              <a:t>194</a:t>
             </a:r>
             <a:endParaRPr sz="1000" b="1">
               <a:solidFill>
@@ -9146,7 +9146,7 @@
           <a:p>
             <a:pPr algn="r"/>
             <a:r>
-              <a:t>170</a:t>
+              <a:t>195</a:t>
             </a:r>
             <a:endParaRPr sz="1000" b="1">
               <a:solidFill>

--- a/_implementation-notes/evening-series/FotH Evening Session 13 Slides DRAFT v1.pptx
+++ b/_implementation-notes/evening-series/FotH Evening Session 13 Slides DRAFT v1.pptx
@@ -7300,7 +7300,7 @@
           <p:nvPr/>
         </p:nvPicPr>
         <p:blipFill>
-          <a:blip r:embed="rId5"/>
+          <a:blip r:embed="rId6"/>
           <a:stretch>
             <a:fillRect/>
           </a:stretch>

--- a/_implementation-notes/evening-series/FotH Evening Session 13 Slides DRAFT v1.pptx
+++ b/_implementation-notes/evening-series/FotH Evening Session 13 Slides DRAFT v1.pptx
@@ -1502,7 +1502,7 @@
           <a:p>
             <a:r>
               <a:rPr lang="en-US" sz="1200"/>
-              <a:t>BEATS: 1. Ask no one to repeat their downhill answer — what was named in the pair stays there. 2. One sentence per leadsanion: a general observation, no names. 3. One brief observation from you across the room. 4. Land it: today's answer is a working draft — closer to true than the resume version, and it will deepen.</a:t>
+              <a:t>BEATS: 1. Ask no one to repeat their downhill answer — what was named in the pair stays there. 2. One sentence per Lead Companion: a general observation, no names. 3. One brief observation from you across the room. 4. Land it: today's answer is a working draft — closer to true than the resume version, and it will deepen.</a:t>
             </a:r>
           </a:p>
           <a:p>
@@ -5339,7 +5339,7 @@
                 </a:solidFill>
                 <a:latin typeface="Calibri"/>
               </a:rPr>
-              <a:t>One sentence from each leadsanion — one general thing they noticed, not a specific person</a:t>
+              <a:t>One sentence from each Lead Companion — one general thing they noticed, not a specific person</a:t>
             </a:r>
           </a:p>
           <a:p>

--- a/_implementation-notes/evening-series/FotH Evening Session 13 Slides DRAFT v1.pptx
+++ b/_implementation-notes/evening-series/FotH Evening Session 13 Slides DRAFT v1.pptx
@@ -1496,7 +1496,7 @@
           <a:p>
             <a:r>
               <a:rPr lang="en-US" sz="1200"/>
-              <a:t>S13 · 8:18–8:20 · LEAD: CONTENT PRESENTER CIRCLE</a:t>
+              <a:t>S13 · 8:18–8:20 · LEAD: CONTAINER HOLDER CIRCLE</a:t>
             </a:r>
           </a:p>
           <a:p>

--- a/_implementation-notes/evening-series/FotH Evening Session 13 Slides DRAFT v1.pptx
+++ b/_implementation-notes/evening-series/FotH Evening Session 13 Slides DRAFT v1.pptx
@@ -5636,7 +5636,7 @@
                 </a:solidFill>
                 <a:latin typeface="Calibri"/>
               </a:rPr>
-              <a:t>Week 21 — the family commissioning: bring your whole family, even members who have not been here. We run to 6:15 that night — light food from 4:00 as the room builds</a:t>
+              <a:t>Week 21 — the family commissioning: bring your whole family, even members who have not been here. We run to 8:30 that night — light food from 6:00 as the room builds</a:t>
             </a:r>
           </a:p>
           <a:p>

--- a/_implementation-notes/evening-series/FotH Evening Session 13 Slides DRAFT v1.pptx
+++ b/_implementation-notes/evening-series/FotH Evening Session 13 Slides DRAFT v1.pptx
@@ -5169,7 +5169,7 @@
           <a:p>
             <a:pPr algn="r"/>
             <a:r>
-              <a:t>196</a:t>
+              <a:t>197</a:t>
             </a:r>
             <a:endParaRPr sz="1000" b="1">
               <a:solidFill>
@@ -5416,7 +5416,7 @@
           <a:p>
             <a:pPr algn="r"/>
             <a:r>
-              <a:t>197</a:t>
+              <a:t>198</a:t>
             </a:r>
             <a:endParaRPr sz="1000" b="1">
               <a:solidFill>
@@ -5688,7 +5688,7 @@
           <a:p>
             <a:pPr algn="r"/>
             <a:r>
-              <a:t>198</a:t>
+              <a:t>199</a:t>
             </a:r>
             <a:endParaRPr sz="1000" b="1">
               <a:solidFill>
@@ -5916,7 +5916,7 @@
           <a:p>
             <a:pPr algn="r"/>
             <a:r>
-              <a:t>199</a:t>
+              <a:t>200</a:t>
             </a:r>
             <a:endParaRPr sz="1000" b="1">
               <a:solidFill>
@@ -6108,7 +6108,7 @@
           <a:p>
             <a:pPr algn="r"/>
             <a:r>
-              <a:t>200</a:t>
+              <a:t>201</a:t>
             </a:r>
             <a:endParaRPr sz="1000" b="1">
               <a:solidFill>
@@ -6405,7 +6405,7 @@
           <a:p>
             <a:pPr algn="r"/>
             <a:r>
-              <a:t>201</a:t>
+              <a:t>202</a:t>
             </a:r>
             <a:endParaRPr sz="1000" b="1">
               <a:solidFill>
@@ -6850,7 +6850,7 @@
           <a:p>
             <a:pPr algn="r"/>
             <a:r>
-              <a:t>202</a:t>
+              <a:t>203</a:t>
             </a:r>
             <a:endParaRPr sz="1000" b="1">
               <a:solidFill>
@@ -7099,7 +7099,7 @@
           <a:p>
             <a:pPr algn="r"/>
             <a:r>
-              <a:t>188</a:t>
+              <a:t>189</a:t>
             </a:r>
             <a:endParaRPr sz="1000" b="1">
               <a:solidFill>
@@ -7280,7 +7280,7 @@
           <a:p>
             <a:pPr algn="r"/>
             <a:r>
-              <a:t>189</a:t>
+              <a:t>190</a:t>
             </a:r>
             <a:endParaRPr sz="1000" b="1">
               <a:solidFill>
@@ -7694,7 +7694,7 @@
           <a:p>
             <a:pPr algn="r"/>
             <a:r>
-              <a:t>190</a:t>
+              <a:t>191</a:t>
             </a:r>
             <a:endParaRPr sz="1000" b="1">
               <a:solidFill>
@@ -8077,7 +8077,7 @@
           <a:p>
             <a:pPr algn="r"/>
             <a:r>
-              <a:t>191</a:t>
+              <a:t>192</a:t>
             </a:r>
             <a:endParaRPr sz="1000" b="1">
               <a:solidFill>
@@ -8324,7 +8324,7 @@
           <a:p>
             <a:pPr algn="r"/>
             <a:r>
-              <a:t>192</a:t>
+              <a:t>193</a:t>
             </a:r>
             <a:endParaRPr sz="1000" b="1">
               <a:solidFill>
@@ -8687,7 +8687,7 @@
           <a:p>
             <a:pPr algn="r"/>
             <a:r>
-              <a:t>193</a:t>
+              <a:t>194</a:t>
             </a:r>
             <a:endParaRPr sz="1000" b="1">
               <a:solidFill>
@@ -8813,7 +8813,7 @@
           <a:p>
             <a:pPr algn="r"/>
             <a:r>
-              <a:t>194</a:t>
+              <a:t>195</a:t>
             </a:r>
             <a:endParaRPr sz="1000" b="1">
               <a:solidFill>
@@ -9146,7 +9146,7 @@
           <a:p>
             <a:pPr algn="r"/>
             <a:r>
-              <a:t>195</a:t>
+              <a:t>196</a:t>
             </a:r>
             <a:endParaRPr sz="1000" b="1">
               <a:solidFill>

--- a/_implementation-notes/evening-series/FotH Evening Session 13 Slides DRAFT v1.pptx
+++ b/_implementation-notes/evening-series/FotH Evening Session 13 Slides DRAFT v1.pptx
@@ -1672,14 +1672,17 @@
           <a:lstStyle/>
           <a:p>
             <a:r>
-              <a:rPr lang="en-US" sz="1200"/>
               <a:t>S13 · 8:28–8:30 · LEAD: CONTAINER HOLDER CIRCLE</a:t>
             </a:r>
           </a:p>
           <a:p>
             <a:r>
-              <a:rPr lang="en-US" sz="1200"/>
               <a:t>BEATS: 1. What was named in your pair is yours — carry it gently; the downhill answer keeps deepening across the week. 2. Open the door for the heavy: shadow-mission recognition or mid-life vocational grief — reach out; the team is walking with you, especially before when we gather. 3. Aaronic blessing, hands up if you want; send them warmly.</a:t>
+            </a:r>
+          </a:p>
+          <a:p>
+            <a:r>
+              <a:t>BLESSINGS: eyes on the person, not the screen — nothing to read; say what is on your heart for them, specific and short.</a:t>
             </a:r>
           </a:p>
         </p:txBody>
@@ -6711,7 +6714,7 @@
                 </a:solidFill>
                 <a:latin typeface="Calibri"/>
               </a:rPr>
-              <a:t>Blessings — specific, witnessed, short</a:t>
+              <a:t>Blessings — eyes on the person, not the screen: say what is on your heart for them. Specific, witnessed, short</a:t>
             </a:r>
           </a:p>
           <a:p>

--- a/_implementation-notes/evening-series/FotH Evening Session 13 Slides DRAFT v1.pptx
+++ b/_implementation-notes/evening-series/FotH Evening Session 13 Slides DRAFT v1.pptx
@@ -5172,7 +5172,7 @@
           <a:p>
             <a:pPr algn="r"/>
             <a:r>
-              <a:t>197</a:t>
+              <a:t>198</a:t>
             </a:r>
             <a:endParaRPr sz="1000" b="1">
               <a:solidFill>
@@ -5419,7 +5419,7 @@
           <a:p>
             <a:pPr algn="r"/>
             <a:r>
-              <a:t>198</a:t>
+              <a:t>199</a:t>
             </a:r>
             <a:endParaRPr sz="1000" b="1">
               <a:solidFill>
@@ -5691,7 +5691,7 @@
           <a:p>
             <a:pPr algn="r"/>
             <a:r>
-              <a:t>199</a:t>
+              <a:t>200</a:t>
             </a:r>
             <a:endParaRPr sz="1000" b="1">
               <a:solidFill>
@@ -5919,7 +5919,7 @@
           <a:p>
             <a:pPr algn="r"/>
             <a:r>
-              <a:t>200</a:t>
+              <a:t>201</a:t>
             </a:r>
             <a:endParaRPr sz="1000" b="1">
               <a:solidFill>
@@ -6111,7 +6111,7 @@
           <a:p>
             <a:pPr algn="r"/>
             <a:r>
-              <a:t>201</a:t>
+              <a:t>202</a:t>
             </a:r>
             <a:endParaRPr sz="1000" b="1">
               <a:solidFill>
@@ -6408,7 +6408,7 @@
           <a:p>
             <a:pPr algn="r"/>
             <a:r>
-              <a:t>202</a:t>
+              <a:t>203</a:t>
             </a:r>
             <a:endParaRPr sz="1000" b="1">
               <a:solidFill>
@@ -6853,7 +6853,7 @@
           <a:p>
             <a:pPr algn="r"/>
             <a:r>
-              <a:t>203</a:t>
+              <a:t>204</a:t>
             </a:r>
             <a:endParaRPr sz="1000" b="1">
               <a:solidFill>
@@ -7102,7 +7102,7 @@
           <a:p>
             <a:pPr algn="r"/>
             <a:r>
-              <a:t>189</a:t>
+              <a:t>190</a:t>
             </a:r>
             <a:endParaRPr sz="1000" b="1">
               <a:solidFill>
@@ -7283,7 +7283,7 @@
           <a:p>
             <a:pPr algn="r"/>
             <a:r>
-              <a:t>190</a:t>
+              <a:t>191</a:t>
             </a:r>
             <a:endParaRPr sz="1000" b="1">
               <a:solidFill>
@@ -7697,7 +7697,7 @@
           <a:p>
             <a:pPr algn="r"/>
             <a:r>
-              <a:t>191</a:t>
+              <a:t>192</a:t>
             </a:r>
             <a:endParaRPr sz="1000" b="1">
               <a:solidFill>
@@ -8080,7 +8080,7 @@
           <a:p>
             <a:pPr algn="r"/>
             <a:r>
-              <a:t>192</a:t>
+              <a:t>193</a:t>
             </a:r>
             <a:endParaRPr sz="1000" b="1">
               <a:solidFill>
@@ -8327,7 +8327,7 @@
           <a:p>
             <a:pPr algn="r"/>
             <a:r>
-              <a:t>193</a:t>
+              <a:t>194</a:t>
             </a:r>
             <a:endParaRPr sz="1000" b="1">
               <a:solidFill>
@@ -8690,7 +8690,7 @@
           <a:p>
             <a:pPr algn="r"/>
             <a:r>
-              <a:t>194</a:t>
+              <a:t>195</a:t>
             </a:r>
             <a:endParaRPr sz="1000" b="1">
               <a:solidFill>
@@ -8816,7 +8816,7 @@
           <a:p>
             <a:pPr algn="r"/>
             <a:r>
-              <a:t>195</a:t>
+              <a:t>196</a:t>
             </a:r>
             <a:endParaRPr sz="1000" b="1">
               <a:solidFill>
@@ -9149,7 +9149,7 @@
           <a:p>
             <a:pPr algn="r"/>
             <a:r>
-              <a:t>196</a:t>
+              <a:t>197</a:t>
             </a:r>
             <a:endParaRPr sz="1000" b="1">
               <a:solidFill>

--- a/_implementation-notes/evening-series/FotH Evening Session 13 Slides DRAFT v1.pptx
+++ b/_implementation-notes/evening-series/FotH Evening Session 13 Slides DRAFT v1.pptx
@@ -786,7 +786,7 @@
           <a:lstStyle/>
           <a:p>
             <a:r>
-              <a:t>S13 · WELCOME · LEAD: CONTAINER HOLDER · GROUNDING — every session opens on this map</a:t>
+              <a:t>E10 · WELCOME · LEAD: CONTAINER HOLDER · GROUNDING — every session opens on this map</a:t>
             </a:r>
           </a:p>
           <a:p>
@@ -796,7 +796,7 @@
           </a:p>
           <a:p>
             <a:r>
-              <a:t>1. Locate tonight on the map, plainly: Session 13 stands in the fourth box — Connect with Mission: the works He prepared (Eph. 2:10). Each connection makes the next one real (Matt. 22:37–40).</a:t>
+              <a:t>1. Locate tonight on the map, plainly: Evening 10 stands in the fourth box — Connect with Mission: the works He prepared (Eph. 2:10). Each connection makes the next one real (Matt. 22:37–40).</a:t>
             </a:r>
           </a:p>
           <a:p>
@@ -857,7 +857,7 @@
           <a:lstStyle/>
           <a:p>
             <a:r>
-              <a:t>S13 · COMMISSIONING · LEAD: CONTENT PRESENTER</a:t>
+              <a:t>E10 · COMMISSIONING · LEAD: CONTENT PRESENTER</a:t>
             </a:r>
           </a:p>
           <a:p>
@@ -928,13 +928,11 @@
           <a:lstStyle/>
           <a:p>
             <a:r>
-              <a:rPr lang="en-US" sz="1200"/>
-              <a:t>S13 · pre-session · DIVIDER</a:t>
-            </a:r>
-          </a:p>
-          <a:p>
-            <a:r>
-              <a:rPr lang="en-US" sz="1200"/>
+              <a:t>E10 · pre-session · DIVIDER</a:t>
+            </a:r>
+          </a:p>
+          <a:p>
+            <a:r>
               <a:t>On screen through dinner and as the circle forms. Greet at the door — the slide holds the room.</a:t>
             </a:r>
           </a:p>
@@ -981,19 +979,16 @@
           <a:lstStyle/>
           <a:p>
             <a:r>
-              <a:rPr lang="en-US" sz="1200"/>
-              <a:t>S13 · 7:00–7:08 · LEAD: CONTAINER HOLDER CIRCLE</a:t>
-            </a:r>
-          </a:p>
-          <a:p>
-            <a:r>
-              <a:rPr lang="en-US" sz="1200"/>
+              <a:t>E10 · 7:00–7:08 · LEAD: CONTAINER HOLDER CIRCLE</a:t>
+            </a:r>
+          </a:p>
+          <a:p>
+            <a:r>
               <a:t>BEATS: 1. Aaronic blessing first. 2. Container reminder: what is said here stays here; nothing is required. 3. Frame the turn: eleven weeks looked inward and upward — today we turn outward to Mission: what was prepared for us to do, and to be. 4. Walk today's road briefly: teaching, two pair exercises, merge, practice, blessing.</a:t>
             </a:r>
           </a:p>
           <a:p>
             <a:r>
-              <a:rPr lang="en-US" sz="1200"/>
               <a:t>GUARD: Mission is bigger than career — say it early; today is not a what-will-you-do-for-a-living night.</a:t>
             </a:r>
           </a:p>
@@ -1040,7 +1035,7 @@
           <a:lstStyle/>
           <a:p>
             <a:r>
-              <a:t>S13 · 7:00–7:08 · LEAD: CONTAINER HOLDER CIRCLE</a:t>
+              <a:t>E10 · 7:00–7:08 · LEAD: CONTAINER HOLDER CIRCLE</a:t>
             </a:r>
           </a:p>
           <a:p>
@@ -1096,19 +1091,16 @@
           <a:lstStyle/>
           <a:p>
             <a:r>
-              <a:rPr lang="en-US" sz="1200"/>
-              <a:t>S13 · 7:08–7:25 · LEAD: CONTAINER HOLDER CIRCLE</a:t>
-            </a:r>
-          </a:p>
-          <a:p>
-            <a:r>
-              <a:rPr lang="en-US" sz="1200"/>
+              <a:t>E10 · 7:08–7:25 · LEAD: CONTAINER HOLDER CIRCLE</a:t>
+            </a:r>
+          </a:p>
+          <a:p>
+            <a:r>
               <a:t>BEATS: 1. Name the thread: Any Doubts? and the Personal Doubts Inventory carried since the break. 2. Invite one sentence on how it landed — 'I didn't get to it' counts. 3. Take two or three voluntary contributions; receive without commentary.</a:t>
             </a:r>
           </a:p>
           <a:p>
             <a:r>
-              <a:rPr lang="en-US" sz="1200"/>
               <a:t>CUES: The arranged parent (Run Card) offers the first sentence — never a cold call on a teen; pass anytime.</a:t>
             </a:r>
           </a:p>
@@ -1155,19 +1147,16 @@
           <a:lstStyle/>
           <a:p>
             <a:r>
-              <a:rPr lang="en-US" sz="1200"/>
-              <a:t>S13 · 7:25–7:35 · LEAD: CONTENT PRESENTER CIRCLE</a:t>
-            </a:r>
-          </a:p>
-          <a:p>
-            <a:r>
-              <a:rPr lang="en-US" sz="1200"/>
+              <a:t>E10 · 7:25–7:35 · LEAD: CONTENT PRESENTER CIRCLE</a:t>
+            </a:r>
+          </a:p>
+          <a:p>
+            <a:r>
               <a:t>BEATS: 1. Read Ephesians 2:10 slowly — the works were prepared; our job is to walk in them. 2. Whiteboard both columns: UPHILL = what I do (goal, plan, effort); DOWNHILL = what I am — what the room gets when I am most myself and most aligned with the Spirit. 3. The test: when I am not performing, what do the people around me get to be? 4. End with your OWN downhill answer — 90 seconds, specific, unpolished; the teens calibrate against your honesty. Give the version a spouse would recognize, not the resume.</a:t>
             </a:r>
           </a:p>
           <a:p>
             <a:r>
-              <a:rPr lang="en-US" sz="1200"/>
               <a:t>GUARD: Mission is not career — reframe career drift on the spot.</a:t>
             </a:r>
           </a:p>
@@ -1214,49 +1203,41 @@
           <a:lstStyle/>
           <a:p>
             <a:r>
-              <a:rPr lang="en-US" sz="1200"/>
-              <a:t>S13 · 7:25–7:35 · LEAD: CONTENT PRESENTER</a:t>
-            </a:r>
-          </a:p>
-          <a:p>
-            <a:r>
-              <a:rPr lang="en-US" sz="1200"/>
+              <a:t>E10 · 7:25–7:35 · LEAD: CONTENT PRESENTER</a:t>
+            </a:r>
+          </a:p>
+          <a:p>
+            <a:r>
               <a:t>SUB: the founder's own diagram — his life drawn as a sailing chart. A substitute may teach it simply from the slide, or let it stand while running the plan's Block 3 script.</a:t>
             </a:r>
           </a:p>
           <a:p>
             <a:r>
-              <a:rPr lang="en-US" sz="1200"/>
               <a:t>BEATS:</a:t>
             </a:r>
           </a:p>
           <a:p>
             <a:r>
-              <a:rPr lang="en-US" sz="1200"/>
               <a:t>1. After uphill/downhill lands, show the chart: the straight line to God's goal is unsailable — headwinds, direct opposition.</a:t>
             </a:r>
           </a:p>
           <a:p>
             <a:r>
-              <a:rPr lang="en-US" sz="1200"/>
               <a:t>2. A sailor gains against a headwind by tacking, leg by leg at forty-five degrees. Each leg IS God's direction — and each is a transformative learning path (Ephesians 2:10: works prepared beforehand, walked into leg by leg).</a:t>
             </a:r>
           </a:p>
           <a:p>
             <a:r>
-              <a:rPr lang="en-US" sz="1200"/>
               <a:t>3. The turns are heard, not seen. Stop listening mid-leg and you don't crash — you drift past the turn, competent and off-course.</a:t>
             </a:r>
           </a:p>
           <a:p>
             <a:r>
-              <a:rPr lang="en-US" sz="1200"/>
               <a:t>4. The threads: what leg A taught, leg C needed. Nobody sees that forward; everybody sees it looking back. Invite one backward look — name a past leg that trained you for a later one.</a:t>
             </a:r>
           </a:p>
           <a:p>
             <a:r>
-              <a:rPr lang="en-US" sz="1200"/>
               <a:t>GUARD: testimony architecture, not a demand for a tidy life-map — some in the room are mid-leg and cannot see any pattern yet; say so.</a:t>
             </a:r>
           </a:p>
@@ -1303,7 +1284,7 @@
           <a:lstStyle/>
           <a:p>
             <a:r>
-              <a:t>S13 · 7:35–7:36 · LEAD: CONTENT PRESENTER CIRCLE</a:t>
+              <a:t>E10 · 7:35–7:36 · LEAD: CONTENT PRESENTER CIRCLE</a:t>
             </a:r>
           </a:p>
           <a:p>
@@ -1364,25 +1345,21 @@
           <a:lstStyle/>
           <a:p>
             <a:r>
-              <a:rPr lang="en-US" sz="1200"/>
-              <a:t>S13 · 7:36–8:18 · LEAD: CONTENT PRESENTER · FAMILY PAIRS</a:t>
-            </a:r>
-          </a:p>
-          <a:p>
-            <a:r>
-              <a:rPr lang="en-US" sz="1200"/>
+              <a:t>E10 · 7:36–8:18 · LEAD: CONTENT PRESENTER · FAMILY PAIRS</a:t>
+            </a:r>
+          </a:p>
+          <a:p>
+            <a:r>
               <a:t>BEATS: 1. Phase 1 — Gifts (~20): ten quiet minutes on H13.1, then 60-second shares; the pair affirms briefly and specifically. 2. Phase 2 — Downhill (~20): five minutes on H13.2, then 90-second rounds: the person names their answer, the pair adds what it has actually seen; family speaking to family lands deepest. 3. If time compresses, compress the gifts, never the downhill.</a:t>
             </a:r>
           </a:p>
           <a:p>
             <a:r>
-              <a:rPr lang="en-US" sz="1200"/>
               <a:t>CUES: The arranged parent goes first in each round (Run Card); never cold-call a teen; pass anytime.</a:t>
             </a:r>
           </a:p>
           <a:p>
             <a:r>
-              <a:rPr lang="en-US" sz="1200"/>
               <a:t>GUARD: Push generic to specific — what does the person you're helping get to be? Witness means concrete moments, not flattery. If grief surfaces ('I haven't been doing this for years'), receive without rushing — it is part of the recognition.</a:t>
             </a:r>
           </a:p>
@@ -1429,7 +1406,7 @@
           <a:lstStyle/>
           <a:p>
             <a:r>
-              <a:t>S13 · COMMISSIONING · LEAD: CONTENT PRESENTER</a:t>
+              <a:t>E10 · COMMISSIONING · LEAD: CONTENT PRESENTER</a:t>
             </a:r>
           </a:p>
           <a:p>
@@ -1495,19 +1472,16 @@
           <a:lstStyle/>
           <a:p>
             <a:r>
-              <a:rPr lang="en-US" sz="1200"/>
-              <a:t>S13 · 8:18–8:20 · LEAD: CONTAINER HOLDER CIRCLE</a:t>
-            </a:r>
-          </a:p>
-          <a:p>
-            <a:r>
-              <a:rPr lang="en-US" sz="1200"/>
+              <a:t>E10 · 8:18–8:20 · LEAD: CONTAINER HOLDER CIRCLE</a:t>
+            </a:r>
+          </a:p>
+          <a:p>
+            <a:r>
               <a:t>BEATS: 1. Ask no one to repeat their downhill answer — what was named in the pair stays there. 2. One sentence per Lead Companion: a general observation, no names. 3. One brief observation from you across the room. 4. Land it: today's answer is a working draft — closer to true than the resume version, and it will deepen.</a:t>
             </a:r>
           </a:p>
           <a:p>
             <a:r>
-              <a:rPr lang="en-US" sz="1200"/>
               <a:t>GUARD: Five minutes only — this block gave its other five to the feedback round; a sentence each.</a:t>
             </a:r>
           </a:p>
@@ -1554,20 +1528,17 @@
           <a:lstStyle/>
           <a:p>
             <a:r>
-              <a:rPr lang="en-US" sz="1200"/>
-              <a:t>S13 · 8:20–8:24 · LEAD: CONTENT PRESENTER CIRCLE (Parent Co-Companion leads if present)</a:t>
-            </a:r>
-          </a:p>
-          <a:p>
-            <a:r>
-              <a:rPr lang="en-US" sz="1200"/>
-              <a:t>BEATS: 1. The practice: ONE small action this week aligned with your downhill answer — specific, small, not a campaign; journal what happens (H13.3). 2. The road ahead: Week 15 is the Rhythm night and finishes today's mission work; Week 21 is the family commissioning — bring the whole family, 6:30 start, light food at 6:00, details by email; Week 22 commissions the Companions-in-Formation — come to witness.</a:t>
-            </a:r>
-          </a:p>
-          <a:p>
-            <a:r>
-              <a:rPr lang="en-US" sz="1200"/>
-              <a:t>GUARD: Be explicit and warm about Week 21 — people leave today deciding who to bring. Adjust specifics to the actual closing-weeks plan.</a:t>
+              <a:t>E10 · 8:20–8:24 · LEAD: CONTENT PRESENTER CIRCLE (Parent Co-Companion leads if present)</a:t>
+            </a:r>
+          </a:p>
+          <a:p>
+            <a:r>
+              <a:t>BEATS: 1. The practice: ONE small action this week aligned with your downhill answer — specific, small, not a campaign; journal what happens (H13.3). 2. The road ahead: Evening 11 is the Rhythm night and finishes today's mission work; Evening 16 is the family commissioning — bring the whole family, 6:30 start, light food at 6:00, details by email; Evening 17 commissions the Companions-in-Formation — come to witness.</a:t>
+            </a:r>
+          </a:p>
+          <a:p>
+            <a:r>
+              <a:t>GUARD: Be explicit and warm about Evening 16 — people leave today deciding who to bring. Adjust specifics to the actual closing-weeks plan.</a:t>
             </a:r>
           </a:p>
         </p:txBody>
@@ -1613,19 +1584,16 @@
           <a:lstStyle/>
           <a:p>
             <a:r>
-              <a:rPr lang="en-US" sz="1200"/>
-              <a:t>S13 · 8:24–8:28 · LEAD: BOTH LEADERS CIRCLE</a:t>
-            </a:r>
-          </a:p>
-          <a:p>
-            <a:r>
-              <a:rPr lang="en-US" sz="1200"/>
+              <a:t>E10 · 8:24–8:28 · LEAD: BOTH LEADERS CIRCLE</a:t>
+            </a:r>
+          </a:p>
+          <a:p>
+            <a:r>
               <a:t>BEATS: 1. The leader's three, same as every week: what went well; what I'd do differently; what I'd tell someone teaching today's process. 2. Then the room, same two questions — two or three voices each is plenty. 3. Receive without defending — 'thank you' is the whole response.</a:t>
             </a:r>
           </a:p>
           <a:p>
             <a:r>
-              <a:rPr lang="en-US" sz="1200"/>
               <a:t>CUES: If a teen led today, they answer first, the adult second; the room's feedback covers both. The round may be dropped if the room needs something else — dropping it twice running goes to the team debrief.</a:t>
             </a:r>
           </a:p>
@@ -1672,7 +1640,7 @@
           <a:lstStyle/>
           <a:p>
             <a:r>
-              <a:t>S13 · 8:28–8:30 · LEAD: CONTAINER HOLDER CIRCLE</a:t>
+              <a:t>E10 · 8:28–8:30 · LEAD: CONTAINER HOLDER CIRCLE</a:t>
             </a:r>
           </a:p>
           <a:p>
@@ -5639,7 +5607,7 @@
                 </a:solidFill>
                 <a:latin typeface="Calibri"/>
               </a:rPr>
-              <a:t>Week 21 — the family commissioning: bring your whole family, even members who have not been here. We run to 8:30 that night — light food from 6:00 as the room builds</a:t>
+              <a:t>Evening 16 — the family commissioning: bring your whole family, even members who have not been here. We run to 8:30 that night — light food from 6:00 as the room builds</a:t>
             </a:r>
           </a:p>
           <a:p>
@@ -5664,7 +5632,7 @@
                 </a:solidFill>
                 <a:latin typeface="Calibri"/>
               </a:rPr>
-              <a:t>Week 22 — the commissioning of our Companions-in-Formation. Their night; come to witness it</a:t>
+              <a:t>Evening 17 — the commissioning of our Companions-in-Formation. Their night; come to witness it</a:t>
             </a:r>
           </a:p>
         </p:txBody>
@@ -7004,7 +6972,7 @@
                 </a:solidFill>
                 <a:latin typeface="Calibri"/>
               </a:rPr>
-              <a:t>SESSION 13</a:t>
+              <a:t>EVENING 10</a:t>
             </a:r>
           </a:p>
           <a:p>
@@ -7238,7 +7206,7 @@
                 </a:solidFill>
                 <a:latin typeface="Calibri"/>
               </a:rPr>
-              <a:t>Session 13 stands in the fourth box — </a:t>
+              <a:t>Evening 10 stands in the fourth box — </a:t>
             </a:r>
             <a:r>
               <a:rPr sz="1800" b="1">
@@ -7422,7 +7390,7 @@
                 </a:solidFill>
                 <a:latin typeface="Cambria"/>
               </a:rPr>
-              <a:t>Session 13 — Tonight’s Road</a:t>
+              <a:t>Evening 10 — Tonight’s Road</a:t>
             </a:r>
           </a:p>
         </p:txBody>
@@ -7495,7 +7463,7 @@
                 </a:solidFill>
                 <a:latin typeface="Calibri"/>
               </a:rPr>
-              <a:t>Week 11 check-in</a:t>
+              <a:t>Evening 8 check-in</a:t>
             </a:r>
           </a:p>
           <a:p>
@@ -8179,7 +8147,7 @@
                 </a:solidFill>
                 <a:latin typeface="Cambria"/>
               </a:rPr>
-              <a:t>Week 11 Check-In</a:t>
+              <a:t>Evening 8 Check-In</a:t>
             </a:r>
           </a:p>
         </p:txBody>

--- a/_implementation-notes/evening-series/FotH Evening Session 13 Slides DRAFT v1.pptx
+++ b/_implementation-notes/evening-series/FotH Evening Session 13 Slides DRAFT v1.pptx
@@ -5582,7 +5582,7 @@
                 </a:solidFill>
                 <a:latin typeface="Calibri"/>
               </a:rPr>
-              <a:t>Ahead: the Rhythm week — we build the practices you will carry when the Wednesdays stop</a:t>
+              <a:t>Ahead: the Rhythm week — we build the practices you will carry when the evenings stop</a:t>
             </a:r>
           </a:p>
           <a:p>
@@ -8193,7 +8193,7 @@
                 </a:solidFill>
                 <a:latin typeface="Calibri"/>
               </a:rPr>
-              <a:t>Before the break: Any Doubts? — and last week, The Return read what the break did with our practices</a:t>
+              <a:t>Before the break: Any Doubts? — and last time, The Return read what the break did with our practices</a:t>
             </a:r>
           </a:p>
           <a:p>
